--- a/studies/payload-stability/Payload_tilt_in_waves.pptx
+++ b/studies/payload-stability/Payload_tilt_in_waves.pptx
@@ -5645,7 +5645,7 @@
           <a:lstStyle/>
           <a:p>
             <a:r>
-              <a:t>At 2.65 s the cluster hub pitches 2.2 → 2.9 → 3.8° and the platform deck 1.8 → 2.5 → 3.1° (level → 5° → 10°). Away from resonance the tilt changes almost nothing.</a:t>
+              <a:t>At 2.65 s the cluster hub pitches 2.2 → 2.9 → 3.8° and the platform deck 1.8 → 2.5 → 3.1° (level → 5° → 10°): the shifted mass couples the article's heave and pitch, which resonate together at 2.6–2.9 s. Away from it, including at the buoys' rocking resonance (4.2 s), the tilt adds almost no pitch.</a:t>
             </a:r>
           </a:p>
         </p:txBody>
@@ -5785,7 +5785,7 @@
           <a:lstStyle/>
           <a:p>
             <a:r>
-              <a:t>With the preload, a payload puts the buoys' rocking resonance at ~4.2 s, where they rock 11–12.6° — level or tilted. Without the preload FloatSim gave ≤ 0.7° there and a false peak at 2.65 s.</a:t>
+              <a:t>With the preload, a payload puts the buoys' rocking resonance at ~4.2 s, where they rock 11–12.6° — level or tilted. Without the preload FloatSim gave ≤ 0.7° there and a peak at 2.65 s — the flume record's 2.76–2.9 s pitch resonance, which leaves out the load on the pins.</a:t>
             </a:r>
           </a:p>
         </p:txBody>
@@ -11615,7 +11615,7 @@
                 </a:solidFill>
                 <a:latin typeface="Calibri"/>
               </a:rPr>
-              <a:t>Pitch: </a:t>
+              <a:t>Hub / deck tilting: </a:t>
             </a:r>
             <a:r>
               <a:rPr sz="1600" b="0" i="0">
@@ -11624,7 +11624,7 @@
                 </a:solidFill>
                 <a:latin typeface="Calibri"/>
               </a:rPr>
-              <a:t>near resonance (2.65 s) the tilt turns heave into pitch — 2.2 → 3.8° on the cluster hub, 1.8 → 3.1° on the platform deck, level → 10°.</a:t>
+              <a:t>near the article's heave and tilt resonance (2.6–2.9 s; the 2.65 s wave) the tilt turns heave into pitch: 2.2 → 3.8° on the cluster hub, 1.8 → 3.1° on the platform deck, level → 10°.</a:t>
             </a:r>
           </a:p>
           <a:p>
@@ -11665,7 +11665,7 @@
                 </a:solidFill>
                 <a:latin typeface="Calibri"/>
               </a:rPr>
-              <a:t>Rocking: </a:t>
+              <a:t>Buoys' own pitch: </a:t>
             </a:r>
             <a:r>
               <a:rPr sz="1600" b="0" i="0">
@@ -11674,7 +11674,7 @@
                 </a:solidFill>
                 <a:latin typeface="Calibri"/>
               </a:rPr>
-              <a:t>all the buoys rock together at one period, ~4.2 s, whatever the tilt — keep a loaded article out of waves near 4.2 s.</a:t>
+              <a:t>each buoy rocking on its gimbal — the flume record's 2.76–2.9 s pitch resonance — moves to ~4.2 s with a payload, whatever the tilt: keep a loaded article out of waves near 4.2 s.</a:t>
             </a:r>
           </a:p>
         </p:txBody>
@@ -14386,7 +14386,7 @@
                 </a:solidFill>
                 <a:latin typeface="Calibri"/>
               </a:rPr>
-              <a:t>Near resonance, the tilt turns heave into pitch</a:t>
+              <a:t>Near the heave resonance, the tilt turns heave into pitch</a:t>
             </a:r>
           </a:p>
         </p:txBody>
@@ -14425,7 +14425,7 @@
                 </a:solidFill>
                 <a:latin typeface="Calibri"/>
               </a:rPr>
-              <a:t>Pitch of the hub / deck against wave period</a:t>
+              <a:t>Hub / deck pitch (the whole article tilting; not the buoys' own pitch) — resonates with heave at 2.6–2.9 s</a:t>
             </a:r>
           </a:p>
         </p:txBody>
@@ -14500,7 +14500,7 @@
                 </a:solidFill>
                 <a:latin typeface="Calibri"/>
               </a:rPr>
-              <a:t>At 2.65 s the cluster hub pitches 2.2 → 2.9 → 3.8° and the platform deck 1.8 → 2.5 → 3.1° (level → 5° → 10°). Away from resonance the tilt changes almost nothing.</a:t>
+              <a:t>At 2.65 s the cluster hub pitches 2.2 → 2.9 → 3.8° and the platform deck 1.8 → 2.5 → 3.1° (level → 5° → 10°): the shifted mass couples the article's heave and pitch, which resonate together at 2.6–2.9 s. Away from it, including at the buoys' rocking resonance (4.2 s), the tilt adds almost no pitch.</a:t>
             </a:r>
           </a:p>
         </p:txBody>
@@ -14783,7 +14783,7 @@
                 </a:solidFill>
                 <a:latin typeface="Calibri"/>
               </a:rPr>
-              <a:t>Buoy rocking on its gimbal (dashed: FloatSim without the weight preload, payload centred)</a:t>
+              <a:t>The buoys' own pitch on their gimbals (dashed: FloatSim without the weight preload, payload centred)</a:t>
             </a:r>
           </a:p>
         </p:txBody>
@@ -14858,7 +14858,7 @@
                 </a:solidFill>
                 <a:latin typeface="Calibri"/>
               </a:rPr>
-              <a:t>With the preload, a payload puts the buoys' rocking resonance at ~4.2 s, where they rock 11–12.6° — level or tilted. Without the preload FloatSim gave ≤ 0.7° there and a false peak at 2.65 s.</a:t>
+              <a:t>With the preload, a payload puts the buoys' rocking resonance at ~4.2 s, where they rock 11–12.6° — level or tilted. Without the preload FloatSim gave ≤ 0.7° there and a peak at 2.65 s — the flume record's 2.76–2.9 s pitch resonance, which leaves out the load on the pins.</a:t>
             </a:r>
           </a:p>
         </p:txBody>

--- a/studies/payload-stability/Payload_tilt_in_waves.pptx
+++ b/studies/payload-stability/Payload_tilt_in_waves.pptx
@@ -17,6 +17,9 @@
     <p:sldId id="265" r:id="rId17"/>
     <p:sldId id="266" r:id="rId18"/>
     <p:sldId id="267" r:id="rId19"/>
+    <p:sldId id="268" r:id="rId20"/>
+    <p:sldId id="269" r:id="rId21"/>
+    <p:sldId id="270" r:id="rId22"/>
   </p:sldIdLst>
   <p:sldSz cx="12191695" cy="6858000" type="screen4x3"/>
   <p:notesSz cx="6858000" cy="9144000"/>
@@ -650,7 +653,7 @@
 </c:chartSpace>
 </file>
 
-<file path=ppt/charts/chart2.xml><?xml version="1.0" encoding="utf-8"?>
+<file path=ppt/charts/chart10.xml><?xml version="1.0" encoding="utf-8"?>
 <c:chartSpace xmlns:c="http://schemas.openxmlformats.org/drawingml/2006/chart" xmlns:a="http://schemas.openxmlformats.org/drawingml/2006/main" xmlns:r="http://schemas.openxmlformats.org/officeDocument/2006/relationships">
   <c:chart>
     <c:title>
@@ -738,25 +741,25 @@
                 <c:formatCode>General</c:formatCode>
                 <c:ptCount val="7"/>
                 <c:pt idx="0">
-                  <c:v>0.24654266905214337</c:v>
+                  <c:v>0.004327078755833553</c:v>
                 </c:pt>
                 <c:pt idx="1">
-                  <c:v>10.633869162105198</c:v>
+                  <c:v>0.1049659548687655</c:v>
                 </c:pt>
                 <c:pt idx="2">
-                  <c:v>37.766843118871115</c:v>
+                  <c:v>0.2699669797570685</c:v>
                 </c:pt>
                 <c:pt idx="3">
-                  <c:v>65.76057860599614</c:v>
+                  <c:v>0.37065148458361197</c:v>
                 </c:pt>
                 <c:pt idx="4">
-                  <c:v>62.88814645443613</c:v>
+                  <c:v>0.20210730102679259</c:v>
                 </c:pt>
                 <c:pt idx="5">
-                  <c:v>55.452269006207196</c:v>
+                  <c:v>0.1241020825262931</c:v>
                 </c:pt>
                 <c:pt idx="6">
-                  <c:v>52.64809512443063</c:v>
+                  <c:v>0.0831331314472477</c:v>
                 </c:pt>
               </c:numCache>
             </c:numRef>
@@ -824,25 +827,25 @@
                 <c:formatCode>General</c:formatCode>
                 <c:ptCount val="7"/>
                 <c:pt idx="0">
-                  <c:v>0.1558403909220491</c:v>
+                  <c:v>0.0027352071995746245</c:v>
                 </c:pt>
                 <c:pt idx="1">
-                  <c:v>7.389536749705052</c:v>
+                  <c:v>0.07294305170413372</c:v>
                 </c:pt>
                 <c:pt idx="2">
-                  <c:v>29.60625473480701</c:v>
+                  <c:v>0.21166959067426505</c:v>
                 </c:pt>
                 <c:pt idx="3">
-                  <c:v>60.332459528829915</c:v>
+                  <c:v>0.3392056428603785</c:v>
                 </c:pt>
                 <c:pt idx="4">
-                  <c:v>67.17858606707232</c:v>
+                  <c:v>0.2163752253708586</c:v>
                 </c:pt>
                 <c:pt idx="5">
-                  <c:v>56.662817890171034</c:v>
+                  <c:v>0.12589773066981297</c:v>
                 </c:pt>
                 <c:pt idx="6">
-                  <c:v>53.192873861740715</c:v>
+                  <c:v>0.08396907581201787</c:v>
                 </c:pt>
               </c:numCache>
             </c:numRef>
@@ -910,25 +913,25 @@
                 <c:formatCode>General</c:formatCode>
                 <c:ptCount val="7"/>
                 <c:pt idx="0">
-                  <c:v>0.18395140265862608</c:v>
+                  <c:v>0.011683458873625355</c:v>
                 </c:pt>
                 <c:pt idx="1">
-                  <c:v>7.163653725001953</c:v>
+                  <c:v>0.0774279138465955</c:v>
                 </c:pt>
                 <c:pt idx="2">
-                  <c:v>27.534161294812446</c:v>
+                  <c:v>0.20069905806643798</c:v>
                 </c:pt>
                 <c:pt idx="3">
-                  <c:v>55.87230736776096</c:v>
+                  <c:v>0.32222367841021354</c:v>
                 </c:pt>
                 <c:pt idx="4">
-                  <c:v>66.88071889309504</c:v>
+                  <c:v>0.2205125785011183</c:v>
                 </c:pt>
                 <c:pt idx="5">
-                  <c:v>56.68190655377057</c:v>
+                  <c:v>0.12568424566597</c:v>
                 </c:pt>
                 <c:pt idx="6">
-                  <c:v>53.204997441470795</c:v>
+                  <c:v>0.08429563427951195</c:v>
                 </c:pt>
               </c:numCache>
             </c:numRef>
@@ -996,25 +999,25 @@
                 <c:formatCode>General</c:formatCode>
                 <c:ptCount val="7"/>
                 <c:pt idx="0">
-                  <c:v>0.3472292441437816</c:v>
+                  <c:v>0.032727554350576775</c:v>
                 </c:pt>
                 <c:pt idx="1">
-                  <c:v>7.092068404341339</c:v>
+                  <c:v>0.08963562584518137</c:v>
                 </c:pt>
                 <c:pt idx="2">
-                  <c:v>25.747156234670182</c:v>
+                  <c:v>0.1893912379418016</c:v>
                 </c:pt>
                 <c:pt idx="3">
-                  <c:v>49.51435713217373</c:v>
+                  <c:v>0.30200988550119234</c:v>
                 </c:pt>
                 <c:pt idx="4">
-                  <c:v>66.41980769239937</c:v>
+                  <c:v>0.2354644641062543</c:v>
                 </c:pt>
                 <c:pt idx="5">
-                  <c:v>57.20311689518064</c:v>
+                  <c:v>0.1378122093113444</c:v>
                 </c:pt>
                 <c:pt idx="6">
-                  <c:v>53.24812469487056</c:v>
+                  <c:v>0.08544526487917442</c:v>
                 </c:pt>
               </c:numCache>
             </c:numRef>
@@ -1094,7 +1097,7 @@
         <c:axId val="-2129643912"/>
         <c:scaling>
           <c:orientation val="minMax"/>
-          <c:max val="80.0"/>
+          <c:max val="0.5"/>
           <c:min val="0.0"/>
         </c:scaling>
         <c:delete val="0"/>
@@ -1120,7 +1123,7 @@
                       <a:srgbClr val="2B3A44"/>
                     </a:solidFill>
                   </a:rPr>
-                  <a:t>heave amplitude (mm)</a:t>
+                  <a:t>vertical acceleration (m/s²)</a:t>
                 </a:r>
               </a:p>
             </c:rich>
@@ -1200,7 +1203,7 @@
 </c:chartSpace>
 </file>
 
-<file path=ppt/charts/chart3.xml><?xml version="1.0" encoding="utf-8"?>
+<file path=ppt/charts/chart11.xml><?xml version="1.0" encoding="utf-8"?>
 <c:chartSpace xmlns:c="http://schemas.openxmlformats.org/drawingml/2006/chart" xmlns:a="http://schemas.openxmlformats.org/drawingml/2006/main" xmlns:r="http://schemas.openxmlformats.org/officeDocument/2006/relationships">
   <c:chart>
     <c:title>
@@ -1288,25 +1291,25 @@
                 <c:formatCode>General</c:formatCode>
                 <c:ptCount val="7"/>
                 <c:pt idx="0">
-                  <c:v>0.19541483709398186</c:v>
+                  <c:v>0.9485790259904476</c:v>
                 </c:pt>
                 <c:pt idx="1">
-                  <c:v>0.9159437350842081</c:v>
+                  <c:v>0.9884359972235353</c:v>
                 </c:pt>
                 <c:pt idx="2">
-                  <c:v>1.9713811892960367</c:v>
+                  <c:v>1.0543849872101672</c:v>
                 </c:pt>
                 <c:pt idx="3">
-                  <c:v>2.5387437290907897</c:v>
+                  <c:v>1.1597144403028727</c:v>
                 </c:pt>
                 <c:pt idx="4">
-                  <c:v>1.2410932599857063</c:v>
+                  <c:v>0.34580803348035327</c:v>
                 </c:pt>
                 <c:pt idx="5">
-                  <c:v>0.7409011321224129</c:v>
+                  <c:v>0.10719337225764625</c:v>
                 </c:pt>
                 <c:pt idx="6">
-                  <c:v>0.49159162245332383</c:v>
+                  <c:v>0.04425965072312955</c:v>
                 </c:pt>
               </c:numCache>
             </c:numRef>
@@ -1374,25 +1377,25 @@
                 <c:formatCode>General</c:formatCode>
                 <c:ptCount val="7"/>
                 <c:pt idx="0">
-                  <c:v>0.14471614255939977</c:v>
+                  <c:v>0.6295021177010461</c:v>
                 </c:pt>
                 <c:pt idx="1">
-                  <c:v>0.7719319203089562</c:v>
+                  <c:v>0.617567607716437</c:v>
                 </c:pt>
                 <c:pt idx="2">
-                  <c:v>1.710026907034074</c:v>
+                  <c:v>0.6106705700025659</c:v>
                 </c:pt>
                 <c:pt idx="3">
-                  <c:v>2.1523564266016697</c:v>
+                  <c:v>0.4322650618233918</c:v>
                 </c:pt>
                 <c:pt idx="4">
-                  <c:v>1.1743850904300055</c:v>
+                  <c:v>0.13111226287106537</c:v>
                 </c:pt>
                 <c:pt idx="5">
-                  <c:v>0.7164577771378586</c:v>
+                  <c:v>0.6009400453649525</c:v>
                 </c:pt>
                 <c:pt idx="6">
-                  <c:v>0.47831313510389084</c:v>
+                  <c:v>0.07890611086916395</c:v>
                 </c:pt>
               </c:numCache>
             </c:numRef>
@@ -1460,25 +1463,25 @@
                 <c:formatCode>General</c:formatCode>
                 <c:ptCount val="7"/>
                 <c:pt idx="0">
-                  <c:v>0.22356539714907317</c:v>
+                  <c:v>0.6319463006497784</c:v>
                 </c:pt>
                 <c:pt idx="1">
-                  <c:v>0.8474863520902507</c:v>
+                  <c:v>0.6280249210553056</c:v>
                 </c:pt>
                 <c:pt idx="2">
-                  <c:v>2.1543834691936348</c:v>
+                  <c:v>0.6926277303123612</c:v>
                 </c:pt>
                 <c:pt idx="3">
-                  <c:v>2.909459543130526</c:v>
+                  <c:v>0.5399191726446732</c:v>
                 </c:pt>
                 <c:pt idx="4">
-                  <c:v>1.337557053468973</c:v>
+                  <c:v>0.10034496908898509</c:v>
                 </c:pt>
                 <c:pt idx="5">
-                  <c:v>0.7684999677660537</c:v>
+                  <c:v>0.5632616324887088</c:v>
                 </c:pt>
                 <c:pt idx="6">
-                  <c:v>0.4677206109400096</c:v>
+                  <c:v>0.07651568957569395</c:v>
                 </c:pt>
               </c:numCache>
             </c:numRef>
@@ -1546,25 +1549,25 @@
                 <c:formatCode>General</c:formatCode>
                 <c:ptCount val="7"/>
                 <c:pt idx="0">
-                  <c:v>0.35827286748842735</c:v>
+                  <c:v>0.6392972320705013</c:v>
                 </c:pt>
                 <c:pt idx="1">
-                  <c:v>0.9659144427352395</c:v>
+                  <c:v>0.6459557674768104</c:v>
                 </c:pt>
                 <c:pt idx="2">
-                  <c:v>2.6855000779147473</c:v>
+                  <c:v>0.7869196816784383</c:v>
                 </c:pt>
                 <c:pt idx="3">
-                  <c:v>3.804496659631551</c:v>
+                  <c:v>0.6801901742466917</c:v>
                 </c:pt>
                 <c:pt idx="4">
-                  <c:v>1.622766461736646</c:v>
+                  <c:v>0.05640353425047307</c:v>
                 </c:pt>
                 <c:pt idx="5">
-                  <c:v>1.0206603126447487</c:v>
+                  <c:v>0.4762095746350085</c:v>
                 </c:pt>
                 <c:pt idx="6">
-                  <c:v>0.43149046301352323</c:v>
+                  <c:v>0.06895649094399953</c:v>
                 </c:pt>
               </c:numCache>
             </c:numRef>
@@ -1644,7 +1647,7 @@
         <c:axId val="-2129643912"/>
         <c:scaling>
           <c:orientation val="minMax"/>
-          <c:max val="4.0"/>
+          <c:max val="1.2"/>
           <c:min val="0.0"/>
         </c:scaling>
         <c:delete val="0"/>
@@ -1670,7 +1673,7 @@
                       <a:srgbClr val="2B3A44"/>
                     </a:solidFill>
                   </a:rPr>
-                  <a:t>pitch amplitude (°)</a:t>
+                  <a:t>lateral acceleration (m/s²)</a:t>
                 </a:r>
               </a:p>
             </c:rich>
@@ -1732,7 +1735,7 @@
 </c:chartSpace>
 </file>
 
-<file path=ppt/charts/chart4.xml><?xml version="1.0" encoding="utf-8"?>
+<file path=ppt/charts/chart12.xml><?xml version="1.0" encoding="utf-8"?>
 <c:chartSpace xmlns:c="http://schemas.openxmlformats.org/drawingml/2006/chart" xmlns:a="http://schemas.openxmlformats.org/drawingml/2006/main" xmlns:r="http://schemas.openxmlformats.org/officeDocument/2006/relationships">
   <c:chart>
     <c:title>
@@ -1820,25 +1823,25 @@
                 <c:formatCode>General</c:formatCode>
                 <c:ptCount val="7"/>
                 <c:pt idx="0">
-                  <c:v>0.10432955866264143</c:v>
+                  <c:v>0.12211361007488085</c:v>
                 </c:pt>
                 <c:pt idx="1">
-                  <c:v>0.7149261907877004</c:v>
+                  <c:v>0.6310568049040537</c:v>
                 </c:pt>
                 <c:pt idx="2">
-                  <c:v>1.71178517447982</c:v>
+                  <c:v>0.7885210696854433</c:v>
                 </c:pt>
                 <c:pt idx="3">
-                  <c:v>2.2942992835514318</c:v>
+                  <c:v>0.7363155503144678</c:v>
                 </c:pt>
                 <c:pt idx="4">
-                  <c:v>1.2491578500554803</c:v>
+                  <c:v>0.43766919167569235</c:v>
                 </c:pt>
                 <c:pt idx="5">
-                  <c:v>0.7420553520334606</c:v>
+                  <c:v>0.12131725752429383</c:v>
                 </c:pt>
                 <c:pt idx="6">
-                  <c:v>0.49334216574291423</c:v>
+                  <c:v>0.049370051768897964</c:v>
                 </c:pt>
               </c:numCache>
             </c:numRef>
@@ -1906,25 +1909,25 @@
                 <c:formatCode>General</c:formatCode>
                 <c:ptCount val="7"/>
                 <c:pt idx="0">
-                  <c:v>0.0666653903808403</c:v>
+                  <c:v>0.08047079492985917</c:v>
                 </c:pt>
                 <c:pt idx="1">
-                  <c:v>0.45945728100752015</c:v>
+                  <c:v>0.3947505669702504</c:v>
                 </c:pt>
                 <c:pt idx="2">
-                  <c:v>1.2341095652986258</c:v>
+                  <c:v>0.48525806832400403</c:v>
                 </c:pt>
                 <c:pt idx="3">
-                  <c:v>1.824459723368869</c:v>
+                  <c:v>0.39799353793087</c:v>
                 </c:pt>
                 <c:pt idx="4">
-                  <c:v>1.0994014809730104</c:v>
+                  <c:v>0.09093681186938936</c:v>
                 </c:pt>
                 <c:pt idx="5">
-                  <c:v>0.5280225627644667</c:v>
+                  <c:v>0.518141936319724</c:v>
                 </c:pt>
                 <c:pt idx="6">
-                  <c:v>0.5200412570465928</c:v>
+                  <c:v>0.10382359369094218</c:v>
                 </c:pt>
               </c:numCache>
             </c:numRef>
@@ -1992,25 +1995,25 @@
                 <c:formatCode>General</c:formatCode>
                 <c:ptCount val="7"/>
                 <c:pt idx="0">
-                  <c:v>0.11695485317453519</c:v>
+                  <c:v>0.08693454290840585</c:v>
                 </c:pt>
                 <c:pt idx="1">
-                  <c:v>0.5132711392896417</c:v>
+                  <c:v>0.3977786389169194</c:v>
                 </c:pt>
                 <c:pt idx="2">
-                  <c:v>1.516047309457366</c:v>
+                  <c:v>0.5317029188232106</c:v>
                 </c:pt>
                 <c:pt idx="3">
-                  <c:v>2.4820865171167896</c:v>
+                  <c:v>0.49013580315941124</c:v>
                 </c:pt>
                 <c:pt idx="4">
-                  <c:v>1.30973913945026</c:v>
+                  <c:v>0.048674579911032294</c:v>
                 </c:pt>
                 <c:pt idx="5">
-                  <c:v>0.6380281594287418</c:v>
+                  <c:v>0.49403396679056294</c:v>
                 </c:pt>
                 <c:pt idx="6">
-                  <c:v>0.5081037263872283</c:v>
+                  <c:v>0.09721137131661488</c:v>
                 </c:pt>
               </c:numCache>
             </c:numRef>
@@ -2078,25 +2081,25 @@
                 <c:formatCode>General</c:formatCode>
                 <c:ptCount val="7"/>
                 <c:pt idx="0">
-                  <c:v>0.1798731578300252</c:v>
+                  <c:v>0.10985847724886752</c:v>
                 </c:pt>
                 <c:pt idx="1">
-                  <c:v>0.5640861773965655</c:v>
+                  <c:v>0.404738724494935</c:v>
                 </c:pt>
                 <c:pt idx="2">
-                  <c:v>1.7180004162933997</c:v>
+                  <c:v>0.5683249964218594</c:v>
                 </c:pt>
                 <c:pt idx="3">
-                  <c:v>3.069027643836406</c:v>
+                  <c:v>0.5982634235919916</c:v>
                 </c:pt>
                 <c:pt idx="4">
-                  <c:v>1.7149530829557686</c:v>
+                  <c:v>0.04639831551355259</c:v>
                 </c:pt>
                 <c:pt idx="5">
-                  <c:v>1.0293527760487973</c:v>
+                  <c:v>0.41076811330879054</c:v>
                 </c:pt>
                 <c:pt idx="6">
-                  <c:v>0.4764604274571976</c:v>
+                  <c:v>0.07997154019377853</c:v>
                 </c:pt>
               </c:numCache>
             </c:numRef>
@@ -2176,7 +2179,7 @@
         <c:axId val="-2129643912"/>
         <c:scaling>
           <c:orientation val="minMax"/>
-          <c:max val="4.0"/>
+          <c:max val="1.2"/>
           <c:min val="0.0"/>
         </c:scaling>
         <c:delete val="0"/>
@@ -2202,7 +2205,7 @@
                       <a:srgbClr val="2B3A44"/>
                     </a:solidFill>
                   </a:rPr>
-                  <a:t>pitch amplitude (°)</a:t>
+                  <a:t>lateral acceleration (m/s²)</a:t>
                 </a:r>
               </a:p>
             </c:rich>
@@ -2282,7 +2285,7 @@
 </c:chartSpace>
 </file>
 
-<file path=ppt/charts/chart5.xml><?xml version="1.0" encoding="utf-8"?>
+<file path=ppt/charts/chart2.xml><?xml version="1.0" encoding="utf-8"?>
 <c:chartSpace xmlns:c="http://schemas.openxmlformats.org/drawingml/2006/chart" xmlns:a="http://schemas.openxmlformats.org/drawingml/2006/main" xmlns:r="http://schemas.openxmlformats.org/officeDocument/2006/relationships">
   <c:chart>
     <c:title>
@@ -2297,7 +2300,7 @@
                   <a:srgbClr val="2B3A44"/>
                 </a:solidFill>
               </a:rPr>
-              <a:t>Cluster, 12.5 kg on the hub</a:t>
+              <a:t>Platform, 50 kg on the deck</a:t>
             </a:r>
           </a:p>
         </c:rich>
@@ -2370,25 +2373,25 @@
                 <c:formatCode>General</c:formatCode>
                 <c:ptCount val="7"/>
                 <c:pt idx="0">
-                  <c:v>638.3741972606417</c:v>
+                  <c:v>0.24654266905214337</c:v>
                 </c:pt>
                 <c:pt idx="1">
-                  <c:v>624.962945542578</c:v>
+                  <c:v>10.633869162105198</c:v>
                 </c:pt>
                 <c:pt idx="2">
-                  <c:v>606.3775182894211</c:v>
+                  <c:v>37.766843118871115</c:v>
                 </c:pt>
                 <c:pt idx="3">
-                  <c:v>604.3098450746237</c:v>
+                  <c:v>65.76057860599614</c:v>
                 </c:pt>
                 <c:pt idx="4">
-                  <c:v>673.6425044068574</c:v>
+                  <c:v>62.88814645443613</c:v>
                 </c:pt>
                 <c:pt idx="5">
-                  <c:v>684.0460951920405</c:v>
+                  <c:v>55.452269006207196</c:v>
                 </c:pt>
                 <c:pt idx="6">
-                  <c:v>687.4382597183736</c:v>
+                  <c:v>52.64809512443063</c:v>
                 </c:pt>
               </c:numCache>
             </c:numRef>
@@ -2456,25 +2459,25 @@
                 <c:formatCode>General</c:formatCode>
                 <c:ptCount val="7"/>
                 <c:pt idx="0">
-                  <c:v>474.65517153753063</c:v>
+                  <c:v>0.1558403909220491</c:v>
                 </c:pt>
                 <c:pt idx="1">
-                  <c:v>464.7454174015702</c:v>
+                  <c:v>7.389536749705052</c:v>
                 </c:pt>
                 <c:pt idx="2">
-                  <c:v>446.2497629347992</c:v>
+                  <c:v>29.60625473480701</c:v>
                 </c:pt>
                 <c:pt idx="3">
-                  <c:v>444.4345541492434</c:v>
+                  <c:v>60.332459528829915</c:v>
                 </c:pt>
                 <c:pt idx="4">
-                  <c:v>503.318449122139</c:v>
+                  <c:v>67.17858606707232</c:v>
                 </c:pt>
                 <c:pt idx="5">
-                  <c:v>485.26209785730134</c:v>
+                  <c:v>56.662817890171034</c:v>
                 </c:pt>
                 <c:pt idx="6">
-                  <c:v>521.997938162135</c:v>
+                  <c:v>53.192873861740715</c:v>
                 </c:pt>
               </c:numCache>
             </c:numRef>
@@ -2542,25 +2545,25 @@
                 <c:formatCode>General</c:formatCode>
                 <c:ptCount val="7"/>
                 <c:pt idx="0">
-                  <c:v>448.40119341511036</c:v>
+                  <c:v>0.18395140265862608</c:v>
                 </c:pt>
                 <c:pt idx="1">
-                  <c:v>438.9026774544253</c:v>
+                  <c:v>7.163653725001953</c:v>
                 </c:pt>
                 <c:pt idx="2">
-                  <c:v>420.3278969491626</c:v>
+                  <c:v>27.534161294812446</c:v>
                 </c:pt>
                 <c:pt idx="3">
-                  <c:v>416.85192376819083</c:v>
+                  <c:v>55.87230736776096</c:v>
                 </c:pt>
                 <c:pt idx="4">
-                  <c:v>476.59267110921786</c:v>
+                  <c:v>66.88071889309504</c:v>
                 </c:pt>
                 <c:pt idx="5">
-                  <c:v>460.38575434175266</c:v>
+                  <c:v>56.68190655377057</c:v>
                 </c:pt>
                 <c:pt idx="6">
-                  <c:v>496.22082954164904</c:v>
+                  <c:v>53.204997441470795</c:v>
                 </c:pt>
               </c:numCache>
             </c:numRef>
@@ -2628,25 +2631,25 @@
                 <c:formatCode>General</c:formatCode>
                 <c:ptCount val="7"/>
                 <c:pt idx="0">
-                  <c:v>422.32080407686465</c:v>
+                  <c:v>0.3472292441437816</c:v>
                 </c:pt>
                 <c:pt idx="1">
-                  <c:v>413.23579291395953</c:v>
+                  <c:v>7.092068404341339</c:v>
                 </c:pt>
                 <c:pt idx="2">
-                  <c:v>394.7302584614509</c:v>
+                  <c:v>25.747156234670182</c:v>
                 </c:pt>
                 <c:pt idx="3">
-                  <c:v>389.46419011872126</c:v>
+                  <c:v>49.51435713217373</c:v>
                 </c:pt>
                 <c:pt idx="4">
-                  <c:v>449.6680327130324</c:v>
+                  <c:v>66.41980769239937</c:v>
                 </c:pt>
                 <c:pt idx="5">
-                  <c:v>435.0891633271792</c:v>
+                  <c:v>57.20311689518064</c:v>
                 </c:pt>
                 <c:pt idx="6">
-                  <c:v>470.57239122703453</c:v>
+                  <c:v>53.24812469487056</c:v>
                 </c:pt>
               </c:numCache>
             </c:numRef>
@@ -2726,7 +2729,7 @@
         <c:axId val="-2129643912"/>
         <c:scaling>
           <c:orientation val="minMax"/>
-          <c:max val="700.0"/>
+          <c:max val="80.0"/>
           <c:min val="0.0"/>
         </c:scaling>
         <c:delete val="0"/>
@@ -2752,7 +2755,7 @@
                       <a:srgbClr val="2B3A44"/>
                     </a:solidFill>
                   </a:rPr>
-                  <a:t>smallest pin freeboard (mm)</a:t>
+                  <a:t>heave amplitude (mm)</a:t>
                 </a:r>
               </a:p>
             </c:rich>
@@ -2789,6 +2792,24 @@
         <c:crossBetween val="midCat"/>
       </c:valAx>
     </c:plotArea>
+    <c:legend>
+      <c:legendPos val="b"/>
+      <c:layout/>
+      <c:overlay val="0"/>
+      <c:txPr>
+        <a:bodyPr/>
+        <a:lstStyle/>
+        <a:p>
+          <a:pPr>
+            <a:defRPr sz="1100">
+              <a:solidFill>
+                <a:srgbClr val="2B3A44"/>
+              </a:solidFill>
+            </a:defRPr>
+          </a:pPr>
+        </a:p>
+      </c:txPr>
+    </c:legend>
     <c:plotVisOnly val="1"/>
     <c:dispBlanksAs val="gap"/>
     <c:showDLblsOverMax val="0"/>
@@ -2814,7 +2835,7 @@
 </c:chartSpace>
 </file>
 
-<file path=ppt/charts/chart6.xml><?xml version="1.0" encoding="utf-8"?>
+<file path=ppt/charts/chart3.xml><?xml version="1.0" encoding="utf-8"?>
 <c:chartSpace xmlns:c="http://schemas.openxmlformats.org/drawingml/2006/chart" xmlns:a="http://schemas.openxmlformats.org/drawingml/2006/main" xmlns:r="http://schemas.openxmlformats.org/officeDocument/2006/relationships">
   <c:chart>
     <c:title>
@@ -2829,7 +2850,7 @@
                   <a:srgbClr val="2B3A44"/>
                 </a:solidFill>
               </a:rPr>
-              <a:t>Platform, 50 kg on the deck</a:t>
+              <a:t>Cluster, 12.5 kg on the hub</a:t>
             </a:r>
           </a:p>
         </c:rich>
@@ -2902,25 +2923,25 @@
                 <c:formatCode>General</c:formatCode>
                 <c:ptCount val="7"/>
                 <c:pt idx="0">
-                  <c:v>618.9471198186249</c:v>
+                  <c:v>0.19541483709398186</c:v>
                 </c:pt>
                 <c:pt idx="1">
-                  <c:v>605.6917969634725</c:v>
+                  <c:v>0.9159437350842081</c:v>
                 </c:pt>
                 <c:pt idx="2">
-                  <c:v>587.6662603469896</c:v>
+                  <c:v>1.9713811892960367</c:v>
                 </c:pt>
                 <c:pt idx="3">
-                  <c:v>592.2878895522662</c:v>
+                  <c:v>2.5387437290907897</c:v>
                 </c:pt>
                 <c:pt idx="4">
-                  <c:v>651.878751362749</c:v>
+                  <c:v>1.2410932599857063</c:v>
                 </c:pt>
                 <c:pt idx="5">
-                  <c:v>664.0658753590062</c:v>
+                  <c:v>0.7409011321224129</c:v>
                 </c:pt>
                 <c:pt idx="6">
-                  <c:v>667.5990792421682</c:v>
+                  <c:v>0.49159162245332383</c:v>
                 </c:pt>
               </c:numCache>
             </c:numRef>
@@ -2988,25 +3009,25 @@
                 <c:formatCode>General</c:formatCode>
                 <c:ptCount val="7"/>
                 <c:pt idx="0">
-                  <c:v>455.0567275052889</c:v>
+                  <c:v>0.14471614255939977</c:v>
                 </c:pt>
                 <c:pt idx="1">
-                  <c:v>445.15336214934655</c:v>
+                  <c:v>0.7719319203089562</c:v>
                 </c:pt>
                 <c:pt idx="2">
-                  <c:v>426.56856754697355</c:v>
+                  <c:v>1.710026907034074</c:v>
                 </c:pt>
                 <c:pt idx="3">
-                  <c:v>424.15974076861795</c:v>
+                  <c:v>2.1523564266016697</c:v>
                 </c:pt>
                 <c:pt idx="4">
-                  <c:v>483.3456914337754</c:v>
+                  <c:v>1.1743850904300055</c:v>
                 </c:pt>
                 <c:pt idx="5">
-                  <c:v>470.5176105966767</c:v>
+                  <c:v>0.7164577771378586</c:v>
                 </c:pt>
                 <c:pt idx="6">
-                  <c:v>501.37817409001286</c:v>
+                  <c:v>0.47831313510389084</c:v>
                 </c:pt>
               </c:numCache>
             </c:numRef>
@@ -3074,25 +3095,25 @@
                 <c:formatCode>General</c:formatCode>
                 <c:ptCount val="7"/>
                 <c:pt idx="0">
-                  <c:v>384.64210688333577</c:v>
+                  <c:v>0.22356539714907317</c:v>
                 </c:pt>
                 <c:pt idx="1">
-                  <c:v>376.10579227157587</c:v>
+                  <c:v>0.8474863520902507</c:v>
                 </c:pt>
                 <c:pt idx="2">
-                  <c:v>358.13672438949305</c:v>
+                  <c:v>2.1543834691936348</c:v>
                 </c:pt>
                 <c:pt idx="3">
-                  <c:v>353.931096356751</c:v>
+                  <c:v>2.909459543130526</c:v>
                 </c:pt>
                 <c:pt idx="4">
-                  <c:v>411.02557180196453</c:v>
+                  <c:v>1.337557053468973</c:v>
                 </c:pt>
                 <c:pt idx="5">
-                  <c:v>405.78948462798763</c:v>
+                  <c:v>0.7684999677660537</c:v>
                 </c:pt>
                 <c:pt idx="6">
-                  <c:v>431.89021135416317</c:v>
+                  <c:v>0.4677206109400096</c:v>
                 </c:pt>
               </c:numCache>
             </c:numRef>
@@ -3160,25 +3181,25 @@
                 <c:formatCode>General</c:formatCode>
                 <c:ptCount val="7"/>
                 <c:pt idx="0">
-                  <c:v>314.981450986061</c:v>
+                  <c:v>0.35827286748842735</c:v>
                 </c:pt>
                 <c:pt idx="1">
-                  <c:v>307.23306495379416</c:v>
+                  <c:v>0.9659144427352395</c:v>
                 </c:pt>
                 <c:pt idx="2">
-                  <c:v>291.0008674556055</c:v>
+                  <c:v>2.6855000779147473</c:v>
                 </c:pt>
                 <c:pt idx="3">
-                  <c:v>282.37328660411623</c:v>
+                  <c:v>3.804496659631551</c:v>
                 </c:pt>
                 <c:pt idx="4">
-                  <c:v>336.48539131478736</c:v>
+                  <c:v>1.622766461736646</c:v>
                 </c:pt>
                 <c:pt idx="5">
-                  <c:v>332.01664639706473</c:v>
+                  <c:v>1.0206603126447487</c:v>
                 </c:pt>
                 <c:pt idx="6">
-                  <c:v>362.5109398822574</c:v>
+                  <c:v>0.43149046301352323</c:v>
                 </c:pt>
               </c:numCache>
             </c:numRef>
@@ -3258,7 +3279,7 @@
         <c:axId val="-2129643912"/>
         <c:scaling>
           <c:orientation val="minMax"/>
-          <c:max val="700.0"/>
+          <c:max val="4.0"/>
           <c:min val="0.0"/>
         </c:scaling>
         <c:delete val="0"/>
@@ -3284,7 +3305,7 @@
                       <a:srgbClr val="2B3A44"/>
                     </a:solidFill>
                   </a:rPr>
-                  <a:t>smallest pin freeboard (mm)</a:t>
+                  <a:t>pitch amplitude (°)</a:t>
                 </a:r>
               </a:p>
             </c:rich>
@@ -3321,24 +3342,6 @@
         <c:crossBetween val="midCat"/>
       </c:valAx>
     </c:plotArea>
-    <c:legend>
-      <c:legendPos val="b"/>
-      <c:layout/>
-      <c:overlay val="0"/>
-      <c:txPr>
-        <a:bodyPr/>
-        <a:lstStyle/>
-        <a:p>
-          <a:pPr>
-            <a:defRPr sz="1100">
-              <a:solidFill>
-                <a:srgbClr val="2B3A44"/>
-              </a:solidFill>
-            </a:defRPr>
-          </a:pPr>
-        </a:p>
-      </c:txPr>
-    </c:legend>
     <c:plotVisOnly val="1"/>
     <c:dispBlanksAs val="gap"/>
     <c:showDLblsOverMax val="0"/>
@@ -3364,7 +3367,7 @@
 </c:chartSpace>
 </file>
 
-<file path=ppt/charts/chart7.xml><?xml version="1.0" encoding="utf-8"?>
+<file path=ppt/charts/chart4.xml><?xml version="1.0" encoding="utf-8"?>
 <c:chartSpace xmlns:c="http://schemas.openxmlformats.org/drawingml/2006/chart" xmlns:a="http://schemas.openxmlformats.org/drawingml/2006/main" xmlns:r="http://schemas.openxmlformats.org/officeDocument/2006/relationships">
   <c:chart>
     <c:title>
@@ -3379,7 +3382,7 @@
                   <a:srgbClr val="2B3A44"/>
                 </a:solidFill>
               </a:rPr>
-              <a:t>Cluster, 12.5 kg on the hub</a:t>
+              <a:t>Platform, 50 kg on the deck</a:t>
             </a:r>
           </a:p>
         </c:rich>
@@ -3452,25 +3455,25 @@
                 <c:formatCode>General</c:formatCode>
                 <c:ptCount val="7"/>
                 <c:pt idx="0">
-                  <c:v>1.2314269213664835</c:v>
+                  <c:v>0.10432955866264143</c:v>
                 </c:pt>
                 <c:pt idx="1">
-                  <c:v>1.7229854569377243</c:v>
+                  <c:v>0.7149261907877004</c:v>
                 </c:pt>
                 <c:pt idx="2">
-                  <c:v>3.7078826145623487</c:v>
+                  <c:v>1.71178517447982</c:v>
                 </c:pt>
                 <c:pt idx="3">
-                  <c:v>8.198277373548724</c:v>
+                  <c:v>2.2942992835514318</c:v>
                 </c:pt>
                 <c:pt idx="4">
-                  <c:v>2.1363855722761227</c:v>
+                  <c:v>1.2491578500554803</c:v>
                 </c:pt>
                 <c:pt idx="5">
-                  <c:v>0.6641080637836576</c:v>
+                  <c:v>0.7420553520334606</c:v>
                 </c:pt>
                 <c:pt idx="6">
-                  <c:v>0.30998343420235064</c:v>
+                  <c:v>0.49334216574291423</c:v>
                 </c:pt>
               </c:numCache>
             </c:numRef>
@@ -3538,25 +3541,25 @@
                 <c:formatCode>General</c:formatCode>
                 <c:ptCount val="7"/>
                 <c:pt idx="0">
-                  <c:v>0.72125424151825</c:v>
+                  <c:v>0.0666653903808403</c:v>
                 </c:pt>
                 <c:pt idx="1">
-                  <c:v>0.6562640912040621</c:v>
+                  <c:v>0.45945728100752015</c:v>
                 </c:pt>
                 <c:pt idx="2">
-                  <c:v>1.778816916308601</c:v>
+                  <c:v>1.2341095652986258</c:v>
                 </c:pt>
                 <c:pt idx="3">
-                  <c:v>3.0465366308744497</c:v>
+                  <c:v>1.824459723368869</c:v>
                 </c:pt>
                 <c:pt idx="4">
-                  <c:v>4.055646586514151</c:v>
+                  <c:v>1.0994014809730104</c:v>
                 </c:pt>
                 <c:pt idx="5">
-                  <c:v>12.328877557677023</c:v>
+                  <c:v>0.5280225627644667</c:v>
                 </c:pt>
                 <c:pt idx="6">
-                  <c:v>1.4708646607948517</c:v>
+                  <c:v>0.5200412570465928</c:v>
                 </c:pt>
               </c:numCache>
             </c:numRef>
@@ -3624,25 +3627,25 @@
                 <c:formatCode>General</c:formatCode>
                 <c:ptCount val="7"/>
                 <c:pt idx="0">
-                  <c:v>0.7990935690437784</c:v>
+                  <c:v>0.11695485317453519</c:v>
                 </c:pt>
                 <c:pt idx="1">
-                  <c:v>0.6935426267497844</c:v>
+                  <c:v>0.5132711392896417</c:v>
                 </c:pt>
                 <c:pt idx="2">
-                  <c:v>1.981751779266175</c:v>
+                  <c:v>1.516047309457366</c:v>
                 </c:pt>
                 <c:pt idx="3">
-                  <c:v>3.638149133726407</c:v>
+                  <c:v>2.4820865171167896</c:v>
                 </c:pt>
                 <c:pt idx="4">
-                  <c:v>4.235112237436675</c:v>
+                  <c:v>1.30973913945026</c:v>
                 </c:pt>
                 <c:pt idx="5">
-                  <c:v>12.326350051864452</c:v>
+                  <c:v>0.6380281594287418</c:v>
                 </c:pt>
                 <c:pt idx="6">
-                  <c:v>1.4994571817975384</c:v>
+                  <c:v>0.5081037263872283</c:v>
                 </c:pt>
               </c:numCache>
             </c:numRef>
@@ -3710,112 +3713,25 @@
                 <c:formatCode>General</c:formatCode>
                 <c:ptCount val="7"/>
                 <c:pt idx="0">
-                  <c:v>0.8820382501580898</c:v>
+                  <c:v>0.1798731578300252</c:v>
                 </c:pt>
                 <c:pt idx="1">
-                  <c:v>0.7231942201257808</c:v>
+                  <c:v>0.5640861773965655</c:v>
                 </c:pt>
                 <c:pt idx="2">
-                  <c:v>2.2851133791205784</c:v>
+                  <c:v>1.7180004162933997</c:v>
                 </c:pt>
                 <c:pt idx="3">
-                  <c:v>4.3304034684819825</c:v>
+                  <c:v>3.069027643836406</c:v>
                 </c:pt>
                 <c:pt idx="4">
-                  <c:v>4.5422253694004535</c:v>
+                  <c:v>1.7149530829557686</c:v>
                 </c:pt>
                 <c:pt idx="5">
-                  <c:v>12.607549839923475</c:v>
+                  <c:v>1.0293527760487973</c:v>
                 </c:pt>
                 <c:pt idx="6">
-                  <c:v>1.5556003282494388</c:v>
-                </c:pt>
-              </c:numCache>
-            </c:numRef>
-          </c:yVal>
-          <c:smooth val="0"/>
-        </c:ser>
-        <c:ser>
-          <c:idx val="4"/>
-          <c:order val="4"/>
-          <c:tx>
-            <c:strRef>
-              <c:f>Sheet1!$B$37</c:f>
-              <c:strCache>
-                <c:ptCount val="1"/>
-                <c:pt idx="0">
-                  <c:v>payload centred (without preload)</c:v>
-                </c:pt>
-              </c:strCache>
-            </c:strRef>
-          </c:tx>
-          <c:spPr>
-            <a:ln w="15875">
-              <a:solidFill>
-                <a:srgbClr val="0C8B96"/>
-              </a:solidFill>
-              <a:prstDash val="dash"/>
-            </a:ln>
-          </c:spPr>
-          <c:marker>
-            <c:symbol val="none"/>
-          </c:marker>
-          <c:xVal>
-            <c:numRef>
-              <c:f>Sheet1!$A$38:$A$44</c:f>
-              <c:numCache>
-                <c:formatCode>General</c:formatCode>
-                <c:ptCount val="7"/>
-                <c:pt idx="0">
-                  <c:v>1.5</c:v>
-                </c:pt>
-                <c:pt idx="1">
-                  <c:v>2.0</c:v>
-                </c:pt>
-                <c:pt idx="2">
-                  <c:v>2.35</c:v>
-                </c:pt>
-                <c:pt idx="3">
-                  <c:v>2.65</c:v>
-                </c:pt>
-                <c:pt idx="4">
-                  <c:v>3.5</c:v>
-                </c:pt>
-                <c:pt idx="5">
-                  <c:v>4.2</c:v>
-                </c:pt>
-                <c:pt idx="6">
-                  <c:v>5.0</c:v>
-                </c:pt>
-              </c:numCache>
-            </c:numRef>
-          </c:xVal>
-          <c:yVal>
-            <c:numRef>
-              <c:f>Sheet1!$B$38:$B$44</c:f>
-              <c:numCache>
-                <c:formatCode>General</c:formatCode>
-                <c:ptCount val="7"/>
-                <c:pt idx="0">
-                  <c:v>0.8757917187064503</c:v>
-                </c:pt>
-                <c:pt idx="1">
-                  <c:v>1.0831007941615967</c:v>
-                </c:pt>
-                <c:pt idx="2">
-                  <c:v>2.5142802378481397</c:v>
-                </c:pt>
-                <c:pt idx="3">
-                  <c:v>6.92856192970313</c:v>
-                </c:pt>
-                <c:pt idx="4">
-                  <c:v>0.547490530338462</c:v>
-                </c:pt>
-                <c:pt idx="5">
-                  <c:v>0.17859023847668906</c:v>
-                </c:pt>
-                <c:pt idx="6">
-                  <c:v>0.21117001409347894</c:v>
+                  <c:v>0.4764604274571976</c:v>
                 </c:pt>
               </c:numCache>
             </c:numRef>
@@ -3895,7 +3811,7 @@
         <c:axId val="-2129643912"/>
         <c:scaling>
           <c:orientation val="minMax"/>
-          <c:max val="14.0"/>
+          <c:max val="4.0"/>
           <c:min val="0.0"/>
         </c:scaling>
         <c:delete val="0"/>
@@ -3921,7 +3837,7 @@
                       <a:srgbClr val="2B3A44"/>
                     </a:solidFill>
                   </a:rPr>
-                  <a:t>largest gimbal angle (°)</a:t>
+                  <a:t>pitch amplitude (°)</a:t>
                 </a:r>
               </a:p>
             </c:rich>
@@ -3958,6 +3874,24 @@
         <c:crossBetween val="midCat"/>
       </c:valAx>
     </c:plotArea>
+    <c:legend>
+      <c:legendPos val="b"/>
+      <c:layout/>
+      <c:overlay val="0"/>
+      <c:txPr>
+        <a:bodyPr/>
+        <a:lstStyle/>
+        <a:p>
+          <a:pPr>
+            <a:defRPr sz="1100">
+              <a:solidFill>
+                <a:srgbClr val="2B3A44"/>
+              </a:solidFill>
+            </a:defRPr>
+          </a:pPr>
+        </a:p>
+      </c:txPr>
+    </c:legend>
     <c:plotVisOnly val="1"/>
     <c:dispBlanksAs val="gap"/>
     <c:showDLblsOverMax val="0"/>
@@ -3983,7 +3917,7 @@
 </c:chartSpace>
 </file>
 
-<file path=ppt/charts/chart8.xml><?xml version="1.0" encoding="utf-8"?>
+<file path=ppt/charts/chart5.xml><?xml version="1.0" encoding="utf-8"?>
 <c:chartSpace xmlns:c="http://schemas.openxmlformats.org/drawingml/2006/chart" xmlns:a="http://schemas.openxmlformats.org/drawingml/2006/main" xmlns:r="http://schemas.openxmlformats.org/officeDocument/2006/relationships">
   <c:chart>
     <c:title>
@@ -3998,7 +3932,7 @@
                   <a:srgbClr val="2B3A44"/>
                 </a:solidFill>
               </a:rPr>
-              <a:t>Platform, 50 kg on the deck</a:t>
+              <a:t>Cluster, 12.5 kg on the hub</a:t>
             </a:r>
           </a:p>
         </c:rich>
@@ -4071,25 +4005,25 @@
                 <c:formatCode>General</c:formatCode>
                 <c:ptCount val="7"/>
                 <c:pt idx="0">
-                  <c:v>0.8410250742072352</c:v>
+                  <c:v>638.3741972606417</c:v>
                 </c:pt>
                 <c:pt idx="1">
-                  <c:v>2.142535868978723</c:v>
+                  <c:v>624.962945542578</c:v>
                 </c:pt>
                 <c:pt idx="2">
-                  <c:v>4.044742319060423</c:v>
+                  <c:v>606.3775182894211</c:v>
                 </c:pt>
                 <c:pt idx="3">
-                  <c:v>6.6174511082259215</c:v>
+                  <c:v>604.3098450746237</c:v>
                 </c:pt>
                 <c:pt idx="4">
-                  <c:v>3.227315552302964</c:v>
+                  <c:v>673.6425044068574</c:v>
                 </c:pt>
                 <c:pt idx="5">
-                  <c:v>0.875409252715577</c:v>
+                  <c:v>684.0460951920405</c:v>
                 </c:pt>
                 <c:pt idx="6">
-                  <c:v>0.5040787103640686</c:v>
+                  <c:v>687.4382597183736</c:v>
                 </c:pt>
               </c:numCache>
             </c:numRef>
@@ -4157,25 +4091,25 @@
                 <c:formatCode>General</c:formatCode>
                 <c:ptCount val="7"/>
                 <c:pt idx="0">
-                  <c:v>0.708716559886359</c:v>
+                  <c:v>474.65517153753063</c:v>
                 </c:pt>
                 <c:pt idx="1">
-                  <c:v>1.6128752442659664</c:v>
+                  <c:v>464.7454174015702</c:v>
                 </c:pt>
                 <c:pt idx="2">
-                  <c:v>2.800012325318408</c:v>
+                  <c:v>446.2497629347992</c:v>
                 </c:pt>
                 <c:pt idx="3">
-                  <c:v>3.6107289759395824</c:v>
+                  <c:v>444.4345541492434</c:v>
                 </c:pt>
                 <c:pt idx="4">
-                  <c:v>3.494398128769598</c:v>
+                  <c:v>503.318449122139</c:v>
                 </c:pt>
                 <c:pt idx="5">
-                  <c:v>11.063750711452268</c:v>
+                  <c:v>485.26209785730134</c:v>
                 </c:pt>
                 <c:pt idx="6">
-                  <c:v>1.960468259796173</c:v>
+                  <c:v>521.997938162135</c:v>
                 </c:pt>
               </c:numCache>
             </c:numRef>
@@ -4243,25 +4177,25 @@
                 <c:formatCode>General</c:formatCode>
                 <c:ptCount val="7"/>
                 <c:pt idx="0">
-                  <c:v>0.838110736246651</c:v>
+                  <c:v>448.40119341511036</c:v>
                 </c:pt>
                 <c:pt idx="1">
-                  <c:v>1.834898422013471</c:v>
+                  <c:v>438.9026774544253</c:v>
                 </c:pt>
                 <c:pt idx="2">
-                  <c:v>3.080145433978442</c:v>
+                  <c:v>420.3278969491626</c:v>
                 </c:pt>
                 <c:pt idx="3">
-                  <c:v>3.813599953438331</c:v>
+                  <c:v>416.85192376819083</c:v>
                 </c:pt>
                 <c:pt idx="4">
-                  <c:v>3.5058861273158235</c:v>
+                  <c:v>476.59267110921786</c:v>
                 </c:pt>
                 <c:pt idx="5">
-                  <c:v>11.23183299621049</c:v>
+                  <c:v>460.38575434175266</c:v>
                 </c:pt>
                 <c:pt idx="6">
-                  <c:v>1.9687266417507998</c:v>
+                  <c:v>496.22082954164904</c:v>
                 </c:pt>
               </c:numCache>
             </c:numRef>
@@ -4329,112 +4263,25 @@
                 <c:formatCode>General</c:formatCode>
                 <c:ptCount val="7"/>
                 <c:pt idx="0">
-                  <c:v>0.9698831441184217</c:v>
+                  <c:v>422.32080407686465</c:v>
                 </c:pt>
                 <c:pt idx="1">
-                  <c:v>2.0460539485680247</c:v>
+                  <c:v>413.23579291395953</c:v>
                 </c:pt>
                 <c:pt idx="2">
-                  <c:v>3.2933066114376737</c:v>
+                  <c:v>394.7302584614509</c:v>
                 </c:pt>
                 <c:pt idx="3">
-                  <c:v>3.8071333932041145</c:v>
+                  <c:v>389.46419011872126</c:v>
                 </c:pt>
                 <c:pt idx="4">
-                  <c:v>3.4654784752629206</c:v>
+                  <c:v>449.6680327130324</c:v>
                 </c:pt>
                 <c:pt idx="5">
-                  <c:v>11.19282075714933</c:v>
+                  <c:v>435.0891633271792</c:v>
                 </c:pt>
                 <c:pt idx="6">
-                  <c:v>1.8073363832339233</c:v>
-                </c:pt>
-              </c:numCache>
-            </c:numRef>
-          </c:yVal>
-          <c:smooth val="0"/>
-        </c:ser>
-        <c:ser>
-          <c:idx val="4"/>
-          <c:order val="4"/>
-          <c:tx>
-            <c:strRef>
-              <c:f>Sheet1!$B$37</c:f>
-              <c:strCache>
-                <c:ptCount val="1"/>
-                <c:pt idx="0">
-                  <c:v>payload centred (without preload)</c:v>
-                </c:pt>
-              </c:strCache>
-            </c:strRef>
-          </c:tx>
-          <c:spPr>
-            <a:ln w="15875">
-              <a:solidFill>
-                <a:srgbClr val="0C8B96"/>
-              </a:solidFill>
-              <a:prstDash val="dash"/>
-            </a:ln>
-          </c:spPr>
-          <c:marker>
-            <c:symbol val="none"/>
-          </c:marker>
-          <c:xVal>
-            <c:numRef>
-              <c:f>Sheet1!$A$38:$A$44</c:f>
-              <c:numCache>
-                <c:formatCode>General</c:formatCode>
-                <c:ptCount val="7"/>
-                <c:pt idx="0">
-                  <c:v>1.5</c:v>
-                </c:pt>
-                <c:pt idx="1">
-                  <c:v>2.0</c:v>
-                </c:pt>
-                <c:pt idx="2">
-                  <c:v>2.35</c:v>
-                </c:pt>
-                <c:pt idx="3">
-                  <c:v>2.65</c:v>
-                </c:pt>
-                <c:pt idx="4">
-                  <c:v>3.5</c:v>
-                </c:pt>
-                <c:pt idx="5">
-                  <c:v>4.2</c:v>
-                </c:pt>
-                <c:pt idx="6">
-                  <c:v>5.0</c:v>
-                </c:pt>
-              </c:numCache>
-            </c:numRef>
-          </c:xVal>
-          <c:yVal>
-            <c:numRef>
-              <c:f>Sheet1!$B$38:$B$44</c:f>
-              <c:numCache>
-                <c:formatCode>General</c:formatCode>
-                <c:ptCount val="7"/>
-                <c:pt idx="0">
-                  <c:v>0.7429738342133168</c:v>
-                </c:pt>
-                <c:pt idx="1">
-                  <c:v>1.824692913045666</c:v>
-                </c:pt>
-                <c:pt idx="2">
-                  <c:v>3.5276299117803</c:v>
-                </c:pt>
-                <c:pt idx="3">
-                  <c:v>7.208421230710721</c:v>
-                </c:pt>
-                <c:pt idx="4">
-                  <c:v>0.6193729406596259</c:v>
-                </c:pt>
-                <c:pt idx="5">
-                  <c:v>0.6055026795740803</c:v>
-                </c:pt>
-                <c:pt idx="6">
-                  <c:v>0.8530371765577375</c:v>
+                  <c:v>470.57239122703453</c:v>
                 </c:pt>
               </c:numCache>
             </c:numRef>
@@ -4514,6 +4361,1175 @@
         <c:axId val="-2129643912"/>
         <c:scaling>
           <c:orientation val="minMax"/>
+          <c:max val="700.0"/>
+          <c:min val="0.0"/>
+        </c:scaling>
+        <c:delete val="0"/>
+        <c:axPos val="l"/>
+        <c:majorGridlines>
+          <c:spPr>
+            <a:ln>
+              <a:solidFill>
+                <a:srgbClr val="E6ECEE"/>
+              </a:solidFill>
+            </a:ln>
+          </c:spPr>
+        </c:majorGridlines>
+        <c:title>
+          <c:tx>
+            <c:rich>
+              <a:bodyPr/>
+              <a:lstStyle/>
+              <a:p>
+                <a:r>
+                  <a:rPr sz="1200" b="0">
+                    <a:solidFill>
+                      <a:srgbClr val="2B3A44"/>
+                    </a:solidFill>
+                  </a:rPr>
+                  <a:t>smallest pin freeboard (mm)</a:t>
+                </a:r>
+              </a:p>
+            </c:rich>
+          </c:tx>
+          <c:layout/>
+          <c:overlay val="0"/>
+        </c:title>
+        <c:numFmt formatCode="General" sourceLinked="1"/>
+        <c:majorTickMark val="out"/>
+        <c:minorTickMark val="none"/>
+        <c:tickLblPos val="nextTo"/>
+        <c:spPr>
+          <a:ln>
+            <a:solidFill>
+              <a:srgbClr val="B9D6DC"/>
+            </a:solidFill>
+          </a:ln>
+        </c:spPr>
+        <c:txPr>
+          <a:bodyPr/>
+          <a:lstStyle/>
+          <a:p>
+            <a:pPr>
+              <a:defRPr sz="1100">
+                <a:solidFill>
+                  <a:srgbClr val="5C6B75"/>
+                </a:solidFill>
+              </a:defRPr>
+            </a:pPr>
+          </a:p>
+        </c:txPr>
+        <c:crossAx val="-2128940872"/>
+        <c:crosses val="autoZero"/>
+        <c:crossBetween val="midCat"/>
+      </c:valAx>
+    </c:plotArea>
+    <c:plotVisOnly val="1"/>
+    <c:dispBlanksAs val="gap"/>
+    <c:showDLblsOverMax val="0"/>
+  </c:chart>
+  <c:txPr>
+    <a:bodyPr/>
+    <a:lstStyle/>
+    <a:p>
+      <a:pPr>
+        <a:defRPr sz="1100">
+          <a:solidFill>
+            <a:srgbClr val="5C6B75"/>
+          </a:solidFill>
+          <a:latin typeface="Calibri"/>
+        </a:defRPr>
+      </a:pPr>
+      <a:endParaRPr lang="en-US"/>
+    </a:p>
+  </c:txPr>
+  <c:externalData r:id="rId1">
+    <c:autoUpdate val="0"/>
+  </c:externalData>
+</c:chartSpace>
+</file>
+
+<file path=ppt/charts/chart6.xml><?xml version="1.0" encoding="utf-8"?>
+<c:chartSpace xmlns:c="http://schemas.openxmlformats.org/drawingml/2006/chart" xmlns:a="http://schemas.openxmlformats.org/drawingml/2006/main" xmlns:r="http://schemas.openxmlformats.org/officeDocument/2006/relationships">
+  <c:chart>
+    <c:title>
+      <c:tx>
+        <c:rich>
+          <a:bodyPr/>
+          <a:lstStyle/>
+          <a:p>
+            <a:r>
+              <a:rPr sz="1300" b="1">
+                <a:solidFill>
+                  <a:srgbClr val="2B3A44"/>
+                </a:solidFill>
+              </a:rPr>
+              <a:t>Platform, 50 kg on the deck</a:t>
+            </a:r>
+          </a:p>
+        </c:rich>
+      </c:tx>
+      <c:layout/>
+      <c:overlay val="0"/>
+    </c:title>
+    <c:plotArea>
+      <c:scatterChart>
+        <c:scatterStyle val="lineMarker"/>
+        <c:varyColors val="0"/>
+        <c:ser>
+          <c:idx val="0"/>
+          <c:order val="0"/>
+          <c:tx>
+            <c:strRef>
+              <c:f>Sheet1!$B$1</c:f>
+              <c:strCache>
+                <c:ptCount val="1"/>
+                <c:pt idx="0">
+                  <c:v>unloaded</c:v>
+                </c:pt>
+              </c:strCache>
+            </c:strRef>
+          </c:tx>
+          <c:spPr>
+            <a:ln w="31750">
+              <a:solidFill>
+                <a:srgbClr val="8A959C"/>
+              </a:solidFill>
+            </a:ln>
+          </c:spPr>
+          <c:marker>
+            <c:symbol val="none"/>
+          </c:marker>
+          <c:xVal>
+            <c:numRef>
+              <c:f>Sheet1!$A$2:$A$8</c:f>
+              <c:numCache>
+                <c:formatCode>General</c:formatCode>
+                <c:ptCount val="7"/>
+                <c:pt idx="0">
+                  <c:v>1.5</c:v>
+                </c:pt>
+                <c:pt idx="1">
+                  <c:v>2.0</c:v>
+                </c:pt>
+                <c:pt idx="2">
+                  <c:v>2.35</c:v>
+                </c:pt>
+                <c:pt idx="3">
+                  <c:v>2.65</c:v>
+                </c:pt>
+                <c:pt idx="4">
+                  <c:v>3.5</c:v>
+                </c:pt>
+                <c:pt idx="5">
+                  <c:v>4.2</c:v>
+                </c:pt>
+                <c:pt idx="6">
+                  <c:v>5.0</c:v>
+                </c:pt>
+              </c:numCache>
+            </c:numRef>
+          </c:xVal>
+          <c:yVal>
+            <c:numRef>
+              <c:f>Sheet1!$B$2:$B$8</c:f>
+              <c:numCache>
+                <c:formatCode>General</c:formatCode>
+                <c:ptCount val="7"/>
+                <c:pt idx="0">
+                  <c:v>618.9471198186249</c:v>
+                </c:pt>
+                <c:pt idx="1">
+                  <c:v>605.6917969634725</c:v>
+                </c:pt>
+                <c:pt idx="2">
+                  <c:v>587.6662603469896</c:v>
+                </c:pt>
+                <c:pt idx="3">
+                  <c:v>592.2878895522662</c:v>
+                </c:pt>
+                <c:pt idx="4">
+                  <c:v>651.878751362749</c:v>
+                </c:pt>
+                <c:pt idx="5">
+                  <c:v>664.0658753590062</c:v>
+                </c:pt>
+                <c:pt idx="6">
+                  <c:v>667.5990792421682</c:v>
+                </c:pt>
+              </c:numCache>
+            </c:numRef>
+          </c:yVal>
+          <c:smooth val="0"/>
+        </c:ser>
+        <c:ser>
+          <c:idx val="1"/>
+          <c:order val="1"/>
+          <c:tx>
+            <c:strRef>
+              <c:f>Sheet1!$B$10</c:f>
+              <c:strCache>
+                <c:ptCount val="1"/>
+                <c:pt idx="0">
+                  <c:v>payload centred</c:v>
+                </c:pt>
+              </c:strCache>
+            </c:strRef>
+          </c:tx>
+          <c:spPr>
+            <a:ln w="31750">
+              <a:solidFill>
+                <a:srgbClr val="0C8B96"/>
+              </a:solidFill>
+            </a:ln>
+          </c:spPr>
+          <c:marker>
+            <c:symbol val="none"/>
+          </c:marker>
+          <c:xVal>
+            <c:numRef>
+              <c:f>Sheet1!$A$11:$A$17</c:f>
+              <c:numCache>
+                <c:formatCode>General</c:formatCode>
+                <c:ptCount val="7"/>
+                <c:pt idx="0">
+                  <c:v>1.5</c:v>
+                </c:pt>
+                <c:pt idx="1">
+                  <c:v>2.0</c:v>
+                </c:pt>
+                <c:pt idx="2">
+                  <c:v>2.35</c:v>
+                </c:pt>
+                <c:pt idx="3">
+                  <c:v>2.65</c:v>
+                </c:pt>
+                <c:pt idx="4">
+                  <c:v>3.5</c:v>
+                </c:pt>
+                <c:pt idx="5">
+                  <c:v>4.2</c:v>
+                </c:pt>
+                <c:pt idx="6">
+                  <c:v>5.0</c:v>
+                </c:pt>
+              </c:numCache>
+            </c:numRef>
+          </c:xVal>
+          <c:yVal>
+            <c:numRef>
+              <c:f>Sheet1!$B$11:$B$17</c:f>
+              <c:numCache>
+                <c:formatCode>General</c:formatCode>
+                <c:ptCount val="7"/>
+                <c:pt idx="0">
+                  <c:v>455.0567275052889</c:v>
+                </c:pt>
+                <c:pt idx="1">
+                  <c:v>445.15336214934655</c:v>
+                </c:pt>
+                <c:pt idx="2">
+                  <c:v>426.56856754697355</c:v>
+                </c:pt>
+                <c:pt idx="3">
+                  <c:v>424.15974076861795</c:v>
+                </c:pt>
+                <c:pt idx="4">
+                  <c:v>483.3456914337754</c:v>
+                </c:pt>
+                <c:pt idx="5">
+                  <c:v>470.5176105966767</c:v>
+                </c:pt>
+                <c:pt idx="6">
+                  <c:v>501.37817409001286</c:v>
+                </c:pt>
+              </c:numCache>
+            </c:numRef>
+          </c:yVal>
+          <c:smooth val="0"/>
+        </c:ser>
+        <c:ser>
+          <c:idx val="2"/>
+          <c:order val="2"/>
+          <c:tx>
+            <c:strRef>
+              <c:f>Sheet1!$B$19</c:f>
+              <c:strCache>
+                <c:ptCount val="1"/>
+                <c:pt idx="0">
+                  <c:v>shifted: 5° tilt</c:v>
+                </c:pt>
+              </c:strCache>
+            </c:strRef>
+          </c:tx>
+          <c:spPr>
+            <a:ln w="31750">
+              <a:solidFill>
+                <a:srgbClr val="C9772B"/>
+              </a:solidFill>
+            </a:ln>
+          </c:spPr>
+          <c:marker>
+            <c:symbol val="none"/>
+          </c:marker>
+          <c:xVal>
+            <c:numRef>
+              <c:f>Sheet1!$A$20:$A$26</c:f>
+              <c:numCache>
+                <c:formatCode>General</c:formatCode>
+                <c:ptCount val="7"/>
+                <c:pt idx="0">
+                  <c:v>1.5</c:v>
+                </c:pt>
+                <c:pt idx="1">
+                  <c:v>2.0</c:v>
+                </c:pt>
+                <c:pt idx="2">
+                  <c:v>2.35</c:v>
+                </c:pt>
+                <c:pt idx="3">
+                  <c:v>2.65</c:v>
+                </c:pt>
+                <c:pt idx="4">
+                  <c:v>3.5</c:v>
+                </c:pt>
+                <c:pt idx="5">
+                  <c:v>4.2</c:v>
+                </c:pt>
+                <c:pt idx="6">
+                  <c:v>5.0</c:v>
+                </c:pt>
+              </c:numCache>
+            </c:numRef>
+          </c:xVal>
+          <c:yVal>
+            <c:numRef>
+              <c:f>Sheet1!$B$20:$B$26</c:f>
+              <c:numCache>
+                <c:formatCode>General</c:formatCode>
+                <c:ptCount val="7"/>
+                <c:pt idx="0">
+                  <c:v>384.64210688333577</c:v>
+                </c:pt>
+                <c:pt idx="1">
+                  <c:v>376.10579227157587</c:v>
+                </c:pt>
+                <c:pt idx="2">
+                  <c:v>358.13672438949305</c:v>
+                </c:pt>
+                <c:pt idx="3">
+                  <c:v>353.931096356751</c:v>
+                </c:pt>
+                <c:pt idx="4">
+                  <c:v>411.02557180196453</c:v>
+                </c:pt>
+                <c:pt idx="5">
+                  <c:v>405.78948462798763</c:v>
+                </c:pt>
+                <c:pt idx="6">
+                  <c:v>431.89021135416317</c:v>
+                </c:pt>
+              </c:numCache>
+            </c:numRef>
+          </c:yVal>
+          <c:smooth val="0"/>
+        </c:ser>
+        <c:ser>
+          <c:idx val="3"/>
+          <c:order val="3"/>
+          <c:tx>
+            <c:strRef>
+              <c:f>Sheet1!$B$28</c:f>
+              <c:strCache>
+                <c:ptCount val="1"/>
+                <c:pt idx="0">
+                  <c:v>shifted: 10° tilt</c:v>
+                </c:pt>
+              </c:strCache>
+            </c:strRef>
+          </c:tx>
+          <c:spPr>
+            <a:ln w="31750">
+              <a:solidFill>
+                <a:srgbClr val="B2432C"/>
+              </a:solidFill>
+            </a:ln>
+          </c:spPr>
+          <c:marker>
+            <c:symbol val="none"/>
+          </c:marker>
+          <c:xVal>
+            <c:numRef>
+              <c:f>Sheet1!$A$29:$A$35</c:f>
+              <c:numCache>
+                <c:formatCode>General</c:formatCode>
+                <c:ptCount val="7"/>
+                <c:pt idx="0">
+                  <c:v>1.5</c:v>
+                </c:pt>
+                <c:pt idx="1">
+                  <c:v>2.0</c:v>
+                </c:pt>
+                <c:pt idx="2">
+                  <c:v>2.35</c:v>
+                </c:pt>
+                <c:pt idx="3">
+                  <c:v>2.65</c:v>
+                </c:pt>
+                <c:pt idx="4">
+                  <c:v>3.5</c:v>
+                </c:pt>
+                <c:pt idx="5">
+                  <c:v>4.2</c:v>
+                </c:pt>
+                <c:pt idx="6">
+                  <c:v>5.0</c:v>
+                </c:pt>
+              </c:numCache>
+            </c:numRef>
+          </c:xVal>
+          <c:yVal>
+            <c:numRef>
+              <c:f>Sheet1!$B$29:$B$35</c:f>
+              <c:numCache>
+                <c:formatCode>General</c:formatCode>
+                <c:ptCount val="7"/>
+                <c:pt idx="0">
+                  <c:v>314.981450986061</c:v>
+                </c:pt>
+                <c:pt idx="1">
+                  <c:v>307.23306495379416</c:v>
+                </c:pt>
+                <c:pt idx="2">
+                  <c:v>291.0008674556055</c:v>
+                </c:pt>
+                <c:pt idx="3">
+                  <c:v>282.37328660411623</c:v>
+                </c:pt>
+                <c:pt idx="4">
+                  <c:v>336.48539131478736</c:v>
+                </c:pt>
+                <c:pt idx="5">
+                  <c:v>332.01664639706473</c:v>
+                </c:pt>
+                <c:pt idx="6">
+                  <c:v>362.5109398822574</c:v>
+                </c:pt>
+              </c:numCache>
+            </c:numRef>
+          </c:yVal>
+          <c:smooth val="0"/>
+        </c:ser>
+        <c:axId val="-2128940872"/>
+        <c:axId val="-2129643912"/>
+      </c:scatterChart>
+      <c:valAx>
+        <c:axId val="-2128940872"/>
+        <c:scaling>
+          <c:orientation val="minMax"/>
+          <c:max val="5.5"/>
+          <c:min val="1.0"/>
+        </c:scaling>
+        <c:delete val="0"/>
+        <c:axPos val="b"/>
+        <c:majorGridlines>
+          <c:spPr>
+            <a:ln>
+              <a:solidFill>
+                <a:srgbClr val="E6ECEE"/>
+              </a:solidFill>
+            </a:ln>
+          </c:spPr>
+        </c:majorGridlines>
+        <c:title>
+          <c:tx>
+            <c:rich>
+              <a:bodyPr/>
+              <a:lstStyle/>
+              <a:p>
+                <a:r>
+                  <a:rPr sz="1200" b="0">
+                    <a:solidFill>
+                      <a:srgbClr val="2B3A44"/>
+                    </a:solidFill>
+                  </a:rPr>
+                  <a:t>wave period (s)</a:t>
+                </a:r>
+              </a:p>
+            </c:rich>
+          </c:tx>
+          <c:layout/>
+          <c:overlay val="0"/>
+        </c:title>
+        <c:numFmt formatCode="General" sourceLinked="1"/>
+        <c:majorTickMark val="out"/>
+        <c:minorTickMark val="none"/>
+        <c:tickLblPos val="nextTo"/>
+        <c:spPr>
+          <a:ln>
+            <a:solidFill>
+              <a:srgbClr val="B9D6DC"/>
+            </a:solidFill>
+          </a:ln>
+        </c:spPr>
+        <c:txPr>
+          <a:bodyPr/>
+          <a:lstStyle/>
+          <a:p>
+            <a:pPr>
+              <a:defRPr sz="1100">
+                <a:solidFill>
+                  <a:srgbClr val="5C6B75"/>
+                </a:solidFill>
+              </a:defRPr>
+            </a:pPr>
+          </a:p>
+        </c:txPr>
+        <c:crossAx val="-2129643912"/>
+        <c:crosses val="autoZero"/>
+        <c:crossBetween val="midCat"/>
+      </c:valAx>
+      <c:valAx>
+        <c:axId val="-2129643912"/>
+        <c:scaling>
+          <c:orientation val="minMax"/>
+          <c:max val="700.0"/>
+          <c:min val="0.0"/>
+        </c:scaling>
+        <c:delete val="0"/>
+        <c:axPos val="l"/>
+        <c:majorGridlines>
+          <c:spPr>
+            <a:ln>
+              <a:solidFill>
+                <a:srgbClr val="E6ECEE"/>
+              </a:solidFill>
+            </a:ln>
+          </c:spPr>
+        </c:majorGridlines>
+        <c:title>
+          <c:tx>
+            <c:rich>
+              <a:bodyPr/>
+              <a:lstStyle/>
+              <a:p>
+                <a:r>
+                  <a:rPr sz="1200" b="0">
+                    <a:solidFill>
+                      <a:srgbClr val="2B3A44"/>
+                    </a:solidFill>
+                  </a:rPr>
+                  <a:t>smallest pin freeboard (mm)</a:t>
+                </a:r>
+              </a:p>
+            </c:rich>
+          </c:tx>
+          <c:layout/>
+          <c:overlay val="0"/>
+        </c:title>
+        <c:numFmt formatCode="General" sourceLinked="1"/>
+        <c:majorTickMark val="out"/>
+        <c:minorTickMark val="none"/>
+        <c:tickLblPos val="nextTo"/>
+        <c:spPr>
+          <a:ln>
+            <a:solidFill>
+              <a:srgbClr val="B9D6DC"/>
+            </a:solidFill>
+          </a:ln>
+        </c:spPr>
+        <c:txPr>
+          <a:bodyPr/>
+          <a:lstStyle/>
+          <a:p>
+            <a:pPr>
+              <a:defRPr sz="1100">
+                <a:solidFill>
+                  <a:srgbClr val="5C6B75"/>
+                </a:solidFill>
+              </a:defRPr>
+            </a:pPr>
+          </a:p>
+        </c:txPr>
+        <c:crossAx val="-2128940872"/>
+        <c:crosses val="autoZero"/>
+        <c:crossBetween val="midCat"/>
+      </c:valAx>
+    </c:plotArea>
+    <c:legend>
+      <c:legendPos val="b"/>
+      <c:layout/>
+      <c:overlay val="0"/>
+      <c:txPr>
+        <a:bodyPr/>
+        <a:lstStyle/>
+        <a:p>
+          <a:pPr>
+            <a:defRPr sz="1100">
+              <a:solidFill>
+                <a:srgbClr val="2B3A44"/>
+              </a:solidFill>
+            </a:defRPr>
+          </a:pPr>
+        </a:p>
+      </c:txPr>
+    </c:legend>
+    <c:plotVisOnly val="1"/>
+    <c:dispBlanksAs val="gap"/>
+    <c:showDLblsOverMax val="0"/>
+  </c:chart>
+  <c:txPr>
+    <a:bodyPr/>
+    <a:lstStyle/>
+    <a:p>
+      <a:pPr>
+        <a:defRPr sz="1100">
+          <a:solidFill>
+            <a:srgbClr val="5C6B75"/>
+          </a:solidFill>
+          <a:latin typeface="Calibri"/>
+        </a:defRPr>
+      </a:pPr>
+      <a:endParaRPr lang="en-US"/>
+    </a:p>
+  </c:txPr>
+  <c:externalData r:id="rId1">
+    <c:autoUpdate val="0"/>
+  </c:externalData>
+</c:chartSpace>
+</file>
+
+<file path=ppt/charts/chart7.xml><?xml version="1.0" encoding="utf-8"?>
+<c:chartSpace xmlns:c="http://schemas.openxmlformats.org/drawingml/2006/chart" xmlns:a="http://schemas.openxmlformats.org/drawingml/2006/main" xmlns:r="http://schemas.openxmlformats.org/officeDocument/2006/relationships">
+  <c:chart>
+    <c:title>
+      <c:tx>
+        <c:rich>
+          <a:bodyPr/>
+          <a:lstStyle/>
+          <a:p>
+            <a:r>
+              <a:rPr sz="1300" b="1">
+                <a:solidFill>
+                  <a:srgbClr val="2B3A44"/>
+                </a:solidFill>
+              </a:rPr>
+              <a:t>Cluster, 12.5 kg on the hub</a:t>
+            </a:r>
+          </a:p>
+        </c:rich>
+      </c:tx>
+      <c:layout/>
+      <c:overlay val="0"/>
+    </c:title>
+    <c:plotArea>
+      <c:scatterChart>
+        <c:scatterStyle val="lineMarker"/>
+        <c:varyColors val="0"/>
+        <c:ser>
+          <c:idx val="0"/>
+          <c:order val="0"/>
+          <c:tx>
+            <c:strRef>
+              <c:f>Sheet1!$B$1</c:f>
+              <c:strCache>
+                <c:ptCount val="1"/>
+                <c:pt idx="0">
+                  <c:v>unloaded</c:v>
+                </c:pt>
+              </c:strCache>
+            </c:strRef>
+          </c:tx>
+          <c:spPr>
+            <a:ln w="31750">
+              <a:solidFill>
+                <a:srgbClr val="8A959C"/>
+              </a:solidFill>
+            </a:ln>
+          </c:spPr>
+          <c:marker>
+            <c:symbol val="none"/>
+          </c:marker>
+          <c:xVal>
+            <c:numRef>
+              <c:f>Sheet1!$A$2:$A$8</c:f>
+              <c:numCache>
+                <c:formatCode>General</c:formatCode>
+                <c:ptCount val="7"/>
+                <c:pt idx="0">
+                  <c:v>1.5</c:v>
+                </c:pt>
+                <c:pt idx="1">
+                  <c:v>2.0</c:v>
+                </c:pt>
+                <c:pt idx="2">
+                  <c:v>2.35</c:v>
+                </c:pt>
+                <c:pt idx="3">
+                  <c:v>2.65</c:v>
+                </c:pt>
+                <c:pt idx="4">
+                  <c:v>3.5</c:v>
+                </c:pt>
+                <c:pt idx="5">
+                  <c:v>4.2</c:v>
+                </c:pt>
+                <c:pt idx="6">
+                  <c:v>5.0</c:v>
+                </c:pt>
+              </c:numCache>
+            </c:numRef>
+          </c:xVal>
+          <c:yVal>
+            <c:numRef>
+              <c:f>Sheet1!$B$2:$B$8</c:f>
+              <c:numCache>
+                <c:formatCode>General</c:formatCode>
+                <c:ptCount val="7"/>
+                <c:pt idx="0">
+                  <c:v>1.2314269213664835</c:v>
+                </c:pt>
+                <c:pt idx="1">
+                  <c:v>1.7229854569377243</c:v>
+                </c:pt>
+                <c:pt idx="2">
+                  <c:v>3.7078826145623487</c:v>
+                </c:pt>
+                <c:pt idx="3">
+                  <c:v>8.198277373548724</c:v>
+                </c:pt>
+                <c:pt idx="4">
+                  <c:v>2.1363855722761227</c:v>
+                </c:pt>
+                <c:pt idx="5">
+                  <c:v>0.6641080637836576</c:v>
+                </c:pt>
+                <c:pt idx="6">
+                  <c:v>0.30998343420235064</c:v>
+                </c:pt>
+              </c:numCache>
+            </c:numRef>
+          </c:yVal>
+          <c:smooth val="0"/>
+        </c:ser>
+        <c:ser>
+          <c:idx val="1"/>
+          <c:order val="1"/>
+          <c:tx>
+            <c:strRef>
+              <c:f>Sheet1!$B$10</c:f>
+              <c:strCache>
+                <c:ptCount val="1"/>
+                <c:pt idx="0">
+                  <c:v>payload centred</c:v>
+                </c:pt>
+              </c:strCache>
+            </c:strRef>
+          </c:tx>
+          <c:spPr>
+            <a:ln w="31750">
+              <a:solidFill>
+                <a:srgbClr val="0C8B96"/>
+              </a:solidFill>
+            </a:ln>
+          </c:spPr>
+          <c:marker>
+            <c:symbol val="none"/>
+          </c:marker>
+          <c:xVal>
+            <c:numRef>
+              <c:f>Sheet1!$A$11:$A$17</c:f>
+              <c:numCache>
+                <c:formatCode>General</c:formatCode>
+                <c:ptCount val="7"/>
+                <c:pt idx="0">
+                  <c:v>1.5</c:v>
+                </c:pt>
+                <c:pt idx="1">
+                  <c:v>2.0</c:v>
+                </c:pt>
+                <c:pt idx="2">
+                  <c:v>2.35</c:v>
+                </c:pt>
+                <c:pt idx="3">
+                  <c:v>2.65</c:v>
+                </c:pt>
+                <c:pt idx="4">
+                  <c:v>3.5</c:v>
+                </c:pt>
+                <c:pt idx="5">
+                  <c:v>4.2</c:v>
+                </c:pt>
+                <c:pt idx="6">
+                  <c:v>5.0</c:v>
+                </c:pt>
+              </c:numCache>
+            </c:numRef>
+          </c:xVal>
+          <c:yVal>
+            <c:numRef>
+              <c:f>Sheet1!$B$11:$B$17</c:f>
+              <c:numCache>
+                <c:formatCode>General</c:formatCode>
+                <c:ptCount val="7"/>
+                <c:pt idx="0">
+                  <c:v>0.72125424151825</c:v>
+                </c:pt>
+                <c:pt idx="1">
+                  <c:v>0.6562640912040621</c:v>
+                </c:pt>
+                <c:pt idx="2">
+                  <c:v>1.778816916308601</c:v>
+                </c:pt>
+                <c:pt idx="3">
+                  <c:v>3.0465366308744497</c:v>
+                </c:pt>
+                <c:pt idx="4">
+                  <c:v>4.055646586514151</c:v>
+                </c:pt>
+                <c:pt idx="5">
+                  <c:v>12.328877557677023</c:v>
+                </c:pt>
+                <c:pt idx="6">
+                  <c:v>1.4708646607948517</c:v>
+                </c:pt>
+              </c:numCache>
+            </c:numRef>
+          </c:yVal>
+          <c:smooth val="0"/>
+        </c:ser>
+        <c:ser>
+          <c:idx val="2"/>
+          <c:order val="2"/>
+          <c:tx>
+            <c:strRef>
+              <c:f>Sheet1!$B$19</c:f>
+              <c:strCache>
+                <c:ptCount val="1"/>
+                <c:pt idx="0">
+                  <c:v>shifted: 5° tilt</c:v>
+                </c:pt>
+              </c:strCache>
+            </c:strRef>
+          </c:tx>
+          <c:spPr>
+            <a:ln w="31750">
+              <a:solidFill>
+                <a:srgbClr val="C9772B"/>
+              </a:solidFill>
+            </a:ln>
+          </c:spPr>
+          <c:marker>
+            <c:symbol val="none"/>
+          </c:marker>
+          <c:xVal>
+            <c:numRef>
+              <c:f>Sheet1!$A$20:$A$26</c:f>
+              <c:numCache>
+                <c:formatCode>General</c:formatCode>
+                <c:ptCount val="7"/>
+                <c:pt idx="0">
+                  <c:v>1.5</c:v>
+                </c:pt>
+                <c:pt idx="1">
+                  <c:v>2.0</c:v>
+                </c:pt>
+                <c:pt idx="2">
+                  <c:v>2.35</c:v>
+                </c:pt>
+                <c:pt idx="3">
+                  <c:v>2.65</c:v>
+                </c:pt>
+                <c:pt idx="4">
+                  <c:v>3.5</c:v>
+                </c:pt>
+                <c:pt idx="5">
+                  <c:v>4.2</c:v>
+                </c:pt>
+                <c:pt idx="6">
+                  <c:v>5.0</c:v>
+                </c:pt>
+              </c:numCache>
+            </c:numRef>
+          </c:xVal>
+          <c:yVal>
+            <c:numRef>
+              <c:f>Sheet1!$B$20:$B$26</c:f>
+              <c:numCache>
+                <c:formatCode>General</c:formatCode>
+                <c:ptCount val="7"/>
+                <c:pt idx="0">
+                  <c:v>0.7990935690437784</c:v>
+                </c:pt>
+                <c:pt idx="1">
+                  <c:v>0.6935426267497844</c:v>
+                </c:pt>
+                <c:pt idx="2">
+                  <c:v>1.981751779266175</c:v>
+                </c:pt>
+                <c:pt idx="3">
+                  <c:v>3.638149133726407</c:v>
+                </c:pt>
+                <c:pt idx="4">
+                  <c:v>4.235112237436675</c:v>
+                </c:pt>
+                <c:pt idx="5">
+                  <c:v>12.326350051864452</c:v>
+                </c:pt>
+                <c:pt idx="6">
+                  <c:v>1.4994571817975384</c:v>
+                </c:pt>
+              </c:numCache>
+            </c:numRef>
+          </c:yVal>
+          <c:smooth val="0"/>
+        </c:ser>
+        <c:ser>
+          <c:idx val="3"/>
+          <c:order val="3"/>
+          <c:tx>
+            <c:strRef>
+              <c:f>Sheet1!$B$28</c:f>
+              <c:strCache>
+                <c:ptCount val="1"/>
+                <c:pt idx="0">
+                  <c:v>shifted: 10° tilt</c:v>
+                </c:pt>
+              </c:strCache>
+            </c:strRef>
+          </c:tx>
+          <c:spPr>
+            <a:ln w="31750">
+              <a:solidFill>
+                <a:srgbClr val="B2432C"/>
+              </a:solidFill>
+            </a:ln>
+          </c:spPr>
+          <c:marker>
+            <c:symbol val="none"/>
+          </c:marker>
+          <c:xVal>
+            <c:numRef>
+              <c:f>Sheet1!$A$29:$A$35</c:f>
+              <c:numCache>
+                <c:formatCode>General</c:formatCode>
+                <c:ptCount val="7"/>
+                <c:pt idx="0">
+                  <c:v>1.5</c:v>
+                </c:pt>
+                <c:pt idx="1">
+                  <c:v>2.0</c:v>
+                </c:pt>
+                <c:pt idx="2">
+                  <c:v>2.35</c:v>
+                </c:pt>
+                <c:pt idx="3">
+                  <c:v>2.65</c:v>
+                </c:pt>
+                <c:pt idx="4">
+                  <c:v>3.5</c:v>
+                </c:pt>
+                <c:pt idx="5">
+                  <c:v>4.2</c:v>
+                </c:pt>
+                <c:pt idx="6">
+                  <c:v>5.0</c:v>
+                </c:pt>
+              </c:numCache>
+            </c:numRef>
+          </c:xVal>
+          <c:yVal>
+            <c:numRef>
+              <c:f>Sheet1!$B$29:$B$35</c:f>
+              <c:numCache>
+                <c:formatCode>General</c:formatCode>
+                <c:ptCount val="7"/>
+                <c:pt idx="0">
+                  <c:v>0.8820382501580898</c:v>
+                </c:pt>
+                <c:pt idx="1">
+                  <c:v>0.7231942201257808</c:v>
+                </c:pt>
+                <c:pt idx="2">
+                  <c:v>2.2851133791205784</c:v>
+                </c:pt>
+                <c:pt idx="3">
+                  <c:v>4.3304034684819825</c:v>
+                </c:pt>
+                <c:pt idx="4">
+                  <c:v>4.5422253694004535</c:v>
+                </c:pt>
+                <c:pt idx="5">
+                  <c:v>12.607549839923475</c:v>
+                </c:pt>
+                <c:pt idx="6">
+                  <c:v>1.5556003282494388</c:v>
+                </c:pt>
+              </c:numCache>
+            </c:numRef>
+          </c:yVal>
+          <c:smooth val="0"/>
+        </c:ser>
+        <c:ser>
+          <c:idx val="4"/>
+          <c:order val="4"/>
+          <c:tx>
+            <c:strRef>
+              <c:f>Sheet1!$B$37</c:f>
+              <c:strCache>
+                <c:ptCount val="1"/>
+                <c:pt idx="0">
+                  <c:v>payload centred (without preload)</c:v>
+                </c:pt>
+              </c:strCache>
+            </c:strRef>
+          </c:tx>
+          <c:spPr>
+            <a:ln w="15875">
+              <a:solidFill>
+                <a:srgbClr val="0C8B96"/>
+              </a:solidFill>
+              <a:prstDash val="dash"/>
+            </a:ln>
+          </c:spPr>
+          <c:marker>
+            <c:symbol val="none"/>
+          </c:marker>
+          <c:xVal>
+            <c:numRef>
+              <c:f>Sheet1!$A$38:$A$44</c:f>
+              <c:numCache>
+                <c:formatCode>General</c:formatCode>
+                <c:ptCount val="7"/>
+                <c:pt idx="0">
+                  <c:v>1.5</c:v>
+                </c:pt>
+                <c:pt idx="1">
+                  <c:v>2.0</c:v>
+                </c:pt>
+                <c:pt idx="2">
+                  <c:v>2.35</c:v>
+                </c:pt>
+                <c:pt idx="3">
+                  <c:v>2.65</c:v>
+                </c:pt>
+                <c:pt idx="4">
+                  <c:v>3.5</c:v>
+                </c:pt>
+                <c:pt idx="5">
+                  <c:v>4.2</c:v>
+                </c:pt>
+                <c:pt idx="6">
+                  <c:v>5.0</c:v>
+                </c:pt>
+              </c:numCache>
+            </c:numRef>
+          </c:xVal>
+          <c:yVal>
+            <c:numRef>
+              <c:f>Sheet1!$B$38:$B$44</c:f>
+              <c:numCache>
+                <c:formatCode>General</c:formatCode>
+                <c:ptCount val="7"/>
+                <c:pt idx="0">
+                  <c:v>0.8757917187064503</c:v>
+                </c:pt>
+                <c:pt idx="1">
+                  <c:v>1.0831007941615967</c:v>
+                </c:pt>
+                <c:pt idx="2">
+                  <c:v>2.5142802378481397</c:v>
+                </c:pt>
+                <c:pt idx="3">
+                  <c:v>6.92856192970313</c:v>
+                </c:pt>
+                <c:pt idx="4">
+                  <c:v>0.547490530338462</c:v>
+                </c:pt>
+                <c:pt idx="5">
+                  <c:v>0.17859023847668906</c:v>
+                </c:pt>
+                <c:pt idx="6">
+                  <c:v>0.21117001409347894</c:v>
+                </c:pt>
+              </c:numCache>
+            </c:numRef>
+          </c:yVal>
+          <c:smooth val="0"/>
+        </c:ser>
+        <c:axId val="-2128940872"/>
+        <c:axId val="-2129643912"/>
+      </c:scatterChart>
+      <c:valAx>
+        <c:axId val="-2128940872"/>
+        <c:scaling>
+          <c:orientation val="minMax"/>
+          <c:max val="5.5"/>
+          <c:min val="1.0"/>
+        </c:scaling>
+        <c:delete val="0"/>
+        <c:axPos val="b"/>
+        <c:majorGridlines>
+          <c:spPr>
+            <a:ln>
+              <a:solidFill>
+                <a:srgbClr val="E6ECEE"/>
+              </a:solidFill>
+            </a:ln>
+          </c:spPr>
+        </c:majorGridlines>
+        <c:title>
+          <c:tx>
+            <c:rich>
+              <a:bodyPr/>
+              <a:lstStyle/>
+              <a:p>
+                <a:r>
+                  <a:rPr sz="1200" b="0">
+                    <a:solidFill>
+                      <a:srgbClr val="2B3A44"/>
+                    </a:solidFill>
+                  </a:rPr>
+                  <a:t>wave period (s)</a:t>
+                </a:r>
+              </a:p>
+            </c:rich>
+          </c:tx>
+          <c:layout/>
+          <c:overlay val="0"/>
+        </c:title>
+        <c:numFmt formatCode="General" sourceLinked="1"/>
+        <c:majorTickMark val="out"/>
+        <c:minorTickMark val="none"/>
+        <c:tickLblPos val="nextTo"/>
+        <c:spPr>
+          <a:ln>
+            <a:solidFill>
+              <a:srgbClr val="B9D6DC"/>
+            </a:solidFill>
+          </a:ln>
+        </c:spPr>
+        <c:txPr>
+          <a:bodyPr/>
+          <a:lstStyle/>
+          <a:p>
+            <a:pPr>
+              <a:defRPr sz="1100">
+                <a:solidFill>
+                  <a:srgbClr val="5C6B75"/>
+                </a:solidFill>
+              </a:defRPr>
+            </a:pPr>
+          </a:p>
+        </c:txPr>
+        <c:crossAx val="-2129643912"/>
+        <c:crosses val="autoZero"/>
+        <c:crossBetween val="midCat"/>
+      </c:valAx>
+      <c:valAx>
+        <c:axId val="-2129643912"/>
+        <c:scaling>
+          <c:orientation val="minMax"/>
           <c:max val="14.0"/>
           <c:min val="0.0"/>
         </c:scaling>
@@ -4577,6 +5593,625 @@
         <c:crossBetween val="midCat"/>
       </c:valAx>
     </c:plotArea>
+    <c:plotVisOnly val="1"/>
+    <c:dispBlanksAs val="gap"/>
+    <c:showDLblsOverMax val="0"/>
+  </c:chart>
+  <c:txPr>
+    <a:bodyPr/>
+    <a:lstStyle/>
+    <a:p>
+      <a:pPr>
+        <a:defRPr sz="1100">
+          <a:solidFill>
+            <a:srgbClr val="5C6B75"/>
+          </a:solidFill>
+          <a:latin typeface="Calibri"/>
+        </a:defRPr>
+      </a:pPr>
+      <a:endParaRPr lang="en-US"/>
+    </a:p>
+  </c:txPr>
+  <c:externalData r:id="rId1">
+    <c:autoUpdate val="0"/>
+  </c:externalData>
+</c:chartSpace>
+</file>
+
+<file path=ppt/charts/chart8.xml><?xml version="1.0" encoding="utf-8"?>
+<c:chartSpace xmlns:c="http://schemas.openxmlformats.org/drawingml/2006/chart" xmlns:a="http://schemas.openxmlformats.org/drawingml/2006/main" xmlns:r="http://schemas.openxmlformats.org/officeDocument/2006/relationships">
+  <c:chart>
+    <c:title>
+      <c:tx>
+        <c:rich>
+          <a:bodyPr/>
+          <a:lstStyle/>
+          <a:p>
+            <a:r>
+              <a:rPr sz="1300" b="1">
+                <a:solidFill>
+                  <a:srgbClr val="2B3A44"/>
+                </a:solidFill>
+              </a:rPr>
+              <a:t>Platform, 50 kg on the deck</a:t>
+            </a:r>
+          </a:p>
+        </c:rich>
+      </c:tx>
+      <c:layout/>
+      <c:overlay val="0"/>
+    </c:title>
+    <c:plotArea>
+      <c:scatterChart>
+        <c:scatterStyle val="lineMarker"/>
+        <c:varyColors val="0"/>
+        <c:ser>
+          <c:idx val="0"/>
+          <c:order val="0"/>
+          <c:tx>
+            <c:strRef>
+              <c:f>Sheet1!$B$1</c:f>
+              <c:strCache>
+                <c:ptCount val="1"/>
+                <c:pt idx="0">
+                  <c:v>unloaded</c:v>
+                </c:pt>
+              </c:strCache>
+            </c:strRef>
+          </c:tx>
+          <c:spPr>
+            <a:ln w="31750">
+              <a:solidFill>
+                <a:srgbClr val="8A959C"/>
+              </a:solidFill>
+            </a:ln>
+          </c:spPr>
+          <c:marker>
+            <c:symbol val="none"/>
+          </c:marker>
+          <c:xVal>
+            <c:numRef>
+              <c:f>Sheet1!$A$2:$A$8</c:f>
+              <c:numCache>
+                <c:formatCode>General</c:formatCode>
+                <c:ptCount val="7"/>
+                <c:pt idx="0">
+                  <c:v>1.5</c:v>
+                </c:pt>
+                <c:pt idx="1">
+                  <c:v>2.0</c:v>
+                </c:pt>
+                <c:pt idx="2">
+                  <c:v>2.35</c:v>
+                </c:pt>
+                <c:pt idx="3">
+                  <c:v>2.65</c:v>
+                </c:pt>
+                <c:pt idx="4">
+                  <c:v>3.5</c:v>
+                </c:pt>
+                <c:pt idx="5">
+                  <c:v>4.2</c:v>
+                </c:pt>
+                <c:pt idx="6">
+                  <c:v>5.0</c:v>
+                </c:pt>
+              </c:numCache>
+            </c:numRef>
+          </c:xVal>
+          <c:yVal>
+            <c:numRef>
+              <c:f>Sheet1!$B$2:$B$8</c:f>
+              <c:numCache>
+                <c:formatCode>General</c:formatCode>
+                <c:ptCount val="7"/>
+                <c:pt idx="0">
+                  <c:v>0.8410250742072352</c:v>
+                </c:pt>
+                <c:pt idx="1">
+                  <c:v>2.142535868978723</c:v>
+                </c:pt>
+                <c:pt idx="2">
+                  <c:v>4.044742319060423</c:v>
+                </c:pt>
+                <c:pt idx="3">
+                  <c:v>6.6174511082259215</c:v>
+                </c:pt>
+                <c:pt idx="4">
+                  <c:v>3.227315552302964</c:v>
+                </c:pt>
+                <c:pt idx="5">
+                  <c:v>0.875409252715577</c:v>
+                </c:pt>
+                <c:pt idx="6">
+                  <c:v>0.5040787103640686</c:v>
+                </c:pt>
+              </c:numCache>
+            </c:numRef>
+          </c:yVal>
+          <c:smooth val="0"/>
+        </c:ser>
+        <c:ser>
+          <c:idx val="1"/>
+          <c:order val="1"/>
+          <c:tx>
+            <c:strRef>
+              <c:f>Sheet1!$B$10</c:f>
+              <c:strCache>
+                <c:ptCount val="1"/>
+                <c:pt idx="0">
+                  <c:v>payload centred</c:v>
+                </c:pt>
+              </c:strCache>
+            </c:strRef>
+          </c:tx>
+          <c:spPr>
+            <a:ln w="31750">
+              <a:solidFill>
+                <a:srgbClr val="0C8B96"/>
+              </a:solidFill>
+            </a:ln>
+          </c:spPr>
+          <c:marker>
+            <c:symbol val="none"/>
+          </c:marker>
+          <c:xVal>
+            <c:numRef>
+              <c:f>Sheet1!$A$11:$A$17</c:f>
+              <c:numCache>
+                <c:formatCode>General</c:formatCode>
+                <c:ptCount val="7"/>
+                <c:pt idx="0">
+                  <c:v>1.5</c:v>
+                </c:pt>
+                <c:pt idx="1">
+                  <c:v>2.0</c:v>
+                </c:pt>
+                <c:pt idx="2">
+                  <c:v>2.35</c:v>
+                </c:pt>
+                <c:pt idx="3">
+                  <c:v>2.65</c:v>
+                </c:pt>
+                <c:pt idx="4">
+                  <c:v>3.5</c:v>
+                </c:pt>
+                <c:pt idx="5">
+                  <c:v>4.2</c:v>
+                </c:pt>
+                <c:pt idx="6">
+                  <c:v>5.0</c:v>
+                </c:pt>
+              </c:numCache>
+            </c:numRef>
+          </c:xVal>
+          <c:yVal>
+            <c:numRef>
+              <c:f>Sheet1!$B$11:$B$17</c:f>
+              <c:numCache>
+                <c:formatCode>General</c:formatCode>
+                <c:ptCount val="7"/>
+                <c:pt idx="0">
+                  <c:v>0.708716559886359</c:v>
+                </c:pt>
+                <c:pt idx="1">
+                  <c:v>1.6128752442659664</c:v>
+                </c:pt>
+                <c:pt idx="2">
+                  <c:v>2.800012325318408</c:v>
+                </c:pt>
+                <c:pt idx="3">
+                  <c:v>3.6107289759395824</c:v>
+                </c:pt>
+                <c:pt idx="4">
+                  <c:v>3.494398128769598</c:v>
+                </c:pt>
+                <c:pt idx="5">
+                  <c:v>11.063750711452268</c:v>
+                </c:pt>
+                <c:pt idx="6">
+                  <c:v>1.960468259796173</c:v>
+                </c:pt>
+              </c:numCache>
+            </c:numRef>
+          </c:yVal>
+          <c:smooth val="0"/>
+        </c:ser>
+        <c:ser>
+          <c:idx val="2"/>
+          <c:order val="2"/>
+          <c:tx>
+            <c:strRef>
+              <c:f>Sheet1!$B$19</c:f>
+              <c:strCache>
+                <c:ptCount val="1"/>
+                <c:pt idx="0">
+                  <c:v>shifted: 5° tilt</c:v>
+                </c:pt>
+              </c:strCache>
+            </c:strRef>
+          </c:tx>
+          <c:spPr>
+            <a:ln w="31750">
+              <a:solidFill>
+                <a:srgbClr val="C9772B"/>
+              </a:solidFill>
+            </a:ln>
+          </c:spPr>
+          <c:marker>
+            <c:symbol val="none"/>
+          </c:marker>
+          <c:xVal>
+            <c:numRef>
+              <c:f>Sheet1!$A$20:$A$26</c:f>
+              <c:numCache>
+                <c:formatCode>General</c:formatCode>
+                <c:ptCount val="7"/>
+                <c:pt idx="0">
+                  <c:v>1.5</c:v>
+                </c:pt>
+                <c:pt idx="1">
+                  <c:v>2.0</c:v>
+                </c:pt>
+                <c:pt idx="2">
+                  <c:v>2.35</c:v>
+                </c:pt>
+                <c:pt idx="3">
+                  <c:v>2.65</c:v>
+                </c:pt>
+                <c:pt idx="4">
+                  <c:v>3.5</c:v>
+                </c:pt>
+                <c:pt idx="5">
+                  <c:v>4.2</c:v>
+                </c:pt>
+                <c:pt idx="6">
+                  <c:v>5.0</c:v>
+                </c:pt>
+              </c:numCache>
+            </c:numRef>
+          </c:xVal>
+          <c:yVal>
+            <c:numRef>
+              <c:f>Sheet1!$B$20:$B$26</c:f>
+              <c:numCache>
+                <c:formatCode>General</c:formatCode>
+                <c:ptCount val="7"/>
+                <c:pt idx="0">
+                  <c:v>0.838110736246651</c:v>
+                </c:pt>
+                <c:pt idx="1">
+                  <c:v>1.834898422013471</c:v>
+                </c:pt>
+                <c:pt idx="2">
+                  <c:v>3.080145433978442</c:v>
+                </c:pt>
+                <c:pt idx="3">
+                  <c:v>3.813599953438331</c:v>
+                </c:pt>
+                <c:pt idx="4">
+                  <c:v>3.5058861273158235</c:v>
+                </c:pt>
+                <c:pt idx="5">
+                  <c:v>11.23183299621049</c:v>
+                </c:pt>
+                <c:pt idx="6">
+                  <c:v>1.9687266417507998</c:v>
+                </c:pt>
+              </c:numCache>
+            </c:numRef>
+          </c:yVal>
+          <c:smooth val="0"/>
+        </c:ser>
+        <c:ser>
+          <c:idx val="3"/>
+          <c:order val="3"/>
+          <c:tx>
+            <c:strRef>
+              <c:f>Sheet1!$B$28</c:f>
+              <c:strCache>
+                <c:ptCount val="1"/>
+                <c:pt idx="0">
+                  <c:v>shifted: 10° tilt</c:v>
+                </c:pt>
+              </c:strCache>
+            </c:strRef>
+          </c:tx>
+          <c:spPr>
+            <a:ln w="31750">
+              <a:solidFill>
+                <a:srgbClr val="B2432C"/>
+              </a:solidFill>
+            </a:ln>
+          </c:spPr>
+          <c:marker>
+            <c:symbol val="none"/>
+          </c:marker>
+          <c:xVal>
+            <c:numRef>
+              <c:f>Sheet1!$A$29:$A$35</c:f>
+              <c:numCache>
+                <c:formatCode>General</c:formatCode>
+                <c:ptCount val="7"/>
+                <c:pt idx="0">
+                  <c:v>1.5</c:v>
+                </c:pt>
+                <c:pt idx="1">
+                  <c:v>2.0</c:v>
+                </c:pt>
+                <c:pt idx="2">
+                  <c:v>2.35</c:v>
+                </c:pt>
+                <c:pt idx="3">
+                  <c:v>2.65</c:v>
+                </c:pt>
+                <c:pt idx="4">
+                  <c:v>3.5</c:v>
+                </c:pt>
+                <c:pt idx="5">
+                  <c:v>4.2</c:v>
+                </c:pt>
+                <c:pt idx="6">
+                  <c:v>5.0</c:v>
+                </c:pt>
+              </c:numCache>
+            </c:numRef>
+          </c:xVal>
+          <c:yVal>
+            <c:numRef>
+              <c:f>Sheet1!$B$29:$B$35</c:f>
+              <c:numCache>
+                <c:formatCode>General</c:formatCode>
+                <c:ptCount val="7"/>
+                <c:pt idx="0">
+                  <c:v>0.9698831441184217</c:v>
+                </c:pt>
+                <c:pt idx="1">
+                  <c:v>2.0460539485680247</c:v>
+                </c:pt>
+                <c:pt idx="2">
+                  <c:v>3.2933066114376737</c:v>
+                </c:pt>
+                <c:pt idx="3">
+                  <c:v>3.8071333932041145</c:v>
+                </c:pt>
+                <c:pt idx="4">
+                  <c:v>3.4654784752629206</c:v>
+                </c:pt>
+                <c:pt idx="5">
+                  <c:v>11.19282075714933</c:v>
+                </c:pt>
+                <c:pt idx="6">
+                  <c:v>1.8073363832339233</c:v>
+                </c:pt>
+              </c:numCache>
+            </c:numRef>
+          </c:yVal>
+          <c:smooth val="0"/>
+        </c:ser>
+        <c:ser>
+          <c:idx val="4"/>
+          <c:order val="4"/>
+          <c:tx>
+            <c:strRef>
+              <c:f>Sheet1!$B$37</c:f>
+              <c:strCache>
+                <c:ptCount val="1"/>
+                <c:pt idx="0">
+                  <c:v>payload centred (without preload)</c:v>
+                </c:pt>
+              </c:strCache>
+            </c:strRef>
+          </c:tx>
+          <c:spPr>
+            <a:ln w="15875">
+              <a:solidFill>
+                <a:srgbClr val="0C8B96"/>
+              </a:solidFill>
+              <a:prstDash val="dash"/>
+            </a:ln>
+          </c:spPr>
+          <c:marker>
+            <c:symbol val="none"/>
+          </c:marker>
+          <c:xVal>
+            <c:numRef>
+              <c:f>Sheet1!$A$38:$A$44</c:f>
+              <c:numCache>
+                <c:formatCode>General</c:formatCode>
+                <c:ptCount val="7"/>
+                <c:pt idx="0">
+                  <c:v>1.5</c:v>
+                </c:pt>
+                <c:pt idx="1">
+                  <c:v>2.0</c:v>
+                </c:pt>
+                <c:pt idx="2">
+                  <c:v>2.35</c:v>
+                </c:pt>
+                <c:pt idx="3">
+                  <c:v>2.65</c:v>
+                </c:pt>
+                <c:pt idx="4">
+                  <c:v>3.5</c:v>
+                </c:pt>
+                <c:pt idx="5">
+                  <c:v>4.2</c:v>
+                </c:pt>
+                <c:pt idx="6">
+                  <c:v>5.0</c:v>
+                </c:pt>
+              </c:numCache>
+            </c:numRef>
+          </c:xVal>
+          <c:yVal>
+            <c:numRef>
+              <c:f>Sheet1!$B$38:$B$44</c:f>
+              <c:numCache>
+                <c:formatCode>General</c:formatCode>
+                <c:ptCount val="7"/>
+                <c:pt idx="0">
+                  <c:v>0.7429738342133168</c:v>
+                </c:pt>
+                <c:pt idx="1">
+                  <c:v>1.824692913045666</c:v>
+                </c:pt>
+                <c:pt idx="2">
+                  <c:v>3.5276299117803</c:v>
+                </c:pt>
+                <c:pt idx="3">
+                  <c:v>7.208421230710721</c:v>
+                </c:pt>
+                <c:pt idx="4">
+                  <c:v>0.6193729406596259</c:v>
+                </c:pt>
+                <c:pt idx="5">
+                  <c:v>0.6055026795740803</c:v>
+                </c:pt>
+                <c:pt idx="6">
+                  <c:v>0.8530371765577375</c:v>
+                </c:pt>
+              </c:numCache>
+            </c:numRef>
+          </c:yVal>
+          <c:smooth val="0"/>
+        </c:ser>
+        <c:axId val="-2128940872"/>
+        <c:axId val="-2129643912"/>
+      </c:scatterChart>
+      <c:valAx>
+        <c:axId val="-2128940872"/>
+        <c:scaling>
+          <c:orientation val="minMax"/>
+          <c:max val="5.5"/>
+          <c:min val="1.0"/>
+        </c:scaling>
+        <c:delete val="0"/>
+        <c:axPos val="b"/>
+        <c:majorGridlines>
+          <c:spPr>
+            <a:ln>
+              <a:solidFill>
+                <a:srgbClr val="E6ECEE"/>
+              </a:solidFill>
+            </a:ln>
+          </c:spPr>
+        </c:majorGridlines>
+        <c:title>
+          <c:tx>
+            <c:rich>
+              <a:bodyPr/>
+              <a:lstStyle/>
+              <a:p>
+                <a:r>
+                  <a:rPr sz="1200" b="0">
+                    <a:solidFill>
+                      <a:srgbClr val="2B3A44"/>
+                    </a:solidFill>
+                  </a:rPr>
+                  <a:t>wave period (s)</a:t>
+                </a:r>
+              </a:p>
+            </c:rich>
+          </c:tx>
+          <c:layout/>
+          <c:overlay val="0"/>
+        </c:title>
+        <c:numFmt formatCode="General" sourceLinked="1"/>
+        <c:majorTickMark val="out"/>
+        <c:minorTickMark val="none"/>
+        <c:tickLblPos val="nextTo"/>
+        <c:spPr>
+          <a:ln>
+            <a:solidFill>
+              <a:srgbClr val="B9D6DC"/>
+            </a:solidFill>
+          </a:ln>
+        </c:spPr>
+        <c:txPr>
+          <a:bodyPr/>
+          <a:lstStyle/>
+          <a:p>
+            <a:pPr>
+              <a:defRPr sz="1100">
+                <a:solidFill>
+                  <a:srgbClr val="5C6B75"/>
+                </a:solidFill>
+              </a:defRPr>
+            </a:pPr>
+          </a:p>
+        </c:txPr>
+        <c:crossAx val="-2129643912"/>
+        <c:crosses val="autoZero"/>
+        <c:crossBetween val="midCat"/>
+      </c:valAx>
+      <c:valAx>
+        <c:axId val="-2129643912"/>
+        <c:scaling>
+          <c:orientation val="minMax"/>
+          <c:max val="14.0"/>
+          <c:min val="0.0"/>
+        </c:scaling>
+        <c:delete val="0"/>
+        <c:axPos val="l"/>
+        <c:majorGridlines>
+          <c:spPr>
+            <a:ln>
+              <a:solidFill>
+                <a:srgbClr val="E6ECEE"/>
+              </a:solidFill>
+            </a:ln>
+          </c:spPr>
+        </c:majorGridlines>
+        <c:title>
+          <c:tx>
+            <c:rich>
+              <a:bodyPr/>
+              <a:lstStyle/>
+              <a:p>
+                <a:r>
+                  <a:rPr sz="1200" b="0">
+                    <a:solidFill>
+                      <a:srgbClr val="2B3A44"/>
+                    </a:solidFill>
+                  </a:rPr>
+                  <a:t>largest gimbal angle (°)</a:t>
+                </a:r>
+              </a:p>
+            </c:rich>
+          </c:tx>
+          <c:layout/>
+          <c:overlay val="0"/>
+        </c:title>
+        <c:numFmt formatCode="General" sourceLinked="1"/>
+        <c:majorTickMark val="out"/>
+        <c:minorTickMark val="none"/>
+        <c:tickLblPos val="nextTo"/>
+        <c:spPr>
+          <a:ln>
+            <a:solidFill>
+              <a:srgbClr val="B9D6DC"/>
+            </a:solidFill>
+          </a:ln>
+        </c:spPr>
+        <c:txPr>
+          <a:bodyPr/>
+          <a:lstStyle/>
+          <a:p>
+            <a:pPr>
+              <a:defRPr sz="1100">
+                <a:solidFill>
+                  <a:srgbClr val="5C6B75"/>
+                </a:solidFill>
+              </a:defRPr>
+            </a:pPr>
+          </a:p>
+        </c:txPr>
+        <c:crossAx val="-2128940872"/>
+        <c:crosses val="autoZero"/>
+        <c:crossBetween val="midCat"/>
+      </c:valAx>
+    </c:plotArea>
     <c:legend>
       <c:legendPos val="b"/>
       <c:layout/>
@@ -4595,6 +6230,538 @@
         </a:p>
       </c:txPr>
     </c:legend>
+    <c:plotVisOnly val="1"/>
+    <c:dispBlanksAs val="gap"/>
+    <c:showDLblsOverMax val="0"/>
+  </c:chart>
+  <c:txPr>
+    <a:bodyPr/>
+    <a:lstStyle/>
+    <a:p>
+      <a:pPr>
+        <a:defRPr sz="1100">
+          <a:solidFill>
+            <a:srgbClr val="5C6B75"/>
+          </a:solidFill>
+          <a:latin typeface="Calibri"/>
+        </a:defRPr>
+      </a:pPr>
+      <a:endParaRPr lang="en-US"/>
+    </a:p>
+  </c:txPr>
+  <c:externalData r:id="rId1">
+    <c:autoUpdate val="0"/>
+  </c:externalData>
+</c:chartSpace>
+</file>
+
+<file path=ppt/charts/chart9.xml><?xml version="1.0" encoding="utf-8"?>
+<c:chartSpace xmlns:c="http://schemas.openxmlformats.org/drawingml/2006/chart" xmlns:a="http://schemas.openxmlformats.org/drawingml/2006/main" xmlns:r="http://schemas.openxmlformats.org/officeDocument/2006/relationships">
+  <c:chart>
+    <c:title>
+      <c:tx>
+        <c:rich>
+          <a:bodyPr/>
+          <a:lstStyle/>
+          <a:p>
+            <a:r>
+              <a:rPr sz="1300" b="1">
+                <a:solidFill>
+                  <a:srgbClr val="2B3A44"/>
+                </a:solidFill>
+              </a:rPr>
+              <a:t>Cluster, 12.5 kg on the hub</a:t>
+            </a:r>
+          </a:p>
+        </c:rich>
+      </c:tx>
+      <c:layout/>
+      <c:overlay val="0"/>
+    </c:title>
+    <c:plotArea>
+      <c:scatterChart>
+        <c:scatterStyle val="lineMarker"/>
+        <c:varyColors val="0"/>
+        <c:ser>
+          <c:idx val="0"/>
+          <c:order val="0"/>
+          <c:tx>
+            <c:strRef>
+              <c:f>Sheet1!$B$1</c:f>
+              <c:strCache>
+                <c:ptCount val="1"/>
+                <c:pt idx="0">
+                  <c:v>unloaded</c:v>
+                </c:pt>
+              </c:strCache>
+            </c:strRef>
+          </c:tx>
+          <c:spPr>
+            <a:ln w="31750">
+              <a:solidFill>
+                <a:srgbClr val="8A959C"/>
+              </a:solidFill>
+            </a:ln>
+          </c:spPr>
+          <c:marker>
+            <c:symbol val="none"/>
+          </c:marker>
+          <c:xVal>
+            <c:numRef>
+              <c:f>Sheet1!$A$2:$A$8</c:f>
+              <c:numCache>
+                <c:formatCode>General</c:formatCode>
+                <c:ptCount val="7"/>
+                <c:pt idx="0">
+                  <c:v>1.5</c:v>
+                </c:pt>
+                <c:pt idx="1">
+                  <c:v>2.0</c:v>
+                </c:pt>
+                <c:pt idx="2">
+                  <c:v>2.35</c:v>
+                </c:pt>
+                <c:pt idx="3">
+                  <c:v>2.65</c:v>
+                </c:pt>
+                <c:pt idx="4">
+                  <c:v>3.5</c:v>
+                </c:pt>
+                <c:pt idx="5">
+                  <c:v>4.2</c:v>
+                </c:pt>
+                <c:pt idx="6">
+                  <c:v>5.0</c:v>
+                </c:pt>
+              </c:numCache>
+            </c:numRef>
+          </c:xVal>
+          <c:yVal>
+            <c:numRef>
+              <c:f>Sheet1!$B$2:$B$8</c:f>
+              <c:numCache>
+                <c:formatCode>General</c:formatCode>
+                <c:ptCount val="7"/>
+                <c:pt idx="0">
+                  <c:v>0.032377195575805234</c:v>
+                </c:pt>
+                <c:pt idx="1">
+                  <c:v>0.15738183460520544</c:v>
+                </c:pt>
+                <c:pt idx="2">
+                  <c:v>0.3306757009252356</c:v>
+                </c:pt>
+                <c:pt idx="3">
+                  <c:v>0.4240961510848143</c:v>
+                </c:pt>
+                <c:pt idx="4">
+                  <c:v>0.2092097259356519</c:v>
+                </c:pt>
+                <c:pt idx="5">
+                  <c:v>0.12611447436692386</c:v>
+                </c:pt>
+                <c:pt idx="6">
+                  <c:v>0.08381186106464945</c:v>
+                </c:pt>
+              </c:numCache>
+            </c:numRef>
+          </c:yVal>
+          <c:smooth val="0"/>
+        </c:ser>
+        <c:ser>
+          <c:idx val="1"/>
+          <c:order val="1"/>
+          <c:tx>
+            <c:strRef>
+              <c:f>Sheet1!$B$10</c:f>
+              <c:strCache>
+                <c:ptCount val="1"/>
+                <c:pt idx="0">
+                  <c:v>payload centred</c:v>
+                </c:pt>
+              </c:strCache>
+            </c:strRef>
+          </c:tx>
+          <c:spPr>
+            <a:ln w="31750">
+              <a:solidFill>
+                <a:srgbClr val="0C8B96"/>
+              </a:solidFill>
+            </a:ln>
+          </c:spPr>
+          <c:marker>
+            <c:symbol val="none"/>
+          </c:marker>
+          <c:xVal>
+            <c:numRef>
+              <c:f>Sheet1!$A$11:$A$17</c:f>
+              <c:numCache>
+                <c:formatCode>General</c:formatCode>
+                <c:ptCount val="7"/>
+                <c:pt idx="0">
+                  <c:v>1.5</c:v>
+                </c:pt>
+                <c:pt idx="1">
+                  <c:v>2.0</c:v>
+                </c:pt>
+                <c:pt idx="2">
+                  <c:v>2.35</c:v>
+                </c:pt>
+                <c:pt idx="3">
+                  <c:v>2.65</c:v>
+                </c:pt>
+                <c:pt idx="4">
+                  <c:v>3.5</c:v>
+                </c:pt>
+                <c:pt idx="5">
+                  <c:v>4.2</c:v>
+                </c:pt>
+                <c:pt idx="6">
+                  <c:v>5.0</c:v>
+                </c:pt>
+              </c:numCache>
+            </c:numRef>
+          </c:xVal>
+          <c:yVal>
+            <c:numRef>
+              <c:f>Sheet1!$B$11:$B$17</c:f>
+              <c:numCache>
+                <c:formatCode>General</c:formatCode>
+                <c:ptCount val="7"/>
+                <c:pt idx="0">
+                  <c:v>0.020931016156902512</c:v>
+                </c:pt>
+                <c:pt idx="1">
+                  <c:v>0.10930938367872793</c:v>
+                </c:pt>
+                <c:pt idx="2">
+                  <c:v>0.25887934564788356</c:v>
+                </c:pt>
+                <c:pt idx="3">
+                  <c:v>0.3815212794113695</c:v>
+                </c:pt>
+                <c:pt idx="4">
+                  <c:v>0.22301457844337874</c:v>
+                </c:pt>
+                <c:pt idx="5">
+                  <c:v>0.13077472973570628</c:v>
+                </c:pt>
+                <c:pt idx="6">
+                  <c:v>0.08466542185048394</c:v>
+                </c:pt>
+              </c:numCache>
+            </c:numRef>
+          </c:yVal>
+          <c:smooth val="0"/>
+        </c:ser>
+        <c:ser>
+          <c:idx val="2"/>
+          <c:order val="2"/>
+          <c:tx>
+            <c:strRef>
+              <c:f>Sheet1!$B$19</c:f>
+              <c:strCache>
+                <c:ptCount val="1"/>
+                <c:pt idx="0">
+                  <c:v>shifted: 5° tilt</c:v>
+                </c:pt>
+              </c:strCache>
+            </c:strRef>
+          </c:tx>
+          <c:spPr>
+            <a:ln w="31750">
+              <a:solidFill>
+                <a:srgbClr val="C9772B"/>
+              </a:solidFill>
+            </a:ln>
+          </c:spPr>
+          <c:marker>
+            <c:symbol val="none"/>
+          </c:marker>
+          <c:xVal>
+            <c:numRef>
+              <c:f>Sheet1!$A$20:$A$26</c:f>
+              <c:numCache>
+                <c:formatCode>General</c:formatCode>
+                <c:ptCount val="7"/>
+                <c:pt idx="0">
+                  <c:v>1.5</c:v>
+                </c:pt>
+                <c:pt idx="1">
+                  <c:v>2.0</c:v>
+                </c:pt>
+                <c:pt idx="2">
+                  <c:v>2.35</c:v>
+                </c:pt>
+                <c:pt idx="3">
+                  <c:v>2.65</c:v>
+                </c:pt>
+                <c:pt idx="4">
+                  <c:v>3.5</c:v>
+                </c:pt>
+                <c:pt idx="5">
+                  <c:v>4.2</c:v>
+                </c:pt>
+                <c:pt idx="6">
+                  <c:v>5.0</c:v>
+                </c:pt>
+              </c:numCache>
+            </c:numRef>
+          </c:xVal>
+          <c:yVal>
+            <c:numRef>
+              <c:f>Sheet1!$B$20:$B$26</c:f>
+              <c:numCache>
+                <c:formatCode>General</c:formatCode>
+                <c:ptCount val="7"/>
+                <c:pt idx="0">
+                  <c:v>0.02291026413502672</c:v>
+                </c:pt>
+                <c:pt idx="1">
+                  <c:v>0.1094782324389758</c:v>
+                </c:pt>
+                <c:pt idx="2">
+                  <c:v>0.25667524012588183</c:v>
+                </c:pt>
+                <c:pt idx="3">
+                  <c:v>0.3792271644096107</c:v>
+                </c:pt>
+                <c:pt idx="4">
+                  <c:v>0.22338004718968016</c:v>
+                </c:pt>
+                <c:pt idx="5">
+                  <c:v>0.1312190788350767</c:v>
+                </c:pt>
+                <c:pt idx="6">
+                  <c:v>0.08469380091792483</c:v>
+                </c:pt>
+              </c:numCache>
+            </c:numRef>
+          </c:yVal>
+          <c:smooth val="0"/>
+        </c:ser>
+        <c:ser>
+          <c:idx val="3"/>
+          <c:order val="3"/>
+          <c:tx>
+            <c:strRef>
+              <c:f>Sheet1!$B$28</c:f>
+              <c:strCache>
+                <c:ptCount val="1"/>
+                <c:pt idx="0">
+                  <c:v>shifted: 10° tilt</c:v>
+                </c:pt>
+              </c:strCache>
+            </c:strRef>
+          </c:tx>
+          <c:spPr>
+            <a:ln w="31750">
+              <a:solidFill>
+                <a:srgbClr val="B2432C"/>
+              </a:solidFill>
+            </a:ln>
+          </c:spPr>
+          <c:marker>
+            <c:symbol val="none"/>
+          </c:marker>
+          <c:xVal>
+            <c:numRef>
+              <c:f>Sheet1!$A$29:$A$35</c:f>
+              <c:numCache>
+                <c:formatCode>General</c:formatCode>
+                <c:ptCount val="7"/>
+                <c:pt idx="0">
+                  <c:v>1.5</c:v>
+                </c:pt>
+                <c:pt idx="1">
+                  <c:v>2.0</c:v>
+                </c:pt>
+                <c:pt idx="2">
+                  <c:v>2.35</c:v>
+                </c:pt>
+                <c:pt idx="3">
+                  <c:v>2.65</c:v>
+                </c:pt>
+                <c:pt idx="4">
+                  <c:v>3.5</c:v>
+                </c:pt>
+                <c:pt idx="5">
+                  <c:v>4.2</c:v>
+                </c:pt>
+                <c:pt idx="6">
+                  <c:v>5.0</c:v>
+                </c:pt>
+              </c:numCache>
+            </c:numRef>
+          </c:xVal>
+          <c:yVal>
+            <c:numRef>
+              <c:f>Sheet1!$B$29:$B$35</c:f>
+              <c:numCache>
+                <c:formatCode>General</c:formatCode>
+                <c:ptCount val="7"/>
+                <c:pt idx="0">
+                  <c:v>0.028474657234206533</c:v>
+                </c:pt>
+                <c:pt idx="1">
+                  <c:v>0.11013491311969566</c:v>
+                </c:pt>
+                <c:pt idx="2">
+                  <c:v>0.2517877877455819</c:v>
+                </c:pt>
+                <c:pt idx="3">
+                  <c:v>0.3742647509852939</c:v>
+                </c:pt>
+                <c:pt idx="4">
+                  <c:v>0.22455743587759225</c:v>
+                </c:pt>
+                <c:pt idx="5">
+                  <c:v>0.13355823999736738</c:v>
+                </c:pt>
+                <c:pt idx="6">
+                  <c:v>0.08479357924063834</c:v>
+                </c:pt>
+              </c:numCache>
+            </c:numRef>
+          </c:yVal>
+          <c:smooth val="0"/>
+        </c:ser>
+        <c:axId val="-2128940872"/>
+        <c:axId val="-2129643912"/>
+      </c:scatterChart>
+      <c:valAx>
+        <c:axId val="-2128940872"/>
+        <c:scaling>
+          <c:orientation val="minMax"/>
+          <c:max val="5.5"/>
+          <c:min val="1.0"/>
+        </c:scaling>
+        <c:delete val="0"/>
+        <c:axPos val="b"/>
+        <c:majorGridlines>
+          <c:spPr>
+            <a:ln>
+              <a:solidFill>
+                <a:srgbClr val="E6ECEE"/>
+              </a:solidFill>
+            </a:ln>
+          </c:spPr>
+        </c:majorGridlines>
+        <c:title>
+          <c:tx>
+            <c:rich>
+              <a:bodyPr/>
+              <a:lstStyle/>
+              <a:p>
+                <a:r>
+                  <a:rPr sz="1200" b="0">
+                    <a:solidFill>
+                      <a:srgbClr val="2B3A44"/>
+                    </a:solidFill>
+                  </a:rPr>
+                  <a:t>wave period (s)</a:t>
+                </a:r>
+              </a:p>
+            </c:rich>
+          </c:tx>
+          <c:layout/>
+          <c:overlay val="0"/>
+        </c:title>
+        <c:numFmt formatCode="General" sourceLinked="1"/>
+        <c:majorTickMark val="out"/>
+        <c:minorTickMark val="none"/>
+        <c:tickLblPos val="nextTo"/>
+        <c:spPr>
+          <a:ln>
+            <a:solidFill>
+              <a:srgbClr val="B9D6DC"/>
+            </a:solidFill>
+          </a:ln>
+        </c:spPr>
+        <c:txPr>
+          <a:bodyPr/>
+          <a:lstStyle/>
+          <a:p>
+            <a:pPr>
+              <a:defRPr sz="1100">
+                <a:solidFill>
+                  <a:srgbClr val="5C6B75"/>
+                </a:solidFill>
+              </a:defRPr>
+            </a:pPr>
+          </a:p>
+        </c:txPr>
+        <c:crossAx val="-2129643912"/>
+        <c:crosses val="autoZero"/>
+        <c:crossBetween val="midCat"/>
+      </c:valAx>
+      <c:valAx>
+        <c:axId val="-2129643912"/>
+        <c:scaling>
+          <c:orientation val="minMax"/>
+          <c:max val="0.5"/>
+          <c:min val="0.0"/>
+        </c:scaling>
+        <c:delete val="0"/>
+        <c:axPos val="l"/>
+        <c:majorGridlines>
+          <c:spPr>
+            <a:ln>
+              <a:solidFill>
+                <a:srgbClr val="E6ECEE"/>
+              </a:solidFill>
+            </a:ln>
+          </c:spPr>
+        </c:majorGridlines>
+        <c:title>
+          <c:tx>
+            <c:rich>
+              <a:bodyPr/>
+              <a:lstStyle/>
+              <a:p>
+                <a:r>
+                  <a:rPr sz="1200" b="0">
+                    <a:solidFill>
+                      <a:srgbClr val="2B3A44"/>
+                    </a:solidFill>
+                  </a:rPr>
+                  <a:t>vertical acceleration (m/s²)</a:t>
+                </a:r>
+              </a:p>
+            </c:rich>
+          </c:tx>
+          <c:layout/>
+          <c:overlay val="0"/>
+        </c:title>
+        <c:numFmt formatCode="General" sourceLinked="1"/>
+        <c:majorTickMark val="out"/>
+        <c:minorTickMark val="none"/>
+        <c:tickLblPos val="nextTo"/>
+        <c:spPr>
+          <a:ln>
+            <a:solidFill>
+              <a:srgbClr val="B9D6DC"/>
+            </a:solidFill>
+          </a:ln>
+        </c:spPr>
+        <c:txPr>
+          <a:bodyPr/>
+          <a:lstStyle/>
+          <a:p>
+            <a:pPr>
+              <a:defRPr sz="1100">
+                <a:solidFill>
+                  <a:srgbClr val="5C6B75"/>
+                </a:solidFill>
+              </a:defRPr>
+            </a:pPr>
+          </a:p>
+        </c:txPr>
+        <c:crossAx val="-2128940872"/>
+        <c:crosses val="autoZero"/>
+        <c:crossBetween val="midCat"/>
+      </c:valAx>
+    </c:plotArea>
     <c:plotVisOnly val="1"/>
     <c:dispBlanksAs val="gap"/>
     <c:showDLblsOverMax val="0"/>
@@ -5085,7 +7252,7 @@
           <a:lstStyle/>
           <a:p>
             <a:r>
-              <a:t>Wouldn't each buoy rock at its own period once the load is shifted? On its own, yes: at 10 degrees the cluster's loaded pair is softer and would rock at about 4.45 seconds, the other pair at about 4.0. But they all hang from the same hub. In the mode the waves drive, every buoy leans the same way while the hub slides under them, so they rock together at one period, set by the sum of their stiffnesses. Shifting the payload softens one side and stiffens the other by almost the same amount, so the sum, and the period, hardly change.</a:t>
+              <a:t>Accelerations at the payload, where it sits in each case. Vertical first: small on both articles, at most about four hundredths of g, peaking near the heave resonance around 2.65 s. The payload's mass lowers them a little and the tilt hardly changes them.</a:t>
             </a:r>
           </a:p>
         </p:txBody>
@@ -5155,7 +7322,7 @@
           <a:lstStyle/>
           <a:p>
             <a:r>
-              <a:t>What to take away. With a payload on board, the period to watch is about 4.2 seconds, where the buoys rock hard on their gimbals, and that holds whether the payload is level or not. The tilt itself matters for freeboard and for pitch near the heave resonance. The analysis is linear and in regular waves along the shift; the large rocking angles are past FloatSim's small-angle range, so their size is indicative.</a:t>
+              <a:t>Lateral acceleration, horizontal along the waves, as the payload feels it: the deck's motion plus gravity swinging along the deck as it pitches. The platform is much calmer in short waves because its 2.4 m span averages them out. Near the heave resonance the tilt adds lateral load through the coupled pitch. And at 4.2 s, with a payload, both feel about half a metre per second squared: the buoys rocking on their gimbals make the hub or deck slide along the waves.</a:t>
             </a:r>
           </a:p>
         </p:txBody>
@@ -5181,6 +7348,216 @@
 </file>
 
 <file path=ppt/notesSlides/notesSlide12.xml><?xml version="1.0" encoding="utf-8"?>
+<p:notes xmlns:a="http://schemas.openxmlformats.org/drawingml/2006/main" xmlns:p="http://schemas.openxmlformats.org/presentationml/2006/main" xmlns:r="http://schemas.openxmlformats.org/officeDocument/2006/relationships">
+  <p:cSld>
+    <p:spTree>
+      <p:nvGrpSpPr>
+        <p:cNvPr id="1" name=""/>
+        <p:cNvGrpSpPr/>
+        <p:nvPr/>
+      </p:nvGrpSpPr>
+      <p:grpSpPr>
+        <a:xfrm>
+          <a:off x="0" y="0"/>
+          <a:ext cx="0" cy="0"/>
+          <a:chOff x="0" y="0"/>
+          <a:chExt cx="0" cy="0"/>
+        </a:xfrm>
+      </p:grpSpPr>
+      <p:sp>
+        <p:nvSpPr>
+          <p:cNvPr id="2" name="Slide Image Placeholder 1"/>
+          <p:cNvSpPr>
+            <a:spLocks noGrp="1"/>
+          </p:cNvSpPr>
+          <p:nvPr>
+            <p:ph type="sldImg" idx="2"/>
+          </p:nvPr>
+        </p:nvSpPr>
+        <p:spPr/>
+      </p:sp>
+      <p:sp>
+        <p:nvSpPr>
+          <p:cNvPr id="3" name="Notes Placeholder 2"/>
+          <p:cNvSpPr>
+            <a:spLocks noGrp="1"/>
+          </p:cNvSpPr>
+          <p:nvPr>
+            <p:ph type="body" idx="3" sz="quarter"/>
+          </p:nvPr>
+        </p:nvSpPr>
+        <p:spPr/>
+        <p:txBody>
+          <a:bodyPr/>
+          <a:lstStyle/>
+          <a:p>
+            <a:r>
+              <a:t>For the payload's lateral restraint, the static tilt is the biggest load. Tilted 10 degrees, the payload feels a constant 1.7 metres per second squared along the deck from gravity alone, about 0.17 g, before any wave. The waves add at most about 0.8 on top, for a total of about a quarter of g at H = 0.1 m.</a:t>
+            </a:r>
+          </a:p>
+        </p:txBody>
+      </p:sp>
+      <p:sp>
+        <p:nvSpPr>
+          <p:cNvPr id="4" name="Slide Number Placeholder 3"/>
+          <p:cNvSpPr>
+            <a:spLocks noGrp="1"/>
+          </p:cNvSpPr>
+          <p:nvPr>
+            <p:ph type="sldNum" idx="5" sz="quarter"/>
+          </p:nvPr>
+        </p:nvSpPr>
+        <p:spPr/>
+      </p:sp>
+    </p:spTree>
+  </p:cSld>
+  <p:clrMapOvr>
+    <a:masterClrMapping/>
+  </p:clrMapOvr>
+</p:notes>
+</file>
+
+<file path=ppt/notesSlides/notesSlide13.xml><?xml version="1.0" encoding="utf-8"?>
+<p:notes xmlns:a="http://schemas.openxmlformats.org/drawingml/2006/main" xmlns:p="http://schemas.openxmlformats.org/presentationml/2006/main" xmlns:r="http://schemas.openxmlformats.org/officeDocument/2006/relationships">
+  <p:cSld>
+    <p:spTree>
+      <p:nvGrpSpPr>
+        <p:cNvPr id="1" name=""/>
+        <p:cNvGrpSpPr/>
+        <p:nvPr/>
+      </p:nvGrpSpPr>
+      <p:grpSpPr>
+        <a:xfrm>
+          <a:off x="0" y="0"/>
+          <a:ext cx="0" cy="0"/>
+          <a:chOff x="0" y="0"/>
+          <a:chExt cx="0" cy="0"/>
+        </a:xfrm>
+      </p:grpSpPr>
+      <p:sp>
+        <p:nvSpPr>
+          <p:cNvPr id="2" name="Slide Image Placeholder 1"/>
+          <p:cNvSpPr>
+            <a:spLocks noGrp="1"/>
+          </p:cNvSpPr>
+          <p:nvPr>
+            <p:ph type="sldImg" idx="2"/>
+          </p:nvPr>
+        </p:nvSpPr>
+        <p:spPr/>
+      </p:sp>
+      <p:sp>
+        <p:nvSpPr>
+          <p:cNvPr id="3" name="Notes Placeholder 2"/>
+          <p:cNvSpPr>
+            <a:spLocks noGrp="1"/>
+          </p:cNvSpPr>
+          <p:nvPr>
+            <p:ph type="body" idx="3" sz="quarter"/>
+          </p:nvPr>
+        </p:nvSpPr>
+        <p:spPr/>
+        <p:txBody>
+          <a:bodyPr/>
+          <a:lstStyle/>
+          <a:p>
+            <a:r>
+              <a:t>Wouldn't each buoy rock at its own period once the load is shifted? On its own, yes: at 10 degrees the cluster's loaded pair is softer and would rock at about 4.45 seconds, the other pair at about 4.0. But they all hang from the same hub. In the mode the waves drive, every buoy leans the same way while the hub slides under them, so they rock together at one period, set by the sum of their stiffnesses. Shifting the payload softens one side and stiffens the other by almost the same amount, so the sum, and the period, hardly change.</a:t>
+            </a:r>
+          </a:p>
+        </p:txBody>
+      </p:sp>
+      <p:sp>
+        <p:nvSpPr>
+          <p:cNvPr id="4" name="Slide Number Placeholder 3"/>
+          <p:cNvSpPr>
+            <a:spLocks noGrp="1"/>
+          </p:cNvSpPr>
+          <p:nvPr>
+            <p:ph type="sldNum" idx="5" sz="quarter"/>
+          </p:nvPr>
+        </p:nvSpPr>
+        <p:spPr/>
+      </p:sp>
+    </p:spTree>
+  </p:cSld>
+  <p:clrMapOvr>
+    <a:masterClrMapping/>
+  </p:clrMapOvr>
+</p:notes>
+</file>
+
+<file path=ppt/notesSlides/notesSlide14.xml><?xml version="1.0" encoding="utf-8"?>
+<p:notes xmlns:a="http://schemas.openxmlformats.org/drawingml/2006/main" xmlns:p="http://schemas.openxmlformats.org/presentationml/2006/main" xmlns:r="http://schemas.openxmlformats.org/officeDocument/2006/relationships">
+  <p:cSld>
+    <p:spTree>
+      <p:nvGrpSpPr>
+        <p:cNvPr id="1" name=""/>
+        <p:cNvGrpSpPr/>
+        <p:nvPr/>
+      </p:nvGrpSpPr>
+      <p:grpSpPr>
+        <a:xfrm>
+          <a:off x="0" y="0"/>
+          <a:ext cx="0" cy="0"/>
+          <a:chOff x="0" y="0"/>
+          <a:chExt cx="0" cy="0"/>
+        </a:xfrm>
+      </p:grpSpPr>
+      <p:sp>
+        <p:nvSpPr>
+          <p:cNvPr id="2" name="Slide Image Placeholder 1"/>
+          <p:cNvSpPr>
+            <a:spLocks noGrp="1"/>
+          </p:cNvSpPr>
+          <p:nvPr>
+            <p:ph type="sldImg" idx="2"/>
+          </p:nvPr>
+        </p:nvSpPr>
+        <p:spPr/>
+      </p:sp>
+      <p:sp>
+        <p:nvSpPr>
+          <p:cNvPr id="3" name="Notes Placeholder 2"/>
+          <p:cNvSpPr>
+            <a:spLocks noGrp="1"/>
+          </p:cNvSpPr>
+          <p:nvPr>
+            <p:ph type="body" idx="3" sz="quarter"/>
+          </p:nvPr>
+        </p:nvSpPr>
+        <p:spPr/>
+        <p:txBody>
+          <a:bodyPr/>
+          <a:lstStyle/>
+          <a:p>
+            <a:r>
+              <a:t>What to take away. With a payload on board, the period to watch is about 4.2 seconds, where the buoys rock hard on their gimbals, and that holds whether the payload is level or not. The tilt itself matters for freeboard and for pitch near the heave resonance. The analysis is linear and in regular waves along the shift; the large rocking angles are past FloatSim's small-angle range, so their size is indicative.</a:t>
+            </a:r>
+          </a:p>
+        </p:txBody>
+      </p:sp>
+      <p:sp>
+        <p:nvSpPr>
+          <p:cNvPr id="4" name="Slide Number Placeholder 3"/>
+          <p:cNvSpPr>
+            <a:spLocks noGrp="1"/>
+          </p:cNvSpPr>
+          <p:nvPr>
+            <p:ph type="sldNum" idx="5" sz="quarter"/>
+          </p:nvPr>
+        </p:nvSpPr>
+        <p:spPr/>
+      </p:sp>
+    </p:spTree>
+  </p:cSld>
+  <p:clrMapOvr>
+    <a:masterClrMapping/>
+  </p:clrMapOvr>
+</p:notes>
+</file>
+
+<file path=ppt/notesSlides/notesSlide15.xml><?xml version="1.0" encoding="utf-8"?>
 <p:notes xmlns:a="http://schemas.openxmlformats.org/drawingml/2006/main" xmlns:p="http://schemas.openxmlformats.org/presentationml/2006/main" xmlns:r="http://schemas.openxmlformats.org/officeDocument/2006/relationships">
   <p:cSld>
     <p:spTree>
@@ -9034,6 +11411,1841 @@
 </file>
 
 <file path=ppt/slides/slide10.xml><?xml version="1.0" encoding="utf-8"?>
+<p:sld xmlns:a="http://schemas.openxmlformats.org/drawingml/2006/main" xmlns:p="http://schemas.openxmlformats.org/presentationml/2006/main" xmlns:r="http://schemas.openxmlformats.org/officeDocument/2006/relationships">
+  <p:cSld>
+    <p:bg>
+      <p:bgPr>
+        <a:solidFill>
+          <a:srgbClr val="FFFFFF"/>
+        </a:solidFill>
+        <a:effectLst/>
+      </p:bgPr>
+    </p:bg>
+    <p:spTree>
+      <p:nvGrpSpPr>
+        <p:cNvPr id="1" name=""/>
+        <p:cNvGrpSpPr/>
+        <p:nvPr/>
+      </p:nvGrpSpPr>
+      <p:grpSpPr/>
+      <p:sp>
+        <p:nvSpPr>
+          <p:cNvPr id="2" name="TextBox 1"/>
+          <p:cNvSpPr txBox="1"/>
+          <p:nvPr/>
+        </p:nvSpPr>
+        <p:spPr>
+          <a:xfrm>
+            <a:off x="548640" y="347472"/>
+            <a:ext cx="11064240" cy="685800"/>
+          </a:xfrm>
+          <a:prstGeom prst="rect">
+            <a:avLst/>
+          </a:prstGeom>
+          <a:noFill/>
+        </p:spPr>
+        <p:txBody>
+          <a:bodyPr wrap="square" anchor="t" lIns="0" rIns="0">
+            <a:spAutoFit/>
+          </a:bodyPr>
+          <a:lstStyle/>
+          <a:p>
+            <a:pPr algn="l">
+              <a:spcAft>
+                <a:spcPts val="600"/>
+              </a:spcAft>
+            </a:pPr>
+            <a:r>
+              <a:rPr sz="3200" b="1" i="0">
+                <a:solidFill>
+                  <a:srgbClr val="14232E"/>
+                </a:solidFill>
+                <a:latin typeface="Calibri"/>
+              </a:rPr>
+              <a:t>Accelerations at the payload: vertical is small</a:t>
+            </a:r>
+          </a:p>
+        </p:txBody>
+      </p:sp>
+      <p:sp>
+        <p:nvSpPr>
+          <p:cNvPr id="3" name="TextBox 2"/>
+          <p:cNvSpPr txBox="1"/>
+          <p:nvPr/>
+        </p:nvSpPr>
+        <p:spPr>
+          <a:xfrm>
+            <a:off x="548640" y="987552"/>
+            <a:ext cx="11064240" cy="411480"/>
+          </a:xfrm>
+          <a:prstGeom prst="rect">
+            <a:avLst/>
+          </a:prstGeom>
+          <a:noFill/>
+        </p:spPr>
+        <p:txBody>
+          <a:bodyPr wrap="square" anchor="t" lIns="0" rIns="0">
+            <a:spAutoFit/>
+          </a:bodyPr>
+          <a:lstStyle/>
+          <a:p>
+            <a:pPr algn="l">
+              <a:spcAft>
+                <a:spcPts val="600"/>
+              </a:spcAft>
+            </a:pPr>
+            <a:r>
+              <a:rPr sz="1600" b="0" i="0">
+                <a:solidFill>
+                  <a:srgbClr val="5C6B75"/>
+                </a:solidFill>
+                <a:latin typeface="Calibri"/>
+              </a:rPr>
+              <a:t>Vertical acceleration amplitude at the payload against wave period, H = 0.1 m (1 g = 9.81 m/s²)</a:t>
+            </a:r>
+          </a:p>
+        </p:txBody>
+      </p:sp>
+      <p:graphicFrame>
+        <p:nvGraphicFramePr>
+          <p:cNvPr id="4" name="Chart 3"/>
+          <p:cNvGraphicFramePr>
+            <a:graphicFrameLocks noGrp="1"/>
+          </p:cNvGraphicFramePr>
+          <p:nvPr/>
+        </p:nvGraphicFramePr>
+        <p:xfrm>
+          <a:off x="457200" y="1417320"/>
+          <a:ext cx="5577840" cy="4160520"/>
+        </p:xfrm>
+        <a:graphic>
+          <a:graphicData uri="http://schemas.openxmlformats.org/drawingml/2006/chart">
+            <c:chart xmlns:c="http://schemas.openxmlformats.org/drawingml/2006/chart" r:id="rId3"/>
+          </a:graphicData>
+        </a:graphic>
+      </p:graphicFrame>
+      <p:graphicFrame>
+        <p:nvGraphicFramePr>
+          <p:cNvPr id="5" name="Chart 4"/>
+          <p:cNvGraphicFramePr>
+            <a:graphicFrameLocks noGrp="1"/>
+          </p:cNvGraphicFramePr>
+          <p:nvPr/>
+        </p:nvGraphicFramePr>
+        <p:xfrm>
+          <a:off x="6172200" y="1417320"/>
+          <a:ext cx="5577840" cy="4160520"/>
+        </p:xfrm>
+        <a:graphic>
+          <a:graphicData uri="http://schemas.openxmlformats.org/drawingml/2006/chart">
+            <c:chart xmlns:c="http://schemas.openxmlformats.org/drawingml/2006/chart" r:id="rId4"/>
+          </a:graphicData>
+        </a:graphic>
+      </p:graphicFrame>
+      <p:sp>
+        <p:nvSpPr>
+          <p:cNvPr id="6" name="TextBox 5"/>
+          <p:cNvSpPr txBox="1"/>
+          <p:nvPr/>
+        </p:nvSpPr>
+        <p:spPr>
+          <a:xfrm>
+            <a:off x="548640" y="5715000"/>
+            <a:ext cx="11064240" cy="914400"/>
+          </a:xfrm>
+          <a:prstGeom prst="rect">
+            <a:avLst/>
+          </a:prstGeom>
+          <a:noFill/>
+        </p:spPr>
+        <p:txBody>
+          <a:bodyPr wrap="square" anchor="t" lIns="0" rIns="0">
+            <a:spAutoFit/>
+          </a:bodyPr>
+          <a:lstStyle/>
+          <a:p>
+            <a:pPr algn="l">
+              <a:spcAft>
+                <a:spcPts val="600"/>
+              </a:spcAft>
+            </a:pPr>
+            <a:r>
+              <a:rPr sz="1400" b="0" i="0">
+                <a:solidFill>
+                  <a:srgbClr val="2B3A44"/>
+                </a:solidFill>
+                <a:latin typeface="Calibri"/>
+              </a:rPr>
+              <a:t>At most 0.42 m/s² (0.04 g), unloaded, near the heave resonance; with the payload 0.38 (cluster) and 0.34 m/s² (platform). Both articles ride the same buoys' heave, so they are alike, and the tilt changes it little.</a:t>
+            </a:r>
+          </a:p>
+        </p:txBody>
+      </p:sp>
+    </p:spTree>
+  </p:cSld>
+  <p:clrMapOvr>
+    <a:masterClrMapping/>
+  </p:clrMapOvr>
+</p:sld>
+</file>
+
+<file path=ppt/slides/slide11.xml><?xml version="1.0" encoding="utf-8"?>
+<p:sld xmlns:a="http://schemas.openxmlformats.org/drawingml/2006/main" xmlns:p="http://schemas.openxmlformats.org/presentationml/2006/main" xmlns:r="http://schemas.openxmlformats.org/officeDocument/2006/relationships">
+  <p:cSld>
+    <p:bg>
+      <p:bgPr>
+        <a:solidFill>
+          <a:srgbClr val="FFFFFF"/>
+        </a:solidFill>
+        <a:effectLst/>
+      </p:bgPr>
+    </p:bg>
+    <p:spTree>
+      <p:nvGrpSpPr>
+        <p:cNvPr id="1" name=""/>
+        <p:cNvGrpSpPr/>
+        <p:nvPr/>
+      </p:nvGrpSpPr>
+      <p:grpSpPr/>
+      <p:sp>
+        <p:nvSpPr>
+          <p:cNvPr id="2" name="TextBox 1"/>
+          <p:cNvSpPr txBox="1"/>
+          <p:nvPr/>
+        </p:nvSpPr>
+        <p:spPr>
+          <a:xfrm>
+            <a:off x="548640" y="347472"/>
+            <a:ext cx="11064240" cy="685800"/>
+          </a:xfrm>
+          <a:prstGeom prst="rect">
+            <a:avLst/>
+          </a:prstGeom>
+          <a:noFill/>
+        </p:spPr>
+        <p:txBody>
+          <a:bodyPr wrap="square" anchor="t" lIns="0" rIns="0">
+            <a:spAutoFit/>
+          </a:bodyPr>
+          <a:lstStyle/>
+          <a:p>
+            <a:pPr algn="l">
+              <a:spcAft>
+                <a:spcPts val="600"/>
+              </a:spcAft>
+            </a:pPr>
+            <a:r>
+              <a:rPr sz="3200" b="1" i="0">
+                <a:solidFill>
+                  <a:srgbClr val="14232E"/>
+                </a:solidFill>
+                <a:latin typeface="Calibri"/>
+              </a:rPr>
+              <a:t>Lateral acceleration (along the waves)</a:t>
+            </a:r>
+          </a:p>
+        </p:txBody>
+      </p:sp>
+      <p:sp>
+        <p:nvSpPr>
+          <p:cNvPr id="3" name="TextBox 2"/>
+          <p:cNvSpPr txBox="1"/>
+          <p:nvPr/>
+        </p:nvSpPr>
+        <p:spPr>
+          <a:xfrm>
+            <a:off x="548640" y="987552"/>
+            <a:ext cx="11064240" cy="411480"/>
+          </a:xfrm>
+          <a:prstGeom prst="rect">
+            <a:avLst/>
+          </a:prstGeom>
+          <a:noFill/>
+        </p:spPr>
+        <p:txBody>
+          <a:bodyPr wrap="square" anchor="t" lIns="0" rIns="0">
+            <a:spAutoFit/>
+          </a:bodyPr>
+          <a:lstStyle/>
+          <a:p>
+            <a:pPr algn="l">
+              <a:spcAft>
+                <a:spcPts val="600"/>
+              </a:spcAft>
+            </a:pPr>
+            <a:r>
+              <a:rPr sz="1600" b="0" i="0">
+                <a:solidFill>
+                  <a:srgbClr val="5C6B75"/>
+                </a:solidFill>
+                <a:latin typeface="Calibri"/>
+              </a:rPr>
+              <a:t>As the payload feels it: the deck's motion plus gravity swinging along the deck as it pitches</a:t>
+            </a:r>
+          </a:p>
+        </p:txBody>
+      </p:sp>
+      <p:graphicFrame>
+        <p:nvGraphicFramePr>
+          <p:cNvPr id="4" name="Chart 3"/>
+          <p:cNvGraphicFramePr>
+            <a:graphicFrameLocks noGrp="1"/>
+          </p:cNvGraphicFramePr>
+          <p:nvPr/>
+        </p:nvGraphicFramePr>
+        <p:xfrm>
+          <a:off x="457200" y="1417320"/>
+          <a:ext cx="5577840" cy="3931920"/>
+        </p:xfrm>
+        <a:graphic>
+          <a:graphicData uri="http://schemas.openxmlformats.org/drawingml/2006/chart">
+            <c:chart xmlns:c="http://schemas.openxmlformats.org/drawingml/2006/chart" r:id="rId3"/>
+          </a:graphicData>
+        </a:graphic>
+      </p:graphicFrame>
+      <p:graphicFrame>
+        <p:nvGraphicFramePr>
+          <p:cNvPr id="5" name="Chart 4"/>
+          <p:cNvGraphicFramePr>
+            <a:graphicFrameLocks noGrp="1"/>
+          </p:cNvGraphicFramePr>
+          <p:nvPr/>
+        </p:nvGraphicFramePr>
+        <p:xfrm>
+          <a:off x="6172200" y="1417320"/>
+          <a:ext cx="5577840" cy="3931920"/>
+        </p:xfrm>
+        <a:graphic>
+          <a:graphicData uri="http://schemas.openxmlformats.org/drawingml/2006/chart">
+            <c:chart xmlns:c="http://schemas.openxmlformats.org/drawingml/2006/chart" r:id="rId4"/>
+          </a:graphicData>
+        </a:graphic>
+      </p:graphicFrame>
+      <p:sp>
+        <p:nvSpPr>
+          <p:cNvPr id="6" name="TextBox 5"/>
+          <p:cNvSpPr txBox="1"/>
+          <p:nvPr/>
+        </p:nvSpPr>
+        <p:spPr>
+          <a:xfrm>
+            <a:off x="548640" y="5440680"/>
+            <a:ext cx="11064240" cy="1280160"/>
+          </a:xfrm>
+          <a:prstGeom prst="rect">
+            <a:avLst/>
+          </a:prstGeom>
+          <a:noFill/>
+        </p:spPr>
+        <p:txBody>
+          <a:bodyPr wrap="square" anchor="t" lIns="0" rIns="0">
+            <a:spAutoFit/>
+          </a:bodyPr>
+          <a:lstStyle/>
+          <a:p>
+            <a:pPr algn="l">
+              <a:spcAft>
+                <a:spcPts val="400"/>
+              </a:spcAft>
+            </a:pPr>
+            <a:r>
+              <a:rPr sz="1300" b="1" i="0">
+                <a:solidFill>
+                  <a:srgbClr val="2B3A44"/>
+                </a:solidFill>
+                <a:latin typeface="Calibri"/>
+              </a:rPr>
+              <a:t>Short waves: </a:t>
+            </a:r>
+            <a:r>
+              <a:rPr sz="1300" b="0" i="0">
+                <a:solidFill>
+                  <a:srgbClr val="2B3A44"/>
+                </a:solidFill>
+                <a:latin typeface="Calibri"/>
+              </a:rPr>
+              <a:t>the platform's 2.4 m span averages them out: 0.08 against 0.63 m/s² at 1.5 s (payload centred).</a:t>
+            </a:r>
+          </a:p>
+          <a:p>
+            <a:pPr algn="l">
+              <a:spcAft>
+                <a:spcPts val="400"/>
+              </a:spcAft>
+            </a:pPr>
+            <a:r>
+              <a:rPr sz="1300" b="1" i="0">
+                <a:solidFill>
+                  <a:srgbClr val="2B3A44"/>
+                </a:solidFill>
+                <a:latin typeface="Calibri"/>
+              </a:rPr>
+              <a:t>Near the heave resonance (2.35–2.65 s): </a:t>
+            </a:r>
+            <a:r>
+              <a:rPr sz="1300" b="0" i="0">
+                <a:solidFill>
+                  <a:srgbClr val="2B3A44"/>
+                </a:solidFill>
+                <a:latin typeface="Calibri"/>
+              </a:rPr>
+              <a:t>the tilt adds lateral load: cluster 0.61 → 0.79, platform 0.49 → 0.60 m/s², level → 10°.</a:t>
+            </a:r>
+          </a:p>
+          <a:p>
+            <a:pPr algn="l">
+              <a:spcAft>
+                <a:spcPts val="400"/>
+              </a:spcAft>
+            </a:pPr>
+            <a:r>
+              <a:rPr sz="1300" b="1" i="0">
+                <a:solidFill>
+                  <a:srgbClr val="2B3A44"/>
+                </a:solidFill>
+                <a:latin typeface="Calibri"/>
+              </a:rPr>
+              <a:t>At 4.2 s, with a payload: </a:t>
+            </a:r>
+            <a:r>
+              <a:rPr sz="1300" b="0" i="0">
+                <a:solidFill>
+                  <a:srgbClr val="2B3A44"/>
+                </a:solidFill>
+                <a:latin typeface="Calibri"/>
+              </a:rPr>
+              <a:t>0.4–0.6 m/s²: the buoys rocking on their gimbals slide the hub / deck along the waves.</a:t>
+            </a:r>
+          </a:p>
+        </p:txBody>
+      </p:sp>
+    </p:spTree>
+  </p:cSld>
+  <p:clrMapOvr>
+    <a:masterClrMapping/>
+  </p:clrMapOvr>
+</p:sld>
+</file>
+
+<file path=ppt/slides/slide12.xml><?xml version="1.0" encoding="utf-8"?>
+<p:sld xmlns:a="http://schemas.openxmlformats.org/drawingml/2006/main" xmlns:p="http://schemas.openxmlformats.org/presentationml/2006/main" xmlns:r="http://schemas.openxmlformats.org/officeDocument/2006/relationships">
+  <p:cSld>
+    <p:bg>
+      <p:bgPr>
+        <a:solidFill>
+          <a:srgbClr val="FFFFFF"/>
+        </a:solidFill>
+        <a:effectLst/>
+      </p:bgPr>
+    </p:bg>
+    <p:spTree>
+      <p:nvGrpSpPr>
+        <p:cNvPr id="1" name=""/>
+        <p:cNvGrpSpPr/>
+        <p:nvPr/>
+      </p:nvGrpSpPr>
+      <p:grpSpPr/>
+      <p:sp>
+        <p:nvSpPr>
+          <p:cNvPr id="2" name="TextBox 1"/>
+          <p:cNvSpPr txBox="1"/>
+          <p:nvPr/>
+        </p:nvSpPr>
+        <p:spPr>
+          <a:xfrm>
+            <a:off x="548640" y="347472"/>
+            <a:ext cx="11064240" cy="685800"/>
+          </a:xfrm>
+          <a:prstGeom prst="rect">
+            <a:avLst/>
+          </a:prstGeom>
+          <a:noFill/>
+        </p:spPr>
+        <p:txBody>
+          <a:bodyPr wrap="square" anchor="t" lIns="0" rIns="0">
+            <a:spAutoFit/>
+          </a:bodyPr>
+          <a:lstStyle/>
+          <a:p>
+            <a:pPr algn="l">
+              <a:spcAft>
+                <a:spcPts val="600"/>
+              </a:spcAft>
+            </a:pPr>
+            <a:r>
+              <a:rPr sz="3200" b="1" i="0">
+                <a:solidFill>
+                  <a:srgbClr val="14232E"/>
+                </a:solidFill>
+                <a:latin typeface="Calibri"/>
+              </a:rPr>
+              <a:t>For the payload, the static tilt is the biggest lateral load</a:t>
+            </a:r>
+          </a:p>
+        </p:txBody>
+      </p:sp>
+      <p:sp>
+        <p:nvSpPr>
+          <p:cNvPr id="3" name="TextBox 2"/>
+          <p:cNvSpPr txBox="1"/>
+          <p:nvPr/>
+        </p:nvSpPr>
+        <p:spPr>
+          <a:xfrm>
+            <a:off x="548640" y="987552"/>
+            <a:ext cx="11064240" cy="411480"/>
+          </a:xfrm>
+          <a:prstGeom prst="rect">
+            <a:avLst/>
+          </a:prstGeom>
+          <a:noFill/>
+        </p:spPr>
+        <p:txBody>
+          <a:bodyPr wrap="square" anchor="t" lIns="0" rIns="0">
+            <a:spAutoFit/>
+          </a:bodyPr>
+          <a:lstStyle/>
+          <a:p>
+            <a:pPr algn="l">
+              <a:spcAft>
+                <a:spcPts val="600"/>
+              </a:spcAft>
+            </a:pPr>
+            <a:r>
+              <a:rPr sz="1600" b="0" i="0">
+                <a:solidFill>
+                  <a:srgbClr val="5C6B75"/>
+                </a:solidFill>
+                <a:latin typeface="Calibri"/>
+              </a:rPr>
+              <a:t>Maximum accelerations at the payload over the seven wave periods, m/s² (H = 0.1 m)</a:t>
+            </a:r>
+          </a:p>
+        </p:txBody>
+      </p:sp>
+      <p:graphicFrame>
+        <p:nvGraphicFramePr>
+          <p:cNvPr id="4" name="Table 3"/>
+          <p:cNvGraphicFramePr>
+            <a:graphicFrameLocks noGrp="1"/>
+          </p:cNvGraphicFramePr>
+          <p:nvPr/>
+        </p:nvGraphicFramePr>
+        <p:xfrm>
+          <a:off x="548640" y="1600200"/>
+          <a:ext cx="7498080" cy="4023360"/>
+        </p:xfrm>
+        <a:graphic>
+          <a:graphicData uri="http://schemas.openxmlformats.org/drawingml/2006/table">
+            <a:tbl>
+              <a:tblPr firstRow="1" bandRow="1">
+                <a:tableStyleId>{5C22544A-7EE6-4342-B048-85BDC9FD1C3A}</a:tableStyleId>
+              </a:tblPr>
+              <a:tblGrid>
+                <a:gridCol w="2103120"/>
+                <a:gridCol w="1097280"/>
+                <a:gridCol w="1554480"/>
+                <a:gridCol w="1280160"/>
+                <a:gridCol w="1463040"/>
+              </a:tblGrid>
+              <a:tr h="447040">
+                <a:tc>
+                  <a:txBody>
+                    <a:bodyPr/>
+                    <a:lstStyle/>
+                    <a:p/>
+                  </a:txBody>
+                  <a:tcPr>
+                    <a:solidFill>
+                      <a:srgbClr val="0C8B96"/>
+                    </a:solidFill>
+                  </a:tcPr>
+                </a:tc>
+                <a:tc>
+                  <a:txBody>
+                    <a:bodyPr/>
+                    <a:lstStyle/>
+                    <a:p>
+                      <a:r>
+                        <a:rPr sz="1300" b="1">
+                          <a:solidFill>
+                            <a:srgbClr val="FFFFFF"/>
+                          </a:solidFill>
+                          <a:latin typeface="Calibri"/>
+                        </a:rPr>
+                        <a:t>Vertical, max</a:t>
+                      </a:r>
+                    </a:p>
+                  </a:txBody>
+                  <a:tcPr>
+                    <a:solidFill>
+                      <a:srgbClr val="0C8B96"/>
+                    </a:solidFill>
+                  </a:tcPr>
+                </a:tc>
+                <a:tc>
+                  <a:txBody>
+                    <a:bodyPr/>
+                    <a:lstStyle/>
+                    <a:p>
+                      <a:r>
+                        <a:rPr sz="1300" b="1">
+                          <a:solidFill>
+                            <a:srgbClr val="FFFFFF"/>
+                          </a:solidFill>
+                          <a:latin typeface="Calibri"/>
+                        </a:rPr>
+                        <a:t>Lateral from the waves, max</a:t>
+                      </a:r>
+                    </a:p>
+                  </a:txBody>
+                  <a:tcPr>
+                    <a:solidFill>
+                      <a:srgbClr val="0C8B96"/>
+                    </a:solidFill>
+                  </a:tcPr>
+                </a:tc>
+                <a:tc>
+                  <a:txBody>
+                    <a:bodyPr/>
+                    <a:lstStyle/>
+                    <a:p>
+                      <a:r>
+                        <a:rPr sz="1300" b="1">
+                          <a:solidFill>
+                            <a:srgbClr val="FFFFFF"/>
+                          </a:solidFill>
+                          <a:latin typeface="Calibri"/>
+                        </a:rPr>
+                        <a:t>Static tilt, g·sin θ</a:t>
+                      </a:r>
+                    </a:p>
+                  </a:txBody>
+                  <a:tcPr>
+                    <a:solidFill>
+                      <a:srgbClr val="0C8B96"/>
+                    </a:solidFill>
+                  </a:tcPr>
+                </a:tc>
+                <a:tc>
+                  <a:txBody>
+                    <a:bodyPr/>
+                    <a:lstStyle/>
+                    <a:p>
+                      <a:r>
+                        <a:rPr sz="1300" b="1">
+                          <a:solidFill>
+                            <a:srgbClr val="FFFFFF"/>
+                          </a:solidFill>
+                          <a:latin typeface="Calibri"/>
+                        </a:rPr>
+                        <a:t>Total lateral, max</a:t>
+                      </a:r>
+                    </a:p>
+                  </a:txBody>
+                  <a:tcPr>
+                    <a:solidFill>
+                      <a:srgbClr val="0C8B96"/>
+                    </a:solidFill>
+                  </a:tcPr>
+                </a:tc>
+              </a:tr>
+              <a:tr h="447040">
+                <a:tc>
+                  <a:txBody>
+                    <a:bodyPr/>
+                    <a:lstStyle/>
+                    <a:p>
+                      <a:r>
+                        <a:rPr sz="1300" b="0">
+                          <a:solidFill>
+                            <a:srgbClr val="2B3A44"/>
+                          </a:solidFill>
+                          <a:latin typeface="Calibri"/>
+                        </a:rPr>
+                        <a:t>Cluster, unloaded</a:t>
+                      </a:r>
+                    </a:p>
+                  </a:txBody>
+                  <a:tcPr>
+                    <a:solidFill>
+                      <a:srgbClr val="E4F2F4"/>
+                    </a:solidFill>
+                  </a:tcPr>
+                </a:tc>
+                <a:tc>
+                  <a:txBody>
+                    <a:bodyPr/>
+                    <a:lstStyle/>
+                    <a:p>
+                      <a:r>
+                        <a:rPr sz="1300" b="0">
+                          <a:solidFill>
+                            <a:srgbClr val="2B3A44"/>
+                          </a:solidFill>
+                          <a:latin typeface="Calibri"/>
+                        </a:rPr>
+                        <a:t>0.42</a:t>
+                      </a:r>
+                    </a:p>
+                  </a:txBody>
+                  <a:tcPr>
+                    <a:solidFill>
+                      <a:srgbClr val="E4F2F4"/>
+                    </a:solidFill>
+                  </a:tcPr>
+                </a:tc>
+                <a:tc>
+                  <a:txBody>
+                    <a:bodyPr/>
+                    <a:lstStyle/>
+                    <a:p>
+                      <a:r>
+                        <a:rPr sz="1300" b="0">
+                          <a:solidFill>
+                            <a:srgbClr val="2B3A44"/>
+                          </a:solidFill>
+                          <a:latin typeface="Calibri"/>
+                        </a:rPr>
+                        <a:t>1.16</a:t>
+                      </a:r>
+                    </a:p>
+                  </a:txBody>
+                  <a:tcPr>
+                    <a:solidFill>
+                      <a:srgbClr val="E4F2F4"/>
+                    </a:solidFill>
+                  </a:tcPr>
+                </a:tc>
+                <a:tc>
+                  <a:txBody>
+                    <a:bodyPr/>
+                    <a:lstStyle/>
+                    <a:p>
+                      <a:r>
+                        <a:rPr sz="1300" b="0">
+                          <a:solidFill>
+                            <a:srgbClr val="2B3A44"/>
+                          </a:solidFill>
+                          <a:latin typeface="Calibri"/>
+                        </a:rPr>
+                        <a:t>0.00</a:t>
+                      </a:r>
+                    </a:p>
+                  </a:txBody>
+                  <a:tcPr>
+                    <a:solidFill>
+                      <a:srgbClr val="E4F2F4"/>
+                    </a:solidFill>
+                  </a:tcPr>
+                </a:tc>
+                <a:tc>
+                  <a:txBody>
+                    <a:bodyPr/>
+                    <a:lstStyle/>
+                    <a:p>
+                      <a:r>
+                        <a:rPr sz="1300" b="0">
+                          <a:solidFill>
+                            <a:srgbClr val="2B3A44"/>
+                          </a:solidFill>
+                          <a:latin typeface="Calibri"/>
+                        </a:rPr>
+                        <a:t>1.16 (0.12 g)</a:t>
+                      </a:r>
+                    </a:p>
+                  </a:txBody>
+                  <a:tcPr>
+                    <a:solidFill>
+                      <a:srgbClr val="E4F2F4"/>
+                    </a:solidFill>
+                  </a:tcPr>
+                </a:tc>
+              </a:tr>
+              <a:tr h="447040">
+                <a:tc>
+                  <a:txBody>
+                    <a:bodyPr/>
+                    <a:lstStyle/>
+                    <a:p>
+                      <a:r>
+                        <a:rPr sz="1300" b="0">
+                          <a:solidFill>
+                            <a:srgbClr val="2B3A44"/>
+                          </a:solidFill>
+                          <a:latin typeface="Calibri"/>
+                        </a:rPr>
+                        <a:t>Cluster, payload centred</a:t>
+                      </a:r>
+                    </a:p>
+                  </a:txBody>
+                  <a:tcPr>
+                    <a:solidFill>
+                      <a:srgbClr val="FFFFFF"/>
+                    </a:solidFill>
+                  </a:tcPr>
+                </a:tc>
+                <a:tc>
+                  <a:txBody>
+                    <a:bodyPr/>
+                    <a:lstStyle/>
+                    <a:p>
+                      <a:r>
+                        <a:rPr sz="1300" b="0">
+                          <a:solidFill>
+                            <a:srgbClr val="2B3A44"/>
+                          </a:solidFill>
+                          <a:latin typeface="Calibri"/>
+                        </a:rPr>
+                        <a:t>0.38</a:t>
+                      </a:r>
+                    </a:p>
+                  </a:txBody>
+                  <a:tcPr>
+                    <a:solidFill>
+                      <a:srgbClr val="FFFFFF"/>
+                    </a:solidFill>
+                  </a:tcPr>
+                </a:tc>
+                <a:tc>
+                  <a:txBody>
+                    <a:bodyPr/>
+                    <a:lstStyle/>
+                    <a:p>
+                      <a:r>
+                        <a:rPr sz="1300" b="0">
+                          <a:solidFill>
+                            <a:srgbClr val="2B3A44"/>
+                          </a:solidFill>
+                          <a:latin typeface="Calibri"/>
+                        </a:rPr>
+                        <a:t>0.63</a:t>
+                      </a:r>
+                    </a:p>
+                  </a:txBody>
+                  <a:tcPr>
+                    <a:solidFill>
+                      <a:srgbClr val="FFFFFF"/>
+                    </a:solidFill>
+                  </a:tcPr>
+                </a:tc>
+                <a:tc>
+                  <a:txBody>
+                    <a:bodyPr/>
+                    <a:lstStyle/>
+                    <a:p>
+                      <a:r>
+                        <a:rPr sz="1300" b="0">
+                          <a:solidFill>
+                            <a:srgbClr val="2B3A44"/>
+                          </a:solidFill>
+                          <a:latin typeface="Calibri"/>
+                        </a:rPr>
+                        <a:t>0.00</a:t>
+                      </a:r>
+                    </a:p>
+                  </a:txBody>
+                  <a:tcPr>
+                    <a:solidFill>
+                      <a:srgbClr val="FFFFFF"/>
+                    </a:solidFill>
+                  </a:tcPr>
+                </a:tc>
+                <a:tc>
+                  <a:txBody>
+                    <a:bodyPr/>
+                    <a:lstStyle/>
+                    <a:p>
+                      <a:r>
+                        <a:rPr sz="1300" b="0">
+                          <a:solidFill>
+                            <a:srgbClr val="2B3A44"/>
+                          </a:solidFill>
+                          <a:latin typeface="Calibri"/>
+                        </a:rPr>
+                        <a:t>0.63 (0.06 g)</a:t>
+                      </a:r>
+                    </a:p>
+                  </a:txBody>
+                  <a:tcPr>
+                    <a:solidFill>
+                      <a:srgbClr val="FFFFFF"/>
+                    </a:solidFill>
+                  </a:tcPr>
+                </a:tc>
+              </a:tr>
+              <a:tr h="447040">
+                <a:tc>
+                  <a:txBody>
+                    <a:bodyPr/>
+                    <a:lstStyle/>
+                    <a:p>
+                      <a:r>
+                        <a:rPr sz="1300" b="0">
+                          <a:solidFill>
+                            <a:srgbClr val="2B3A44"/>
+                          </a:solidFill>
+                          <a:latin typeface="Calibri"/>
+                        </a:rPr>
+                        <a:t>Cluster, 5° tilt</a:t>
+                      </a:r>
+                    </a:p>
+                  </a:txBody>
+                  <a:tcPr>
+                    <a:solidFill>
+                      <a:srgbClr val="E4F2F4"/>
+                    </a:solidFill>
+                  </a:tcPr>
+                </a:tc>
+                <a:tc>
+                  <a:txBody>
+                    <a:bodyPr/>
+                    <a:lstStyle/>
+                    <a:p>
+                      <a:r>
+                        <a:rPr sz="1300" b="0">
+                          <a:solidFill>
+                            <a:srgbClr val="2B3A44"/>
+                          </a:solidFill>
+                          <a:latin typeface="Calibri"/>
+                        </a:rPr>
+                        <a:t>0.38</a:t>
+                      </a:r>
+                    </a:p>
+                  </a:txBody>
+                  <a:tcPr>
+                    <a:solidFill>
+                      <a:srgbClr val="E4F2F4"/>
+                    </a:solidFill>
+                  </a:tcPr>
+                </a:tc>
+                <a:tc>
+                  <a:txBody>
+                    <a:bodyPr/>
+                    <a:lstStyle/>
+                    <a:p>
+                      <a:r>
+                        <a:rPr sz="1300" b="0">
+                          <a:solidFill>
+                            <a:srgbClr val="2B3A44"/>
+                          </a:solidFill>
+                          <a:latin typeface="Calibri"/>
+                        </a:rPr>
+                        <a:t>0.69</a:t>
+                      </a:r>
+                    </a:p>
+                  </a:txBody>
+                  <a:tcPr>
+                    <a:solidFill>
+                      <a:srgbClr val="E4F2F4"/>
+                    </a:solidFill>
+                  </a:tcPr>
+                </a:tc>
+                <a:tc>
+                  <a:txBody>
+                    <a:bodyPr/>
+                    <a:lstStyle/>
+                    <a:p>
+                      <a:r>
+                        <a:rPr sz="1300" b="0">
+                          <a:solidFill>
+                            <a:srgbClr val="2B3A44"/>
+                          </a:solidFill>
+                          <a:latin typeface="Calibri"/>
+                        </a:rPr>
+                        <a:t>0.85</a:t>
+                      </a:r>
+                    </a:p>
+                  </a:txBody>
+                  <a:tcPr>
+                    <a:solidFill>
+                      <a:srgbClr val="E4F2F4"/>
+                    </a:solidFill>
+                  </a:tcPr>
+                </a:tc>
+                <a:tc>
+                  <a:txBody>
+                    <a:bodyPr/>
+                    <a:lstStyle/>
+                    <a:p>
+                      <a:r>
+                        <a:rPr sz="1300" b="0">
+                          <a:solidFill>
+                            <a:srgbClr val="2B3A44"/>
+                          </a:solidFill>
+                          <a:latin typeface="Calibri"/>
+                        </a:rPr>
+                        <a:t>1.55 (0.16 g)</a:t>
+                      </a:r>
+                    </a:p>
+                  </a:txBody>
+                  <a:tcPr>
+                    <a:solidFill>
+                      <a:srgbClr val="E4F2F4"/>
+                    </a:solidFill>
+                  </a:tcPr>
+                </a:tc>
+              </a:tr>
+              <a:tr h="447040">
+                <a:tc>
+                  <a:txBody>
+                    <a:bodyPr/>
+                    <a:lstStyle/>
+                    <a:p>
+                      <a:r>
+                        <a:rPr sz="1300" b="0">
+                          <a:solidFill>
+                            <a:srgbClr val="2B3A44"/>
+                          </a:solidFill>
+                          <a:latin typeface="Calibri"/>
+                        </a:rPr>
+                        <a:t>Cluster, 10° tilt</a:t>
+                      </a:r>
+                    </a:p>
+                  </a:txBody>
+                  <a:tcPr>
+                    <a:solidFill>
+                      <a:srgbClr val="FFFFFF"/>
+                    </a:solidFill>
+                  </a:tcPr>
+                </a:tc>
+                <a:tc>
+                  <a:txBody>
+                    <a:bodyPr/>
+                    <a:lstStyle/>
+                    <a:p>
+                      <a:r>
+                        <a:rPr sz="1300" b="0">
+                          <a:solidFill>
+                            <a:srgbClr val="2B3A44"/>
+                          </a:solidFill>
+                          <a:latin typeface="Calibri"/>
+                        </a:rPr>
+                        <a:t>0.37</a:t>
+                      </a:r>
+                    </a:p>
+                  </a:txBody>
+                  <a:tcPr>
+                    <a:solidFill>
+                      <a:srgbClr val="FFFFFF"/>
+                    </a:solidFill>
+                  </a:tcPr>
+                </a:tc>
+                <a:tc>
+                  <a:txBody>
+                    <a:bodyPr/>
+                    <a:lstStyle/>
+                    <a:p>
+                      <a:r>
+                        <a:rPr sz="1300" b="0">
+                          <a:solidFill>
+                            <a:srgbClr val="2B3A44"/>
+                          </a:solidFill>
+                          <a:latin typeface="Calibri"/>
+                        </a:rPr>
+                        <a:t>0.79</a:t>
+                      </a:r>
+                    </a:p>
+                  </a:txBody>
+                  <a:tcPr>
+                    <a:solidFill>
+                      <a:srgbClr val="FFFFFF"/>
+                    </a:solidFill>
+                  </a:tcPr>
+                </a:tc>
+                <a:tc>
+                  <a:txBody>
+                    <a:bodyPr/>
+                    <a:lstStyle/>
+                    <a:p>
+                      <a:r>
+                        <a:rPr sz="1300" b="0">
+                          <a:solidFill>
+                            <a:srgbClr val="2B3A44"/>
+                          </a:solidFill>
+                          <a:latin typeface="Calibri"/>
+                        </a:rPr>
+                        <a:t>1.70</a:t>
+                      </a:r>
+                    </a:p>
+                  </a:txBody>
+                  <a:tcPr>
+                    <a:solidFill>
+                      <a:srgbClr val="FFFFFF"/>
+                    </a:solidFill>
+                  </a:tcPr>
+                </a:tc>
+                <a:tc>
+                  <a:txBody>
+                    <a:bodyPr/>
+                    <a:lstStyle/>
+                    <a:p>
+                      <a:r>
+                        <a:rPr sz="1300" b="0">
+                          <a:solidFill>
+                            <a:srgbClr val="2B3A44"/>
+                          </a:solidFill>
+                          <a:latin typeface="Calibri"/>
+                        </a:rPr>
+                        <a:t>2.49 (0.25 g)</a:t>
+                      </a:r>
+                    </a:p>
+                  </a:txBody>
+                  <a:tcPr>
+                    <a:solidFill>
+                      <a:srgbClr val="FFFFFF"/>
+                    </a:solidFill>
+                  </a:tcPr>
+                </a:tc>
+              </a:tr>
+              <a:tr h="447040">
+                <a:tc>
+                  <a:txBody>
+                    <a:bodyPr/>
+                    <a:lstStyle/>
+                    <a:p>
+                      <a:r>
+                        <a:rPr sz="1300" b="0">
+                          <a:solidFill>
+                            <a:srgbClr val="2B3A44"/>
+                          </a:solidFill>
+                          <a:latin typeface="Calibri"/>
+                        </a:rPr>
+                        <a:t>Platform, unloaded</a:t>
+                      </a:r>
+                    </a:p>
+                  </a:txBody>
+                  <a:tcPr>
+                    <a:solidFill>
+                      <a:srgbClr val="E4F2F4"/>
+                    </a:solidFill>
+                  </a:tcPr>
+                </a:tc>
+                <a:tc>
+                  <a:txBody>
+                    <a:bodyPr/>
+                    <a:lstStyle/>
+                    <a:p>
+                      <a:r>
+                        <a:rPr sz="1300" b="0">
+                          <a:solidFill>
+                            <a:srgbClr val="2B3A44"/>
+                          </a:solidFill>
+                          <a:latin typeface="Calibri"/>
+                        </a:rPr>
+                        <a:t>0.37</a:t>
+                      </a:r>
+                    </a:p>
+                  </a:txBody>
+                  <a:tcPr>
+                    <a:solidFill>
+                      <a:srgbClr val="E4F2F4"/>
+                    </a:solidFill>
+                  </a:tcPr>
+                </a:tc>
+                <a:tc>
+                  <a:txBody>
+                    <a:bodyPr/>
+                    <a:lstStyle/>
+                    <a:p>
+                      <a:r>
+                        <a:rPr sz="1300" b="0">
+                          <a:solidFill>
+                            <a:srgbClr val="2B3A44"/>
+                          </a:solidFill>
+                          <a:latin typeface="Calibri"/>
+                        </a:rPr>
+                        <a:t>0.79</a:t>
+                      </a:r>
+                    </a:p>
+                  </a:txBody>
+                  <a:tcPr>
+                    <a:solidFill>
+                      <a:srgbClr val="E4F2F4"/>
+                    </a:solidFill>
+                  </a:tcPr>
+                </a:tc>
+                <a:tc>
+                  <a:txBody>
+                    <a:bodyPr/>
+                    <a:lstStyle/>
+                    <a:p>
+                      <a:r>
+                        <a:rPr sz="1300" b="0">
+                          <a:solidFill>
+                            <a:srgbClr val="2B3A44"/>
+                          </a:solidFill>
+                          <a:latin typeface="Calibri"/>
+                        </a:rPr>
+                        <a:t>0.00</a:t>
+                      </a:r>
+                    </a:p>
+                  </a:txBody>
+                  <a:tcPr>
+                    <a:solidFill>
+                      <a:srgbClr val="E4F2F4"/>
+                    </a:solidFill>
+                  </a:tcPr>
+                </a:tc>
+                <a:tc>
+                  <a:txBody>
+                    <a:bodyPr/>
+                    <a:lstStyle/>
+                    <a:p>
+                      <a:r>
+                        <a:rPr sz="1300" b="0">
+                          <a:solidFill>
+                            <a:srgbClr val="2B3A44"/>
+                          </a:solidFill>
+                          <a:latin typeface="Calibri"/>
+                        </a:rPr>
+                        <a:t>0.79 (0.08 g)</a:t>
+                      </a:r>
+                    </a:p>
+                  </a:txBody>
+                  <a:tcPr>
+                    <a:solidFill>
+                      <a:srgbClr val="E4F2F4"/>
+                    </a:solidFill>
+                  </a:tcPr>
+                </a:tc>
+              </a:tr>
+              <a:tr h="447040">
+                <a:tc>
+                  <a:txBody>
+                    <a:bodyPr/>
+                    <a:lstStyle/>
+                    <a:p>
+                      <a:r>
+                        <a:rPr sz="1300" b="0">
+                          <a:solidFill>
+                            <a:srgbClr val="2B3A44"/>
+                          </a:solidFill>
+                          <a:latin typeface="Calibri"/>
+                        </a:rPr>
+                        <a:t>Platform, payload centred</a:t>
+                      </a:r>
+                    </a:p>
+                  </a:txBody>
+                  <a:tcPr>
+                    <a:solidFill>
+                      <a:srgbClr val="FFFFFF"/>
+                    </a:solidFill>
+                  </a:tcPr>
+                </a:tc>
+                <a:tc>
+                  <a:txBody>
+                    <a:bodyPr/>
+                    <a:lstStyle/>
+                    <a:p>
+                      <a:r>
+                        <a:rPr sz="1300" b="0">
+                          <a:solidFill>
+                            <a:srgbClr val="2B3A44"/>
+                          </a:solidFill>
+                          <a:latin typeface="Calibri"/>
+                        </a:rPr>
+                        <a:t>0.34</a:t>
+                      </a:r>
+                    </a:p>
+                  </a:txBody>
+                  <a:tcPr>
+                    <a:solidFill>
+                      <a:srgbClr val="FFFFFF"/>
+                    </a:solidFill>
+                  </a:tcPr>
+                </a:tc>
+                <a:tc>
+                  <a:txBody>
+                    <a:bodyPr/>
+                    <a:lstStyle/>
+                    <a:p>
+                      <a:r>
+                        <a:rPr sz="1300" b="0">
+                          <a:solidFill>
+                            <a:srgbClr val="2B3A44"/>
+                          </a:solidFill>
+                          <a:latin typeface="Calibri"/>
+                        </a:rPr>
+                        <a:t>0.52</a:t>
+                      </a:r>
+                    </a:p>
+                  </a:txBody>
+                  <a:tcPr>
+                    <a:solidFill>
+                      <a:srgbClr val="FFFFFF"/>
+                    </a:solidFill>
+                  </a:tcPr>
+                </a:tc>
+                <a:tc>
+                  <a:txBody>
+                    <a:bodyPr/>
+                    <a:lstStyle/>
+                    <a:p>
+                      <a:r>
+                        <a:rPr sz="1300" b="0">
+                          <a:solidFill>
+                            <a:srgbClr val="2B3A44"/>
+                          </a:solidFill>
+                          <a:latin typeface="Calibri"/>
+                        </a:rPr>
+                        <a:t>0.00</a:t>
+                      </a:r>
+                    </a:p>
+                  </a:txBody>
+                  <a:tcPr>
+                    <a:solidFill>
+                      <a:srgbClr val="FFFFFF"/>
+                    </a:solidFill>
+                  </a:tcPr>
+                </a:tc>
+                <a:tc>
+                  <a:txBody>
+                    <a:bodyPr/>
+                    <a:lstStyle/>
+                    <a:p>
+                      <a:r>
+                        <a:rPr sz="1300" b="0">
+                          <a:solidFill>
+                            <a:srgbClr val="2B3A44"/>
+                          </a:solidFill>
+                          <a:latin typeface="Calibri"/>
+                        </a:rPr>
+                        <a:t>0.52 (0.05 g)</a:t>
+                      </a:r>
+                    </a:p>
+                  </a:txBody>
+                  <a:tcPr>
+                    <a:solidFill>
+                      <a:srgbClr val="FFFFFF"/>
+                    </a:solidFill>
+                  </a:tcPr>
+                </a:tc>
+              </a:tr>
+              <a:tr h="447040">
+                <a:tc>
+                  <a:txBody>
+                    <a:bodyPr/>
+                    <a:lstStyle/>
+                    <a:p>
+                      <a:r>
+                        <a:rPr sz="1300" b="0">
+                          <a:solidFill>
+                            <a:srgbClr val="2B3A44"/>
+                          </a:solidFill>
+                          <a:latin typeface="Calibri"/>
+                        </a:rPr>
+                        <a:t>Platform, 5° tilt</a:t>
+                      </a:r>
+                    </a:p>
+                  </a:txBody>
+                  <a:tcPr>
+                    <a:solidFill>
+                      <a:srgbClr val="E4F2F4"/>
+                    </a:solidFill>
+                  </a:tcPr>
+                </a:tc>
+                <a:tc>
+                  <a:txBody>
+                    <a:bodyPr/>
+                    <a:lstStyle/>
+                    <a:p>
+                      <a:r>
+                        <a:rPr sz="1300" b="0">
+                          <a:solidFill>
+                            <a:srgbClr val="2B3A44"/>
+                          </a:solidFill>
+                          <a:latin typeface="Calibri"/>
+                        </a:rPr>
+                        <a:t>0.32</a:t>
+                      </a:r>
+                    </a:p>
+                  </a:txBody>
+                  <a:tcPr>
+                    <a:solidFill>
+                      <a:srgbClr val="E4F2F4"/>
+                    </a:solidFill>
+                  </a:tcPr>
+                </a:tc>
+                <a:tc>
+                  <a:txBody>
+                    <a:bodyPr/>
+                    <a:lstStyle/>
+                    <a:p>
+                      <a:r>
+                        <a:rPr sz="1300" b="0">
+                          <a:solidFill>
+                            <a:srgbClr val="2B3A44"/>
+                          </a:solidFill>
+                          <a:latin typeface="Calibri"/>
+                        </a:rPr>
+                        <a:t>0.53</a:t>
+                      </a:r>
+                    </a:p>
+                  </a:txBody>
+                  <a:tcPr>
+                    <a:solidFill>
+                      <a:srgbClr val="E4F2F4"/>
+                    </a:solidFill>
+                  </a:tcPr>
+                </a:tc>
+                <a:tc>
+                  <a:txBody>
+                    <a:bodyPr/>
+                    <a:lstStyle/>
+                    <a:p>
+                      <a:r>
+                        <a:rPr sz="1300" b="0">
+                          <a:solidFill>
+                            <a:srgbClr val="2B3A44"/>
+                          </a:solidFill>
+                          <a:latin typeface="Calibri"/>
+                        </a:rPr>
+                        <a:t>0.85</a:t>
+                      </a:r>
+                    </a:p>
+                  </a:txBody>
+                  <a:tcPr>
+                    <a:solidFill>
+                      <a:srgbClr val="E4F2F4"/>
+                    </a:solidFill>
+                  </a:tcPr>
+                </a:tc>
+                <a:tc>
+                  <a:txBody>
+                    <a:bodyPr/>
+                    <a:lstStyle/>
+                    <a:p>
+                      <a:r>
+                        <a:rPr sz="1300" b="0">
+                          <a:solidFill>
+                            <a:srgbClr val="2B3A44"/>
+                          </a:solidFill>
+                          <a:latin typeface="Calibri"/>
+                        </a:rPr>
+                        <a:t>1.39 (0.14 g)</a:t>
+                      </a:r>
+                    </a:p>
+                  </a:txBody>
+                  <a:tcPr>
+                    <a:solidFill>
+                      <a:srgbClr val="E4F2F4"/>
+                    </a:solidFill>
+                  </a:tcPr>
+                </a:tc>
+              </a:tr>
+              <a:tr h="447040">
+                <a:tc>
+                  <a:txBody>
+                    <a:bodyPr/>
+                    <a:lstStyle/>
+                    <a:p>
+                      <a:r>
+                        <a:rPr sz="1300" b="0">
+                          <a:solidFill>
+                            <a:srgbClr val="2B3A44"/>
+                          </a:solidFill>
+                          <a:latin typeface="Calibri"/>
+                        </a:rPr>
+                        <a:t>Platform, 10° tilt</a:t>
+                      </a:r>
+                    </a:p>
+                  </a:txBody>
+                  <a:tcPr>
+                    <a:solidFill>
+                      <a:srgbClr val="FFFFFF"/>
+                    </a:solidFill>
+                  </a:tcPr>
+                </a:tc>
+                <a:tc>
+                  <a:txBody>
+                    <a:bodyPr/>
+                    <a:lstStyle/>
+                    <a:p>
+                      <a:r>
+                        <a:rPr sz="1300" b="0">
+                          <a:solidFill>
+                            <a:srgbClr val="2B3A44"/>
+                          </a:solidFill>
+                          <a:latin typeface="Calibri"/>
+                        </a:rPr>
+                        <a:t>0.30</a:t>
+                      </a:r>
+                    </a:p>
+                  </a:txBody>
+                  <a:tcPr>
+                    <a:solidFill>
+                      <a:srgbClr val="FFFFFF"/>
+                    </a:solidFill>
+                  </a:tcPr>
+                </a:tc>
+                <a:tc>
+                  <a:txBody>
+                    <a:bodyPr/>
+                    <a:lstStyle/>
+                    <a:p>
+                      <a:r>
+                        <a:rPr sz="1300" b="0">
+                          <a:solidFill>
+                            <a:srgbClr val="2B3A44"/>
+                          </a:solidFill>
+                          <a:latin typeface="Calibri"/>
+                        </a:rPr>
+                        <a:t>0.60</a:t>
+                      </a:r>
+                    </a:p>
+                  </a:txBody>
+                  <a:tcPr>
+                    <a:solidFill>
+                      <a:srgbClr val="FFFFFF"/>
+                    </a:solidFill>
+                  </a:tcPr>
+                </a:tc>
+                <a:tc>
+                  <a:txBody>
+                    <a:bodyPr/>
+                    <a:lstStyle/>
+                    <a:p>
+                      <a:r>
+                        <a:rPr sz="1300" b="0">
+                          <a:solidFill>
+                            <a:srgbClr val="2B3A44"/>
+                          </a:solidFill>
+                          <a:latin typeface="Calibri"/>
+                        </a:rPr>
+                        <a:t>1.70</a:t>
+                      </a:r>
+                    </a:p>
+                  </a:txBody>
+                  <a:tcPr>
+                    <a:solidFill>
+                      <a:srgbClr val="FFFFFF"/>
+                    </a:solidFill>
+                  </a:tcPr>
+                </a:tc>
+                <a:tc>
+                  <a:txBody>
+                    <a:bodyPr/>
+                    <a:lstStyle/>
+                    <a:p>
+                      <a:r>
+                        <a:rPr sz="1300" b="0">
+                          <a:solidFill>
+                            <a:srgbClr val="2B3A44"/>
+                          </a:solidFill>
+                          <a:latin typeface="Calibri"/>
+                        </a:rPr>
+                        <a:t>2.30 (0.23 g)</a:t>
+                      </a:r>
+                    </a:p>
+                  </a:txBody>
+                  <a:tcPr>
+                    <a:solidFill>
+                      <a:srgbClr val="FFFFFF"/>
+                    </a:solidFill>
+                  </a:tcPr>
+                </a:tc>
+              </a:tr>
+            </a:tbl>
+          </a:graphicData>
+        </a:graphic>
+      </p:graphicFrame>
+      <p:sp>
+        <p:nvSpPr>
+          <p:cNvPr id="5" name="Rounded Rectangle 4"/>
+          <p:cNvSpPr/>
+          <p:nvPr/>
+        </p:nvSpPr>
+        <p:spPr>
+          <a:xfrm>
+            <a:off x="8412480" y="1600200"/>
+            <a:ext cx="3246120" cy="1554480"/>
+          </a:xfrm>
+          <a:prstGeom prst="roundRect">
+            <a:avLst>
+              <a:gd name="adj" fmla="val 6000"/>
+            </a:avLst>
+          </a:prstGeom>
+          <a:solidFill>
+            <a:srgbClr val="E4F2F4"/>
+          </a:solidFill>
+          <a:ln>
+            <a:noFill/>
+          </a:ln>
+          <a:effectLst/>
+        </p:spPr>
+        <p:style>
+          <a:lnRef idx="1">
+            <a:schemeClr val="accent1"/>
+          </a:lnRef>
+          <a:fillRef idx="3">
+            <a:schemeClr val="accent1"/>
+          </a:fillRef>
+          <a:effectRef idx="2">
+            <a:schemeClr val="accent1"/>
+          </a:effectRef>
+          <a:fontRef idx="minor">
+            <a:schemeClr val="lt1"/>
+          </a:fontRef>
+        </p:style>
+        <p:txBody>
+          <a:bodyPr rtlCol="0" anchor="ctr"/>
+          <a:lstStyle/>
+          <a:p>
+            <a:pPr algn="ctr"/>
+          </a:p>
+        </p:txBody>
+      </p:sp>
+      <p:sp>
+        <p:nvSpPr>
+          <p:cNvPr id="6" name="TextBox 5"/>
+          <p:cNvSpPr txBox="1"/>
+          <p:nvPr/>
+        </p:nvSpPr>
+        <p:spPr>
+          <a:xfrm>
+            <a:off x="8641080" y="1737360"/>
+            <a:ext cx="2788920" cy="685800"/>
+          </a:xfrm>
+          <a:prstGeom prst="rect">
+            <a:avLst/>
+          </a:prstGeom>
+          <a:noFill/>
+        </p:spPr>
+        <p:txBody>
+          <a:bodyPr wrap="square" anchor="t" lIns="0" rIns="0">
+            <a:spAutoFit/>
+          </a:bodyPr>
+          <a:lstStyle/>
+          <a:p>
+            <a:pPr algn="l">
+              <a:spcAft>
+                <a:spcPts val="600"/>
+              </a:spcAft>
+            </a:pPr>
+            <a:r>
+              <a:rPr sz="3400" b="1" i="0">
+                <a:solidFill>
+                  <a:srgbClr val="B2432C"/>
+                </a:solidFill>
+                <a:latin typeface="Calibri"/>
+              </a:rPr>
+              <a:t>1.70 m/s²</a:t>
+            </a:r>
+          </a:p>
+        </p:txBody>
+      </p:sp>
+      <p:sp>
+        <p:nvSpPr>
+          <p:cNvPr id="7" name="TextBox 6"/>
+          <p:cNvSpPr txBox="1"/>
+          <p:nvPr/>
+        </p:nvSpPr>
+        <p:spPr>
+          <a:xfrm>
+            <a:off x="8641080" y="2404872"/>
+            <a:ext cx="2788920" cy="685800"/>
+          </a:xfrm>
+          <a:prstGeom prst="rect">
+            <a:avLst/>
+          </a:prstGeom>
+          <a:noFill/>
+        </p:spPr>
+        <p:txBody>
+          <a:bodyPr wrap="square" anchor="t" lIns="0" rIns="0">
+            <a:spAutoFit/>
+          </a:bodyPr>
+          <a:lstStyle/>
+          <a:p>
+            <a:pPr algn="l">
+              <a:spcAft>
+                <a:spcPts val="600"/>
+              </a:spcAft>
+            </a:pPr>
+            <a:r>
+              <a:rPr sz="1300" b="0" i="0">
+                <a:solidFill>
+                  <a:srgbClr val="2B3A44"/>
+                </a:solidFill>
+                <a:latin typeface="Calibri"/>
+              </a:rPr>
+              <a:t>along the deck from a 10° tilt alone (0.17 g), before any wave</a:t>
+            </a:r>
+          </a:p>
+        </p:txBody>
+      </p:sp>
+      <p:sp>
+        <p:nvSpPr>
+          <p:cNvPr id="8" name="Rounded Rectangle 7"/>
+          <p:cNvSpPr/>
+          <p:nvPr/>
+        </p:nvSpPr>
+        <p:spPr>
+          <a:xfrm>
+            <a:off x="8412480" y="3337560"/>
+            <a:ext cx="3246120" cy="1554480"/>
+          </a:xfrm>
+          <a:prstGeom prst="roundRect">
+            <a:avLst>
+              <a:gd name="adj" fmla="val 6000"/>
+            </a:avLst>
+          </a:prstGeom>
+          <a:solidFill>
+            <a:srgbClr val="E4F2F4"/>
+          </a:solidFill>
+          <a:ln>
+            <a:noFill/>
+          </a:ln>
+          <a:effectLst/>
+        </p:spPr>
+        <p:style>
+          <a:lnRef idx="1">
+            <a:schemeClr val="accent1"/>
+          </a:lnRef>
+          <a:fillRef idx="3">
+            <a:schemeClr val="accent1"/>
+          </a:fillRef>
+          <a:effectRef idx="2">
+            <a:schemeClr val="accent1"/>
+          </a:effectRef>
+          <a:fontRef idx="minor">
+            <a:schemeClr val="lt1"/>
+          </a:fontRef>
+        </p:style>
+        <p:txBody>
+          <a:bodyPr rtlCol="0" anchor="ctr"/>
+          <a:lstStyle/>
+          <a:p>
+            <a:pPr algn="ctr"/>
+          </a:p>
+        </p:txBody>
+      </p:sp>
+      <p:sp>
+        <p:nvSpPr>
+          <p:cNvPr id="9" name="TextBox 8"/>
+          <p:cNvSpPr txBox="1"/>
+          <p:nvPr/>
+        </p:nvSpPr>
+        <p:spPr>
+          <a:xfrm>
+            <a:off x="8641080" y="3474720"/>
+            <a:ext cx="2788920" cy="685800"/>
+          </a:xfrm>
+          <a:prstGeom prst="rect">
+            <a:avLst/>
+          </a:prstGeom>
+          <a:noFill/>
+        </p:spPr>
+        <p:txBody>
+          <a:bodyPr wrap="square" anchor="t" lIns="0" rIns="0">
+            <a:spAutoFit/>
+          </a:bodyPr>
+          <a:lstStyle/>
+          <a:p>
+            <a:pPr algn="l">
+              <a:spcAft>
+                <a:spcPts val="600"/>
+              </a:spcAft>
+            </a:pPr>
+            <a:r>
+              <a:rPr sz="3400" b="1" i="0">
+                <a:solidFill>
+                  <a:srgbClr val="C9772B"/>
+                </a:solidFill>
+                <a:latin typeface="Calibri"/>
+              </a:rPr>
+              <a:t>0.25 / 0.23 g</a:t>
+            </a:r>
+          </a:p>
+        </p:txBody>
+      </p:sp>
+      <p:sp>
+        <p:nvSpPr>
+          <p:cNvPr id="10" name="TextBox 9"/>
+          <p:cNvSpPr txBox="1"/>
+          <p:nvPr/>
+        </p:nvSpPr>
+        <p:spPr>
+          <a:xfrm>
+            <a:off x="8641080" y="4142232"/>
+            <a:ext cx="2788920" cy="685800"/>
+          </a:xfrm>
+          <a:prstGeom prst="rect">
+            <a:avLst/>
+          </a:prstGeom>
+          <a:noFill/>
+        </p:spPr>
+        <p:txBody>
+          <a:bodyPr wrap="square" anchor="t" lIns="0" rIns="0">
+            <a:spAutoFit/>
+          </a:bodyPr>
+          <a:lstStyle/>
+          <a:p>
+            <a:pPr algn="l">
+              <a:spcAft>
+                <a:spcPts val="600"/>
+              </a:spcAft>
+            </a:pPr>
+            <a:r>
+              <a:rPr sz="1300" b="0" i="0">
+                <a:solidFill>
+                  <a:srgbClr val="2B3A44"/>
+                </a:solidFill>
+                <a:latin typeface="Calibri"/>
+              </a:rPr>
+              <a:t>worst total lateral at 10°: cluster / platform</a:t>
+            </a:r>
+          </a:p>
+        </p:txBody>
+      </p:sp>
+      <p:sp>
+        <p:nvSpPr>
+          <p:cNvPr id="11" name="TextBox 10"/>
+          <p:cNvSpPr txBox="1"/>
+          <p:nvPr/>
+        </p:nvSpPr>
+        <p:spPr>
+          <a:xfrm>
+            <a:off x="8412480" y="5074920"/>
+            <a:ext cx="3246120" cy="1463040"/>
+          </a:xfrm>
+          <a:prstGeom prst="rect">
+            <a:avLst/>
+          </a:prstGeom>
+          <a:noFill/>
+        </p:spPr>
+        <p:txBody>
+          <a:bodyPr wrap="square" anchor="t" lIns="0" rIns="0">
+            <a:spAutoFit/>
+          </a:bodyPr>
+          <a:lstStyle/>
+          <a:p>
+            <a:pPr algn="l">
+              <a:spcAft>
+                <a:spcPts val="600"/>
+              </a:spcAft>
+            </a:pPr>
+            <a:r>
+              <a:rPr sz="1300" b="0" i="0">
+                <a:solidFill>
+                  <a:srgbClr val="5C6B75"/>
+                </a:solidFill>
+                <a:latin typeface="Calibri"/>
+              </a:rPr>
+              <a:t>Keeping the payload level matters more for its lateral restraint than the wave motion does.</a:t>
+            </a:r>
+          </a:p>
+        </p:txBody>
+      </p:sp>
+    </p:spTree>
+  </p:cSld>
+  <p:clrMapOvr>
+    <a:masterClrMapping/>
+  </p:clrMapOvr>
+</p:sld>
+</file>
+
+<file path=ppt/slides/slide13.xml><?xml version="1.0" encoding="utf-8"?>
 <p:sld xmlns:a="http://schemas.openxmlformats.org/drawingml/2006/main" xmlns:p="http://schemas.openxmlformats.org/presentationml/2006/main" xmlns:r="http://schemas.openxmlformats.org/officeDocument/2006/relationships">
   <p:cSld>
     <p:bg>
@@ -9999,7 +14211,7 @@
 </p:sld>
 </file>
 
-<file path=ppt/slides/slide11.xml><?xml version="1.0" encoding="utf-8"?>
+<file path=ppt/slides/slide14.xml><?xml version="1.0" encoding="utf-8"?>
 <p:sld xmlns:a="http://schemas.openxmlformats.org/drawingml/2006/main" xmlns:p="http://schemas.openxmlformats.org/presentationml/2006/main" xmlns:r="http://schemas.openxmlformats.org/officeDocument/2006/relationships">
   <p:cSld>
     <p:bg>
@@ -10165,11 +14377,11 @@
           <a:p>
             <a:pPr algn="l">
               <a:spcAft>
-                <a:spcPts val="900"/>
+                <a:spcPts val="700"/>
               </a:spcAft>
             </a:pPr>
             <a:r>
-              <a:rPr sz="1500" b="1" i="0">
+              <a:rPr sz="1400" b="1" i="0">
                 <a:solidFill>
                   <a:srgbClr val="2B3A44"/>
                 </a:solidFill>
@@ -10178,7 +14390,7 @@
               <a:t>Avoid waves near 4.2 s with a payload on board: </a:t>
             </a:r>
             <a:r>
-              <a:rPr sz="1500" b="0" i="0">
+              <a:rPr sz="1400" b="0" i="0">
                 <a:solidFill>
                   <a:srgbClr val="2B3A44"/>
                 </a:solidFill>
@@ -10190,11 +14402,11 @@
           <a:p>
             <a:pPr algn="l">
               <a:spcAft>
-                <a:spcPts val="900"/>
+                <a:spcPts val="700"/>
               </a:spcAft>
             </a:pPr>
             <a:r>
-              <a:rPr sz="1500" b="1" i="0">
+              <a:rPr sz="1400" b="1" i="0">
                 <a:solidFill>
                   <a:srgbClr val="2B3A44"/>
                 </a:solidFill>
@@ -10203,7 +14415,7 @@
               <a:t>The mass sets the rocking; the tilt sets the freeboard: </a:t>
             </a:r>
             <a:r>
-              <a:rPr sz="1500" b="0" i="0">
+              <a:rPr sz="1400" b="0" i="0">
                 <a:solidFill>
                   <a:srgbClr val="2B3A44"/>
                 </a:solidFill>
@@ -10215,11 +14427,11 @@
           <a:p>
             <a:pPr algn="l">
               <a:spcAft>
-                <a:spcPts val="900"/>
+                <a:spcPts val="700"/>
               </a:spcAft>
             </a:pPr>
             <a:r>
-              <a:rPr sz="1500" b="1" i="0">
+              <a:rPr sz="1400" b="1" i="0">
                 <a:solidFill>
                   <a:srgbClr val="2B3A44"/>
                 </a:solidFill>
@@ -10228,7 +14440,7 @@
               <a:t>Near the heave resonance (2.6–2.8 s) </a:t>
             </a:r>
             <a:r>
-              <a:rPr sz="1500" b="0" i="0">
+              <a:rPr sz="1400" b="0" i="0">
                 <a:solidFill>
                   <a:srgbClr val="2B3A44"/>
                 </a:solidFill>
@@ -10240,11 +14452,11 @@
           <a:p>
             <a:pPr algn="l">
               <a:spcAft>
-                <a:spcPts val="900"/>
+                <a:spcPts val="700"/>
               </a:spcAft>
             </a:pPr>
             <a:r>
-              <a:rPr sz="1500" b="1" i="0">
+              <a:rPr sz="1400" b="1" i="0">
                 <a:solidFill>
                   <a:srgbClr val="2B3A44"/>
                 </a:solidFill>
@@ -10253,13 +14465,38 @@
               <a:t>Pins stay dry at H = 0.1 m </a:t>
             </a:r>
             <a:r>
-              <a:rPr sz="1500" b="0" i="0">
+              <a:rPr sz="1400" b="0" i="0">
                 <a:solidFill>
                   <a:srgbClr val="2B3A44"/>
                 </a:solidFill>
                 <a:latin typeface="Calibri"/>
               </a:rPr>
               <a:t>in every case (≥ 282 mm).</a:t>
+            </a:r>
+          </a:p>
+          <a:p>
+            <a:pPr algn="l">
+              <a:spcAft>
+                <a:spcPts val="700"/>
+              </a:spcAft>
+            </a:pPr>
+            <a:r>
+              <a:rPr sz="1400" b="1" i="0">
+                <a:solidFill>
+                  <a:srgbClr val="2B3A44"/>
+                </a:solidFill>
+                <a:latin typeface="Calibri"/>
+              </a:rPr>
+              <a:t>Lateral restraint: </a:t>
+            </a:r>
+            <a:r>
+              <a:rPr sz="1400" b="0" i="0">
+                <a:solidFill>
+                  <a:srgbClr val="2B3A44"/>
+                </a:solidFill>
+                <a:latin typeface="Calibri"/>
+              </a:rPr>
+              <a:t>design for the static tilt plus waves: up to 0.25 g at 10°, of which 0.17 g is the tilt alone.</a:t>
             </a:r>
           </a:p>
         </p:txBody>
@@ -10480,7 +14717,7 @@
 </p:sld>
 </file>
 
-<file path=ppt/slides/slide12.xml><?xml version="1.0" encoding="utf-8"?>
+<file path=ppt/slides/slide15.xml><?xml version="1.0" encoding="utf-8"?>
 <p:sld xmlns:a="http://schemas.openxmlformats.org/drawingml/2006/main" xmlns:p="http://schemas.openxmlformats.org/presentationml/2006/main" xmlns:r="http://schemas.openxmlformats.org/officeDocument/2006/relationships">
   <p:cSld>
     <p:bg>
@@ -11580,11 +15817,11 @@
           <a:p>
             <a:pPr algn="l">
               <a:spcAft>
-                <a:spcPts val="700"/>
+                <a:spcPts val="600"/>
               </a:spcAft>
             </a:pPr>
             <a:r>
-              <a:rPr sz="1600" b="1" i="0">
+              <a:rPr sz="1500" b="1" i="0">
                 <a:solidFill>
                   <a:srgbClr val="2B3A44"/>
                 </a:solidFill>
@@ -11593,7 +15830,7 @@
               <a:t>Heave: </a:t>
             </a:r>
             <a:r>
-              <a:rPr sz="1600" b="0" i="0">
+              <a:rPr sz="1500" b="0" i="0">
                 <a:solidFill>
                   <a:srgbClr val="2B3A44"/>
                 </a:solidFill>
@@ -11605,11 +15842,11 @@
           <a:p>
             <a:pPr algn="l">
               <a:spcAft>
-                <a:spcPts val="700"/>
+                <a:spcPts val="600"/>
               </a:spcAft>
             </a:pPr>
             <a:r>
-              <a:rPr sz="1600" b="1" i="0">
+              <a:rPr sz="1500" b="1" i="0">
                 <a:solidFill>
                   <a:srgbClr val="2B3A44"/>
                 </a:solidFill>
@@ -11618,7 +15855,7 @@
               <a:t>Hub / deck tilting: </a:t>
             </a:r>
             <a:r>
-              <a:rPr sz="1600" b="0" i="0">
+              <a:rPr sz="1500" b="0" i="0">
                 <a:solidFill>
                   <a:srgbClr val="2B3A44"/>
                 </a:solidFill>
@@ -11630,11 +15867,11 @@
           <a:p>
             <a:pPr algn="l">
               <a:spcAft>
-                <a:spcPts val="700"/>
+                <a:spcPts val="600"/>
               </a:spcAft>
             </a:pPr>
             <a:r>
-              <a:rPr sz="1600" b="1" i="0">
+              <a:rPr sz="1500" b="1" i="0">
                 <a:solidFill>
                   <a:srgbClr val="2B3A44"/>
                 </a:solidFill>
@@ -11643,7 +15880,7 @@
               <a:t>Freeboard: </a:t>
             </a:r>
             <a:r>
-              <a:rPr sz="1600" b="0" i="0">
+              <a:rPr sz="1500" b="0" i="0">
                 <a:solidFill>
                   <a:srgbClr val="2B3A44"/>
                 </a:solidFill>
@@ -11655,11 +15892,11 @@
           <a:p>
             <a:pPr algn="l">
               <a:spcAft>
-                <a:spcPts val="700"/>
+                <a:spcPts val="600"/>
               </a:spcAft>
             </a:pPr>
             <a:r>
-              <a:rPr sz="1600" b="1" i="0">
+              <a:rPr sz="1500" b="1" i="0">
                 <a:solidFill>
                   <a:srgbClr val="B2432C"/>
                 </a:solidFill>
@@ -11668,13 +15905,38 @@
               <a:t>Buoys' own pitch: </a:t>
             </a:r>
             <a:r>
-              <a:rPr sz="1600" b="0" i="0">
+              <a:rPr sz="1500" b="0" i="0">
                 <a:solidFill>
                   <a:srgbClr val="B2432C"/>
                 </a:solidFill>
                 <a:latin typeface="Calibri"/>
               </a:rPr>
               <a:t>each buoy rocking on its gimbal — the flume record's 2.76–2.9 s pitch resonance — moves to ~4.2 s with a payload, whatever the tilt: keep a loaded article out of waves near 4.2 s.</a:t>
+            </a:r>
+          </a:p>
+          <a:p>
+            <a:pPr algn="l">
+              <a:spcAft>
+                <a:spcPts val="600"/>
+              </a:spcAft>
+            </a:pPr>
+            <a:r>
+              <a:rPr sz="1500" b="1" i="0">
+                <a:solidFill>
+                  <a:srgbClr val="2B3A44"/>
+                </a:solidFill>
+                <a:latin typeface="Calibri"/>
+              </a:rPr>
+              <a:t>Accelerations at the payload: </a:t>
+            </a:r>
+            <a:r>
+              <a:rPr sz="1500" b="0" i="0">
+                <a:solidFill>
+                  <a:srgbClr val="2B3A44"/>
+                </a:solidFill>
+                <a:latin typeface="Calibri"/>
+              </a:rPr>
+              <a:t>vertical ≤ 0.04 g; lateral (along the waves) ≤ 0.8 m/s² from the waves, but a 10° tilt adds a constant 1.70 m/s² (0.17 g): up to 0.25 g in total.</a:t>
             </a:r>
           </a:p>
         </p:txBody>

--- a/studies/payload-stability/Payload_tilt_in_waves.pptx
+++ b/studies/payload-stability/Payload_tilt_in_waves.pptx
@@ -20,6 +20,8 @@
     <p:sldId id="268" r:id="rId20"/>
     <p:sldId id="269" r:id="rId21"/>
     <p:sldId id="270" r:id="rId22"/>
+    <p:sldId id="271" r:id="rId23"/>
+    <p:sldId id="272" r:id="rId24"/>
   </p:sldIdLst>
   <p:sldSz cx="12191695" cy="6858000" type="screen4x3"/>
   <p:notesSz cx="6858000" cy="9144000"/>
@@ -2206,6 +2208,902 @@
                     </a:solidFill>
                   </a:rPr>
                   <a:t>lateral acceleration (m/s²)</a:t>
+                </a:r>
+              </a:p>
+            </c:rich>
+          </c:tx>
+          <c:layout/>
+          <c:overlay val="0"/>
+        </c:title>
+        <c:numFmt formatCode="General" sourceLinked="1"/>
+        <c:majorTickMark val="out"/>
+        <c:minorTickMark val="none"/>
+        <c:tickLblPos val="nextTo"/>
+        <c:spPr>
+          <a:ln>
+            <a:solidFill>
+              <a:srgbClr val="B9D6DC"/>
+            </a:solidFill>
+          </a:ln>
+        </c:spPr>
+        <c:txPr>
+          <a:bodyPr/>
+          <a:lstStyle/>
+          <a:p>
+            <a:pPr>
+              <a:defRPr sz="1100">
+                <a:solidFill>
+                  <a:srgbClr val="5C6B75"/>
+                </a:solidFill>
+              </a:defRPr>
+            </a:pPr>
+          </a:p>
+        </c:txPr>
+        <c:crossAx val="-2128940872"/>
+        <c:crosses val="autoZero"/>
+        <c:crossBetween val="midCat"/>
+      </c:valAx>
+    </c:plotArea>
+    <c:legend>
+      <c:legendPos val="b"/>
+      <c:layout/>
+      <c:overlay val="0"/>
+      <c:txPr>
+        <a:bodyPr/>
+        <a:lstStyle/>
+        <a:p>
+          <a:pPr>
+            <a:defRPr sz="1100">
+              <a:solidFill>
+                <a:srgbClr val="2B3A44"/>
+              </a:solidFill>
+            </a:defRPr>
+          </a:pPr>
+        </a:p>
+      </c:txPr>
+    </c:legend>
+    <c:plotVisOnly val="1"/>
+    <c:dispBlanksAs val="gap"/>
+    <c:showDLblsOverMax val="0"/>
+  </c:chart>
+  <c:txPr>
+    <a:bodyPr/>
+    <a:lstStyle/>
+    <a:p>
+      <a:pPr>
+        <a:defRPr sz="1100">
+          <a:solidFill>
+            <a:srgbClr val="5C6B75"/>
+          </a:solidFill>
+          <a:latin typeface="Calibri"/>
+        </a:defRPr>
+      </a:pPr>
+      <a:endParaRPr lang="en-US"/>
+    </a:p>
+  </c:txPr>
+  <c:externalData r:id="rId1">
+    <c:autoUpdate val="0"/>
+  </c:externalData>
+</c:chartSpace>
+</file>
+
+<file path=ppt/charts/chart13.xml><?xml version="1.0" encoding="utf-8"?>
+<c:chartSpace xmlns:c="http://schemas.openxmlformats.org/drawingml/2006/chart" xmlns:a="http://schemas.openxmlformats.org/drawingml/2006/main" xmlns:r="http://schemas.openxmlformats.org/officeDocument/2006/relationships">
+  <c:chart>
+    <c:title>
+      <c:tx>
+        <c:rich>
+          <a:bodyPr/>
+          <a:lstStyle/>
+          <a:p>
+            <a:r>
+              <a:rPr sz="1300" b="1">
+                <a:solidFill>
+                  <a:srgbClr val="2B3A44"/>
+                </a:solidFill>
+              </a:rPr>
+              <a:t>One buoy, loaded on its pin (12-panel table)</a:t>
+            </a:r>
+          </a:p>
+        </c:rich>
+      </c:tx>
+      <c:layout/>
+      <c:overlay val="0"/>
+    </c:title>
+    <c:plotArea>
+      <c:scatterChart>
+        <c:scatterStyle val="lineMarker"/>
+        <c:varyColors val="0"/>
+        <c:ser>
+          <c:idx val="0"/>
+          <c:order val="0"/>
+          <c:tx>
+            <c:strRef>
+              <c:f>Sheet1!$B$1</c:f>
+              <c:strCache>
+                <c:ptCount val="1"/>
+                <c:pt idx="0">
+                  <c:v>buoy's own righting, C55</c:v>
+                </c:pt>
+              </c:strCache>
+            </c:strRef>
+          </c:tx>
+          <c:spPr>
+            <a:ln w="28575">
+              <a:solidFill>
+                <a:srgbClr val="2F74C0"/>
+              </a:solidFill>
+            </a:ln>
+          </c:spPr>
+          <c:marker>
+            <c:symbol val="none"/>
+          </c:marker>
+          <c:xVal>
+            <c:numRef>
+              <c:f>Sheet1!$A$2:$A$32</c:f>
+              <c:numCache>
+                <c:formatCode>General</c:formatCode>
+                <c:ptCount val="31"/>
+                <c:pt idx="0">
+                  <c:v>0.0</c:v>
+                </c:pt>
+                <c:pt idx="1">
+                  <c:v>0.025</c:v>
+                </c:pt>
+                <c:pt idx="2">
+                  <c:v>0.05</c:v>
+                </c:pt>
+                <c:pt idx="3">
+                  <c:v>0.075</c:v>
+                </c:pt>
+                <c:pt idx="4">
+                  <c:v>0.1</c:v>
+                </c:pt>
+                <c:pt idx="5">
+                  <c:v>0.125</c:v>
+                </c:pt>
+                <c:pt idx="6">
+                  <c:v>0.15</c:v>
+                </c:pt>
+                <c:pt idx="7">
+                  <c:v>0.175</c:v>
+                </c:pt>
+                <c:pt idx="8">
+                  <c:v>0.2</c:v>
+                </c:pt>
+                <c:pt idx="9">
+                  <c:v>0.225</c:v>
+                </c:pt>
+                <c:pt idx="10">
+                  <c:v>0.25</c:v>
+                </c:pt>
+                <c:pt idx="11">
+                  <c:v>0.275</c:v>
+                </c:pt>
+                <c:pt idx="12">
+                  <c:v>0.3</c:v>
+                </c:pt>
+                <c:pt idx="13">
+                  <c:v>0.325</c:v>
+                </c:pt>
+                <c:pt idx="14">
+                  <c:v>0.35</c:v>
+                </c:pt>
+                <c:pt idx="15">
+                  <c:v>0.375</c:v>
+                </c:pt>
+                <c:pt idx="16">
+                  <c:v>0.4</c:v>
+                </c:pt>
+                <c:pt idx="17">
+                  <c:v>0.425</c:v>
+                </c:pt>
+                <c:pt idx="18">
+                  <c:v>0.45</c:v>
+                </c:pt>
+                <c:pt idx="19">
+                  <c:v>0.475</c:v>
+                </c:pt>
+                <c:pt idx="20">
+                  <c:v>0.5</c:v>
+                </c:pt>
+                <c:pt idx="21">
+                  <c:v>0.525</c:v>
+                </c:pt>
+                <c:pt idx="22">
+                  <c:v>0.55</c:v>
+                </c:pt>
+                <c:pt idx="23">
+                  <c:v>0.575</c:v>
+                </c:pt>
+                <c:pt idx="24">
+                  <c:v>0.6</c:v>
+                </c:pt>
+                <c:pt idx="25">
+                  <c:v>0.625</c:v>
+                </c:pt>
+                <c:pt idx="26">
+                  <c:v>0.65</c:v>
+                </c:pt>
+                <c:pt idx="27">
+                  <c:v>0.675</c:v>
+                </c:pt>
+                <c:pt idx="28">
+                  <c:v>0.7</c:v>
+                </c:pt>
+                <c:pt idx="29">
+                  <c:v>0.71</c:v>
+                </c:pt>
+                <c:pt idx="30">
+                  <c:v>0.715</c:v>
+                </c:pt>
+              </c:numCache>
+            </c:numRef>
+          </c:xVal>
+          <c:yVal>
+            <c:numRef>
+              <c:f>Sheet1!$B$2:$B$32</c:f>
+              <c:numCache>
+                <c:formatCode>General</c:formatCode>
+                <c:ptCount val="31"/>
+                <c:pt idx="0">
+                  <c:v>70.77111014228981</c:v>
+                </c:pt>
+                <c:pt idx="1">
+                  <c:v>75.05271897264053</c:v>
+                </c:pt>
+                <c:pt idx="2">
+                  <c:v>79.45073913606264</c:v>
+                </c:pt>
+                <c:pt idx="3">
+                  <c:v>83.96517063255547</c:v>
+                </c:pt>
+                <c:pt idx="4">
+                  <c:v>88.59601346211954</c:v>
+                </c:pt>
+                <c:pt idx="5">
+                  <c:v>93.34326762475519</c:v>
+                </c:pt>
+                <c:pt idx="6">
+                  <c:v>98.20693312046124</c:v>
+                </c:pt>
+                <c:pt idx="7">
+                  <c:v>103.18700994923893</c:v>
+                </c:pt>
+                <c:pt idx="8">
+                  <c:v>108.28349811108626</c:v>
+                </c:pt>
+                <c:pt idx="9">
+                  <c:v>113.49639760600532</c:v>
+                </c:pt>
+                <c:pt idx="10">
+                  <c:v>118.82570843399652</c:v>
+                </c:pt>
+                <c:pt idx="11">
+                  <c:v>124.2714305950569</c:v>
+                </c:pt>
+                <c:pt idx="12">
+                  <c:v>129.83356408918854</c:v>
+                </c:pt>
+                <c:pt idx="13">
+                  <c:v>135.5121089163924</c:v>
+                </c:pt>
+                <c:pt idx="14">
+                  <c:v>141.30706507666622</c:v>
+                </c:pt>
+                <c:pt idx="15">
+                  <c:v>147.218432570011</c:v>
+                </c:pt>
+                <c:pt idx="16">
+                  <c:v>153.246211396428</c:v>
+                </c:pt>
+                <c:pt idx="17">
+                  <c:v>159.3904015559143</c:v>
+                </c:pt>
+                <c:pt idx="18">
+                  <c:v>165.65100304847195</c:v>
+                </c:pt>
+                <c:pt idx="19">
+                  <c:v>172.0280158741014</c:v>
+                </c:pt>
+                <c:pt idx="20">
+                  <c:v>178.52144003280182</c:v>
+                </c:pt>
+                <c:pt idx="21">
+                  <c:v>185.13127552457175</c:v>
+                </c:pt>
+                <c:pt idx="22">
+                  <c:v>191.85752234941458</c:v>
+                </c:pt>
+                <c:pt idx="23">
+                  <c:v>198.7001805073278</c:v>
+                </c:pt>
+                <c:pt idx="24">
+                  <c:v>205.65924999831174</c:v>
+                </c:pt>
+                <c:pt idx="25">
+                  <c:v>212.7347308223664</c:v>
+                </c:pt>
+                <c:pt idx="26">
+                  <c:v>219.92662297949323</c:v>
+                </c:pt>
+                <c:pt idx="27">
+                  <c:v>227.2349264696899</c:v>
+                </c:pt>
+                <c:pt idx="28">
+                  <c:v>234.65964129295853</c:v>
+                </c:pt>
+                <c:pt idx="29">
+                  <c:v>237.6621223955254</c:v>
+                </c:pt>
+                <c:pt idx="30">
+                  <c:v>239.17034762679535</c:v>
+                </c:pt>
+              </c:numCache>
+            </c:numRef>
+          </c:yVal>
+          <c:smooth val="0"/>
+        </c:ser>
+        <c:ser>
+          <c:idx val="1"/>
+          <c:order val="1"/>
+          <c:tx>
+            <c:strRef>
+              <c:f>Sheet1!$B$34</c:f>
+              <c:strCache>
+                <c:ptCount val="1"/>
+                <c:pt idx="0">
+                  <c:v>tipping by the pin load, P × L</c:v>
+                </c:pt>
+              </c:strCache>
+            </c:strRef>
+          </c:tx>
+          <c:spPr>
+            <a:ln w="28575">
+              <a:solidFill>
+                <a:srgbClr val="B2432C"/>
+              </a:solidFill>
+            </a:ln>
+          </c:spPr>
+          <c:marker>
+            <c:symbol val="none"/>
+          </c:marker>
+          <c:xVal>
+            <c:numRef>
+              <c:f>Sheet1!$A$35:$A$65</c:f>
+              <c:numCache>
+                <c:formatCode>General</c:formatCode>
+                <c:ptCount val="31"/>
+                <c:pt idx="0">
+                  <c:v>0.0</c:v>
+                </c:pt>
+                <c:pt idx="1">
+                  <c:v>0.025</c:v>
+                </c:pt>
+                <c:pt idx="2">
+                  <c:v>0.05</c:v>
+                </c:pt>
+                <c:pt idx="3">
+                  <c:v>0.075</c:v>
+                </c:pt>
+                <c:pt idx="4">
+                  <c:v>0.1</c:v>
+                </c:pt>
+                <c:pt idx="5">
+                  <c:v>0.125</c:v>
+                </c:pt>
+                <c:pt idx="6">
+                  <c:v>0.15</c:v>
+                </c:pt>
+                <c:pt idx="7">
+                  <c:v>0.175</c:v>
+                </c:pt>
+                <c:pt idx="8">
+                  <c:v>0.2</c:v>
+                </c:pt>
+                <c:pt idx="9">
+                  <c:v>0.225</c:v>
+                </c:pt>
+                <c:pt idx="10">
+                  <c:v>0.25</c:v>
+                </c:pt>
+                <c:pt idx="11">
+                  <c:v>0.275</c:v>
+                </c:pt>
+                <c:pt idx="12">
+                  <c:v>0.3</c:v>
+                </c:pt>
+                <c:pt idx="13">
+                  <c:v>0.325</c:v>
+                </c:pt>
+                <c:pt idx="14">
+                  <c:v>0.35</c:v>
+                </c:pt>
+                <c:pt idx="15">
+                  <c:v>0.375</c:v>
+                </c:pt>
+                <c:pt idx="16">
+                  <c:v>0.4</c:v>
+                </c:pt>
+                <c:pt idx="17">
+                  <c:v>0.425</c:v>
+                </c:pt>
+                <c:pt idx="18">
+                  <c:v>0.45</c:v>
+                </c:pt>
+                <c:pt idx="19">
+                  <c:v>0.475</c:v>
+                </c:pt>
+                <c:pt idx="20">
+                  <c:v>0.5</c:v>
+                </c:pt>
+                <c:pt idx="21">
+                  <c:v>0.525</c:v>
+                </c:pt>
+                <c:pt idx="22">
+                  <c:v>0.55</c:v>
+                </c:pt>
+                <c:pt idx="23">
+                  <c:v>0.575</c:v>
+                </c:pt>
+                <c:pt idx="24">
+                  <c:v>0.6</c:v>
+                </c:pt>
+                <c:pt idx="25">
+                  <c:v>0.625</c:v>
+                </c:pt>
+                <c:pt idx="26">
+                  <c:v>0.65</c:v>
+                </c:pt>
+                <c:pt idx="27">
+                  <c:v>0.675</c:v>
+                </c:pt>
+                <c:pt idx="28">
+                  <c:v>0.7</c:v>
+                </c:pt>
+                <c:pt idx="29">
+                  <c:v>0.71</c:v>
+                </c:pt>
+                <c:pt idx="30">
+                  <c:v>0.715</c:v>
+                </c:pt>
+              </c:numCache>
+            </c:numRef>
+          </c:xVal>
+          <c:yVal>
+            <c:numRef>
+              <c:f>Sheet1!$B$35:$B$65</c:f>
+              <c:numCache>
+                <c:formatCode>General</c:formatCode>
+                <c:ptCount val="31"/>
+                <c:pt idx="0">
+                  <c:v>0.0</c:v>
+                </c:pt>
+                <c:pt idx="1">
+                  <c:v>7.562080196291845</c:v>
+                </c:pt>
+                <c:pt idx="2">
+                  <c:v>15.124160392583361</c:v>
+                </c:pt>
+                <c:pt idx="3">
+                  <c:v>22.686240588875204</c:v>
+                </c:pt>
+                <c:pt idx="4">
+                  <c:v>30.24832078516727</c:v>
+                </c:pt>
+                <c:pt idx="5">
+                  <c:v>37.81040098145873</c:v>
+                </c:pt>
+                <c:pt idx="6">
+                  <c:v>45.37248117775063</c:v>
+                </c:pt>
+                <c:pt idx="7">
+                  <c:v>52.934561374042644</c:v>
+                </c:pt>
+                <c:pt idx="8">
+                  <c:v>60.4966415703341</c:v>
+                </c:pt>
+                <c:pt idx="9">
+                  <c:v>68.05872176662616</c:v>
+                </c:pt>
+                <c:pt idx="10">
+                  <c:v>75.62080196291812</c:v>
+                </c:pt>
+                <c:pt idx="11">
+                  <c:v>83.18288215920909</c:v>
+                </c:pt>
+                <c:pt idx="12">
+                  <c:v>90.74496235550116</c:v>
+                </c:pt>
+                <c:pt idx="13">
+                  <c:v>98.30704255179305</c:v>
+                </c:pt>
+                <c:pt idx="14">
+                  <c:v>105.8691227480845</c:v>
+                </c:pt>
+                <c:pt idx="15">
+                  <c:v>113.43120294437685</c:v>
+                </c:pt>
+                <c:pt idx="16">
+                  <c:v>120.99328314066852</c:v>
+                </c:pt>
+                <c:pt idx="17">
+                  <c:v>128.5553633369602</c:v>
+                </c:pt>
+                <c:pt idx="18">
+                  <c:v>136.1174435332521</c:v>
+                </c:pt>
+                <c:pt idx="19">
+                  <c:v>143.67952372954358</c:v>
+                </c:pt>
+                <c:pt idx="20">
+                  <c:v>151.24160392583545</c:v>
+                </c:pt>
+                <c:pt idx="21">
+                  <c:v>158.8036841221272</c:v>
+                </c:pt>
+                <c:pt idx="22">
+                  <c:v>166.36576431841883</c:v>
+                </c:pt>
+                <c:pt idx="23">
+                  <c:v>173.92784451471107</c:v>
+                </c:pt>
+                <c:pt idx="24">
+                  <c:v>181.48992471100263</c:v>
+                </c:pt>
+                <c:pt idx="25">
+                  <c:v>189.0520049072936</c:v>
+                </c:pt>
+                <c:pt idx="26">
+                  <c:v>196.61408510358638</c:v>
+                </c:pt>
+                <c:pt idx="27">
+                  <c:v>204.17616529987686</c:v>
+                </c:pt>
+                <c:pt idx="28">
+                  <c:v>211.73824549616927</c:v>
+                </c:pt>
+                <c:pt idx="29">
+                  <c:v>214.7630775746859</c:v>
+                </c:pt>
+                <c:pt idx="30">
+                  <c:v>216.27549361394395</c:v>
+                </c:pt>
+              </c:numCache>
+            </c:numRef>
+          </c:yVal>
+          <c:smooth val="0"/>
+        </c:ser>
+        <c:ser>
+          <c:idx val="2"/>
+          <c:order val="2"/>
+          <c:tx>
+            <c:strRef>
+              <c:f>Sheet1!$B$67</c:f>
+              <c:strCache>
+                <c:ptCount val="1"/>
+                <c:pt idx="0">
+                  <c:v>net rocking stiffness</c:v>
+                </c:pt>
+              </c:strCache>
+            </c:strRef>
+          </c:tx>
+          <c:spPr>
+            <a:ln w="38100">
+              <a:solidFill>
+                <a:srgbClr val="5A8A2B"/>
+              </a:solidFill>
+            </a:ln>
+          </c:spPr>
+          <c:marker>
+            <c:symbol val="none"/>
+          </c:marker>
+          <c:xVal>
+            <c:numRef>
+              <c:f>Sheet1!$A$68:$A$98</c:f>
+              <c:numCache>
+                <c:formatCode>General</c:formatCode>
+                <c:ptCount val="31"/>
+                <c:pt idx="0">
+                  <c:v>0.0</c:v>
+                </c:pt>
+                <c:pt idx="1">
+                  <c:v>0.025</c:v>
+                </c:pt>
+                <c:pt idx="2">
+                  <c:v>0.05</c:v>
+                </c:pt>
+                <c:pt idx="3">
+                  <c:v>0.075</c:v>
+                </c:pt>
+                <c:pt idx="4">
+                  <c:v>0.1</c:v>
+                </c:pt>
+                <c:pt idx="5">
+                  <c:v>0.125</c:v>
+                </c:pt>
+                <c:pt idx="6">
+                  <c:v>0.15</c:v>
+                </c:pt>
+                <c:pt idx="7">
+                  <c:v>0.175</c:v>
+                </c:pt>
+                <c:pt idx="8">
+                  <c:v>0.2</c:v>
+                </c:pt>
+                <c:pt idx="9">
+                  <c:v>0.225</c:v>
+                </c:pt>
+                <c:pt idx="10">
+                  <c:v>0.25</c:v>
+                </c:pt>
+                <c:pt idx="11">
+                  <c:v>0.275</c:v>
+                </c:pt>
+                <c:pt idx="12">
+                  <c:v>0.3</c:v>
+                </c:pt>
+                <c:pt idx="13">
+                  <c:v>0.325</c:v>
+                </c:pt>
+                <c:pt idx="14">
+                  <c:v>0.35</c:v>
+                </c:pt>
+                <c:pt idx="15">
+                  <c:v>0.375</c:v>
+                </c:pt>
+                <c:pt idx="16">
+                  <c:v>0.4</c:v>
+                </c:pt>
+                <c:pt idx="17">
+                  <c:v>0.425</c:v>
+                </c:pt>
+                <c:pt idx="18">
+                  <c:v>0.45</c:v>
+                </c:pt>
+                <c:pt idx="19">
+                  <c:v>0.475</c:v>
+                </c:pt>
+                <c:pt idx="20">
+                  <c:v>0.5</c:v>
+                </c:pt>
+                <c:pt idx="21">
+                  <c:v>0.525</c:v>
+                </c:pt>
+                <c:pt idx="22">
+                  <c:v>0.55</c:v>
+                </c:pt>
+                <c:pt idx="23">
+                  <c:v>0.575</c:v>
+                </c:pt>
+                <c:pt idx="24">
+                  <c:v>0.6</c:v>
+                </c:pt>
+                <c:pt idx="25">
+                  <c:v>0.625</c:v>
+                </c:pt>
+                <c:pt idx="26">
+                  <c:v>0.65</c:v>
+                </c:pt>
+                <c:pt idx="27">
+                  <c:v>0.675</c:v>
+                </c:pt>
+                <c:pt idx="28">
+                  <c:v>0.7</c:v>
+                </c:pt>
+                <c:pt idx="29">
+                  <c:v>0.71</c:v>
+                </c:pt>
+                <c:pt idx="30">
+                  <c:v>0.715</c:v>
+                </c:pt>
+              </c:numCache>
+            </c:numRef>
+          </c:xVal>
+          <c:yVal>
+            <c:numRef>
+              <c:f>Sheet1!$B$68:$B$98</c:f>
+              <c:numCache>
+                <c:formatCode>General</c:formatCode>
+                <c:ptCount val="31"/>
+                <c:pt idx="0">
+                  <c:v>70.77111014228981</c:v>
+                </c:pt>
+                <c:pt idx="1">
+                  <c:v>67.49063877634869</c:v>
+                </c:pt>
+                <c:pt idx="2">
+                  <c:v>64.32657874347927</c:v>
+                </c:pt>
+                <c:pt idx="3">
+                  <c:v>61.27893004368026</c:v>
+                </c:pt>
+                <c:pt idx="4">
+                  <c:v>58.34769267695228</c:v>
+                </c:pt>
+                <c:pt idx="5">
+                  <c:v>55.53286664329646</c:v>
+                </c:pt>
+                <c:pt idx="6">
+                  <c:v>52.834451942710615</c:v>
+                </c:pt>
+                <c:pt idx="7">
+                  <c:v>50.25244857519628</c:v>
+                </c:pt>
+                <c:pt idx="8">
+                  <c:v>47.78685654075216</c:v>
+                </c:pt>
+                <c:pt idx="9">
+                  <c:v>45.43767583937915</c:v>
+                </c:pt>
+                <c:pt idx="10">
+                  <c:v>43.2049064710784</c:v>
+                </c:pt>
+                <c:pt idx="11">
+                  <c:v>41.08854843584781</c:v>
+                </c:pt>
+                <c:pt idx="12">
+                  <c:v>39.08860173368738</c:v>
+                </c:pt>
+                <c:pt idx="13">
+                  <c:v>37.20506636459936</c:v>
+                </c:pt>
+                <c:pt idx="14">
+                  <c:v>35.43794232858173</c:v>
+                </c:pt>
+                <c:pt idx="15">
+                  <c:v>33.787229625634154</c:v>
+                </c:pt>
+                <c:pt idx="16">
+                  <c:v>32.252928255759485</c:v>
+                </c:pt>
+                <c:pt idx="17">
+                  <c:v>30.83503821895411</c:v>
+                </c:pt>
+                <c:pt idx="18">
+                  <c:v>29.53355951521985</c:v>
+                </c:pt>
+                <c:pt idx="19">
+                  <c:v>28.348492144557838</c:v>
+                </c:pt>
+                <c:pt idx="20">
+                  <c:v>27.27983610696637</c:v>
+                </c:pt>
+                <c:pt idx="21">
+                  <c:v>26.32759140244454</c:v>
+                </c:pt>
+                <c:pt idx="22">
+                  <c:v>25.491758030995754</c:v>
+                </c:pt>
+                <c:pt idx="23">
+                  <c:v>24.772335992616718</c:v>
+                </c:pt>
+                <c:pt idx="24">
+                  <c:v>24.169325287309107</c:v>
+                </c:pt>
+                <c:pt idx="25">
+                  <c:v>23.682725915072808</c:v>
+                </c:pt>
+                <c:pt idx="26">
+                  <c:v>23.312537875906855</c:v>
+                </c:pt>
+                <c:pt idx="27">
+                  <c:v>23.05876116981304</c:v>
+                </c:pt>
+                <c:pt idx="28">
+                  <c:v>22.921395796789255</c:v>
+                </c:pt>
+                <c:pt idx="29">
+                  <c:v>22.899044820839492</c:v>
+                </c:pt>
+                <c:pt idx="30">
+                  <c:v>22.894854012851397</c:v>
+                </c:pt>
+              </c:numCache>
+            </c:numRef>
+          </c:yVal>
+          <c:smooth val="0"/>
+        </c:ser>
+        <c:axId val="-2128940872"/>
+        <c:axId val="-2129643912"/>
+      </c:scatterChart>
+      <c:valAx>
+        <c:axId val="-2128940872"/>
+        <c:scaling>
+          <c:orientation val="minMax"/>
+          <c:max val="0.75"/>
+          <c:min val="0.0"/>
+        </c:scaling>
+        <c:delete val="0"/>
+        <c:axPos val="b"/>
+        <c:majorGridlines>
+          <c:spPr>
+            <a:ln>
+              <a:solidFill>
+                <a:srgbClr val="E6ECEE"/>
+              </a:solidFill>
+            </a:ln>
+          </c:spPr>
+        </c:majorGridlines>
+        <c:title>
+          <c:tx>
+            <c:rich>
+              <a:bodyPr/>
+              <a:lstStyle/>
+              <a:p>
+                <a:r>
+                  <a:rPr sz="1200" b="0">
+                    <a:solidFill>
+                      <a:srgbClr val="2B3A44"/>
+                    </a:solidFill>
+                  </a:rPr>
+                  <a:t>sinkage below the design draft (m)</a:t>
+                </a:r>
+              </a:p>
+            </c:rich>
+          </c:tx>
+          <c:layout/>
+          <c:overlay val="0"/>
+        </c:title>
+        <c:numFmt formatCode="General" sourceLinked="1"/>
+        <c:majorTickMark val="out"/>
+        <c:minorTickMark val="none"/>
+        <c:tickLblPos val="nextTo"/>
+        <c:spPr>
+          <a:ln>
+            <a:solidFill>
+              <a:srgbClr val="B9D6DC"/>
+            </a:solidFill>
+          </a:ln>
+        </c:spPr>
+        <c:txPr>
+          <a:bodyPr/>
+          <a:lstStyle/>
+          <a:p>
+            <a:pPr>
+              <a:defRPr sz="1100">
+                <a:solidFill>
+                  <a:srgbClr val="5C6B75"/>
+                </a:solidFill>
+              </a:defRPr>
+            </a:pPr>
+          </a:p>
+        </c:txPr>
+        <c:crossAx val="-2129643912"/>
+        <c:crosses val="autoZero"/>
+        <c:crossBetween val="midCat"/>
+      </c:valAx>
+      <c:valAx>
+        <c:axId val="-2129643912"/>
+        <c:scaling>
+          <c:orientation val="minMax"/>
+          <c:max val="260.0"/>
+          <c:min val="0.0"/>
+        </c:scaling>
+        <c:delete val="0"/>
+        <c:axPos val="l"/>
+        <c:majorGridlines>
+          <c:spPr>
+            <a:ln>
+              <a:solidFill>
+                <a:srgbClr val="E6ECEE"/>
+              </a:solidFill>
+            </a:ln>
+          </c:spPr>
+        </c:majorGridlines>
+        <c:title>
+          <c:tx>
+            <c:rich>
+              <a:bodyPr/>
+              <a:lstStyle/>
+              <a:p>
+                <a:r>
+                  <a:rPr sz="1200" b="0">
+                    <a:solidFill>
+                      <a:srgbClr val="2B3A44"/>
+                    </a:solidFill>
+                  </a:rPr>
+                  <a:t>stiffness (N·m/rad)</a:t>
                 </a:r>
               </a:p>
             </c:rich>
@@ -7603,6 +8501,146 @@
           <a:p>
             <a:r>
               <a:t>For reference: the FloatSim change behind these results. The weight preload is opt-in. It adds every body's weight and each floating body's buoyancy, solves the static equilibrium through the joints, carries the joint loads in the dynamics, and refuses any model whose loads leave it without restoring. It was validated against a closed-form pinned float, against the full test suite with the switch off, and against this study's hand statics on the real cluster.</a:t>
+            </a:r>
+          </a:p>
+        </p:txBody>
+      </p:sp>
+      <p:sp>
+        <p:nvSpPr>
+          <p:cNvPr id="4" name="Slide Number Placeholder 3"/>
+          <p:cNvSpPr>
+            <a:spLocks noGrp="1"/>
+          </p:cNvSpPr>
+          <p:nvPr>
+            <p:ph type="sldNum" idx="5" sz="quarter"/>
+          </p:nvPr>
+        </p:nvSpPr>
+        <p:spPr/>
+      </p:sp>
+    </p:spTree>
+  </p:cSld>
+  <p:clrMapOvr>
+    <a:masterClrMapping/>
+  </p:clrMapOvr>
+</p:notes>
+</file>
+
+<file path=ppt/notesSlides/notesSlide16.xml><?xml version="1.0" encoding="utf-8"?>
+<p:notes xmlns:a="http://schemas.openxmlformats.org/drawingml/2006/main" xmlns:p="http://schemas.openxmlformats.org/presentationml/2006/main" xmlns:r="http://schemas.openxmlformats.org/officeDocument/2006/relationships">
+  <p:cSld>
+    <p:spTree>
+      <p:nvGrpSpPr>
+        <p:cNvPr id="1" name=""/>
+        <p:cNvGrpSpPr/>
+        <p:nvPr/>
+      </p:nvGrpSpPr>
+      <p:grpSpPr>
+        <a:xfrm>
+          <a:off x="0" y="0"/>
+          <a:ext cx="0" cy="0"/>
+          <a:chOff x="0" y="0"/>
+          <a:chExt cx="0" cy="0"/>
+        </a:xfrm>
+      </p:grpSpPr>
+      <p:sp>
+        <p:nvSpPr>
+          <p:cNvPr id="2" name="Slide Image Placeholder 1"/>
+          <p:cNvSpPr>
+            <a:spLocks noGrp="1"/>
+          </p:cNvSpPr>
+          <p:nvPr>
+            <p:ph type="sldImg" idx="2"/>
+          </p:nvPr>
+        </p:nvSpPr>
+        <p:spPr/>
+      </p:sp>
+      <p:sp>
+        <p:nvSpPr>
+          <p:cNvPr id="3" name="Notes Placeholder 2"/>
+          <p:cNvSpPr>
+            <a:spLocks noGrp="1"/>
+          </p:cNvSpPr>
+          <p:nvPr>
+            <p:ph type="body" idx="3" sz="quarter"/>
+          </p:nvPr>
+        </p:nvSpPr>
+        <p:spPr/>
+        <p:txBody>
+          <a:bodyPr/>
+          <a:lstStyle/>
+          <a:p>
+            <a:r>
+              <a:t>What loading a buoy does. Each buoy carries its share of the hub, deck and payload on its pin, and sinks until the extra buoyancy carries it. Sinking raises the buoy's own righting, because the new buoyancy is added high up the spar. But the load sits on the pin 1.62 m above the buoy's centre of gravity, and when the buoy leans that load pushes it further over: P times L. That grows faster than the righting, so the net rocking stiffness falls as the buoy is loaded. Shifting the payload loads the near buoys more and the far ones less: the near side sinks deeper, loses freeboard and gets softer; the far side the opposite.</a:t>
+            </a:r>
+          </a:p>
+        </p:txBody>
+      </p:sp>
+      <p:sp>
+        <p:nvSpPr>
+          <p:cNvPr id="4" name="Slide Number Placeholder 3"/>
+          <p:cNvSpPr>
+            <a:spLocks noGrp="1"/>
+          </p:cNvSpPr>
+          <p:nvPr>
+            <p:ph type="sldNum" idx="5" sz="quarter"/>
+          </p:nvPr>
+        </p:nvSpPr>
+        <p:spPr/>
+      </p:sp>
+    </p:spTree>
+  </p:cSld>
+  <p:clrMapOvr>
+    <a:masterClrMapping/>
+  </p:clrMapOvr>
+</p:notes>
+</file>
+
+<file path=ppt/notesSlides/notesSlide17.xml><?xml version="1.0" encoding="utf-8"?>
+<p:notes xmlns:a="http://schemas.openxmlformats.org/drawingml/2006/main" xmlns:p="http://schemas.openxmlformats.org/presentationml/2006/main" xmlns:r="http://schemas.openxmlformats.org/officeDocument/2006/relationships">
+  <p:cSld>
+    <p:spTree>
+      <p:nvGrpSpPr>
+        <p:cNvPr id="1" name=""/>
+        <p:cNvGrpSpPr/>
+        <p:nvPr/>
+      </p:nvGrpSpPr>
+      <p:grpSpPr>
+        <a:xfrm>
+          <a:off x="0" y="0"/>
+          <a:ext cx="0" cy="0"/>
+          <a:chOff x="0" y="0"/>
+          <a:chExt cx="0" cy="0"/>
+        </a:xfrm>
+      </p:grpSpPr>
+      <p:sp>
+        <p:nvSpPr>
+          <p:cNvPr id="2" name="Slide Image Placeholder 1"/>
+          <p:cNvSpPr>
+            <a:spLocks noGrp="1"/>
+          </p:cNvSpPr>
+          <p:nvPr>
+            <p:ph type="sldImg" idx="2"/>
+          </p:nvPr>
+        </p:nvSpPr>
+        <p:spPr/>
+      </p:sp>
+      <p:sp>
+        <p:nvSpPr>
+          <p:cNvPr id="3" name="Notes Placeholder 2"/>
+          <p:cNvSpPr>
+            <a:spLocks noGrp="1"/>
+          </p:cNvSpPr>
+          <p:nvPr>
+            <p:ph type="body" idx="3" sz="quarter"/>
+          </p:nvPr>
+        </p:nvSpPr>
+        <p:spPr/>
+        <p:txBody>
+          <a:bodyPr/>
+          <a:lstStyle/>
+          <a:p>
+            <a:r>
+              <a:t>FloatSim's small-rotation limit, and where it bites in this study. FloatSim is linear about the equilibrium: it treats rotations, including each buoy's rotation on its pin, as small, up to about a tenth of a radian. The static tilts of 5 and 10 degrees are not a problem, because every case was built about its own tilted equilibrium, with the hydrodynamics recomputed there. The wave motions on top must be small: the deck and hub pitch, at most about 4 degrees, are. The buoys' rocking on their pins at 4.2 seconds, 11 to 12.6 degrees, is about twice the limit. The geometry error there is small; the real uncertainty is the damping that sets the amplitude. So that amplitude is indicative, while the resonance period stands.</a:t>
             </a:r>
           </a:p>
         </p:txBody>
@@ -15162,6 +16200,2061 @@
 </p:sld>
 </file>
 
+<file path=ppt/slides/slide16.xml><?xml version="1.0" encoding="utf-8"?>
+<p:sld xmlns:a="http://schemas.openxmlformats.org/drawingml/2006/main" xmlns:p="http://schemas.openxmlformats.org/presentationml/2006/main" xmlns:r="http://schemas.openxmlformats.org/officeDocument/2006/relationships">
+  <p:cSld>
+    <p:bg>
+      <p:bgPr>
+        <a:solidFill>
+          <a:srgbClr val="FFFFFF"/>
+        </a:solidFill>
+        <a:effectLst/>
+      </p:bgPr>
+    </p:bg>
+    <p:spTree>
+      <p:nvGrpSpPr>
+        <p:cNvPr id="1" name=""/>
+        <p:cNvGrpSpPr/>
+        <p:nvPr/>
+      </p:nvGrpSpPr>
+      <p:grpSpPr/>
+      <p:sp>
+        <p:nvSpPr>
+          <p:cNvPr id="2" name="TextBox 1"/>
+          <p:cNvSpPr txBox="1"/>
+          <p:nvPr/>
+        </p:nvSpPr>
+        <p:spPr>
+          <a:xfrm>
+            <a:off x="548640" y="347472"/>
+            <a:ext cx="11064240" cy="685800"/>
+          </a:xfrm>
+          <a:prstGeom prst="rect">
+            <a:avLst/>
+          </a:prstGeom>
+          <a:noFill/>
+        </p:spPr>
+        <p:txBody>
+          <a:bodyPr wrap="square" anchor="t" lIns="0" rIns="0">
+            <a:spAutoFit/>
+          </a:bodyPr>
+          <a:lstStyle/>
+          <a:p>
+            <a:pPr algn="l">
+              <a:spcAft>
+                <a:spcPts val="600"/>
+              </a:spcAft>
+            </a:pPr>
+            <a:r>
+              <a:rPr sz="3200" b="1" i="0">
+                <a:solidFill>
+                  <a:srgbClr val="14232E"/>
+                </a:solidFill>
+                <a:latin typeface="Calibri"/>
+              </a:rPr>
+              <a:t>Appendix: what loading each buoy does</a:t>
+            </a:r>
+          </a:p>
+        </p:txBody>
+      </p:sp>
+      <p:sp>
+        <p:nvSpPr>
+          <p:cNvPr id="3" name="TextBox 2"/>
+          <p:cNvSpPr txBox="1"/>
+          <p:nvPr/>
+        </p:nvSpPr>
+        <p:spPr>
+          <a:xfrm>
+            <a:off x="548640" y="987552"/>
+            <a:ext cx="11064240" cy="411480"/>
+          </a:xfrm>
+          <a:prstGeom prst="rect">
+            <a:avLst/>
+          </a:prstGeom>
+          <a:noFill/>
+        </p:spPr>
+        <p:txBody>
+          <a:bodyPr wrap="square" anchor="t" lIns="0" rIns="0">
+            <a:spAutoFit/>
+          </a:bodyPr>
+          <a:lstStyle/>
+          <a:p>
+            <a:pPr algn="l">
+              <a:spcAft>
+                <a:spcPts val="600"/>
+              </a:spcAft>
+            </a:pPr>
+            <a:r>
+              <a:rPr sz="1600" b="0" i="0">
+                <a:solidFill>
+                  <a:srgbClr val="5C6B75"/>
+                </a:solidFill>
+                <a:latin typeface="Calibri"/>
+              </a:rPr>
+              <a:t>Its share of the hub, deck and payload sits on its pin, 1.62 m above its centre of gravity</a:t>
+            </a:r>
+          </a:p>
+        </p:txBody>
+      </p:sp>
+      <p:graphicFrame>
+        <p:nvGraphicFramePr>
+          <p:cNvPr id="4" name="Chart 3"/>
+          <p:cNvGraphicFramePr>
+            <a:graphicFrameLocks noGrp="1"/>
+          </p:cNvGraphicFramePr>
+          <p:nvPr/>
+        </p:nvGraphicFramePr>
+        <p:xfrm>
+          <a:off x="457200" y="1371600"/>
+          <a:ext cx="5669280" cy="3703320"/>
+        </p:xfrm>
+        <a:graphic>
+          <a:graphicData uri="http://schemas.openxmlformats.org/drawingml/2006/chart">
+            <c:chart xmlns:c="http://schemas.openxmlformats.org/drawingml/2006/chart" r:id="rId3"/>
+          </a:graphicData>
+        </a:graphic>
+      </p:graphicFrame>
+      <p:sp>
+        <p:nvSpPr>
+          <p:cNvPr id="5" name="TextBox 4"/>
+          <p:cNvSpPr txBox="1"/>
+          <p:nvPr/>
+        </p:nvSpPr>
+        <p:spPr>
+          <a:xfrm>
+            <a:off x="6355080" y="1417320"/>
+            <a:ext cx="5349240" cy="3566160"/>
+          </a:xfrm>
+          <a:prstGeom prst="rect">
+            <a:avLst/>
+          </a:prstGeom>
+          <a:noFill/>
+        </p:spPr>
+        <p:txBody>
+          <a:bodyPr wrap="square" anchor="t" lIns="0" rIns="0">
+            <a:spAutoFit/>
+          </a:bodyPr>
+          <a:lstStyle/>
+          <a:p>
+            <a:pPr algn="l">
+              <a:spcAft>
+                <a:spcPts val="500"/>
+              </a:spcAft>
+            </a:pPr>
+            <a:r>
+              <a:rPr sz="1300" b="1" i="0">
+                <a:solidFill>
+                  <a:srgbClr val="2B3A44"/>
+                </a:solidFill>
+                <a:latin typeface="Calibri"/>
+              </a:rPr>
+              <a:t>It sinks to carry its load: </a:t>
+            </a:r>
+            <a:r>
+              <a:rPr sz="1300" b="0" i="0">
+                <a:solidFill>
+                  <a:srgbClr val="2B3A44"/>
+                </a:solidFill>
+                <a:latin typeface="Calibri"/>
+              </a:rPr>
+              <a:t>P = C33 × sinkage, 186 N per metre, until the spar top (the pin) reaches the water.</a:t>
+            </a:r>
+          </a:p>
+          <a:p>
+            <a:pPr algn="l">
+              <a:spcAft>
+                <a:spcPts val="500"/>
+              </a:spcAft>
+            </a:pPr>
+            <a:r>
+              <a:rPr sz="1300" b="1" i="0">
+                <a:solidFill>
+                  <a:srgbClr val="2B3A44"/>
+                </a:solidFill>
+                <a:latin typeface="Calibri"/>
+              </a:rPr>
+              <a:t>Sinking raises its righting: </a:t>
+            </a:r>
+            <a:r>
+              <a:rPr sz="1300" b="0" i="0">
+                <a:solidFill>
+                  <a:srgbClr val="2B3A44"/>
+                </a:solidFill>
+                <a:latin typeface="Calibri"/>
+              </a:rPr>
+              <a:t>the new buoyancy is added high up the spar: C55 grows 71 → 239 N·m/rad by the time the pin reaches the water.</a:t>
+            </a:r>
+          </a:p>
+          <a:p>
+            <a:pPr algn="l">
+              <a:spcAft>
+                <a:spcPts val="500"/>
+              </a:spcAft>
+            </a:pPr>
+            <a:r>
+              <a:rPr sz="1300" b="1" i="0">
+                <a:solidFill>
+                  <a:srgbClr val="2B3A44"/>
+                </a:solidFill>
+                <a:latin typeface="Calibri"/>
+              </a:rPr>
+              <a:t>The load on the pin tips it: </a:t>
+            </a:r>
+            <a:r>
+              <a:rPr sz="1300" b="0" i="0">
+                <a:solidFill>
+                  <a:srgbClr val="2B3A44"/>
+                </a:solidFill>
+                <a:latin typeface="Calibri"/>
+              </a:rPr>
+              <a:t>when the buoy leans, the pin and its load move sideways and push it over: P × L grows 0 → 216 N·m/rad.</a:t>
+            </a:r>
+          </a:p>
+          <a:p>
+            <a:pPr algn="l">
+              <a:spcAft>
+                <a:spcPts val="500"/>
+              </a:spcAft>
+            </a:pPr>
+            <a:r>
+              <a:rPr sz="1300" b="1" i="0">
+                <a:solidFill>
+                  <a:srgbClr val="2B3A44"/>
+                </a:solidFill>
+                <a:latin typeface="Calibri"/>
+              </a:rPr>
+              <a:t>Net: the more load, the softer it rocks: </a:t>
+            </a:r>
+            <a:r>
+              <a:rPr sz="1300" b="0" i="0">
+                <a:solidFill>
+                  <a:srgbClr val="2B3A44"/>
+                </a:solidFill>
+                <a:latin typeface="Calibri"/>
+              </a:rPr>
+              <a:t>71 → 23 N·m/rad. A payload slows the buoys' rocking from ~2.85 to ~4.2 s.</a:t>
+            </a:r>
+          </a:p>
+          <a:p>
+            <a:pPr algn="l">
+              <a:spcAft>
+                <a:spcPts val="500"/>
+              </a:spcAft>
+            </a:pPr>
+            <a:r>
+              <a:rPr sz="1300" b="1" i="0">
+                <a:solidFill>
+                  <a:srgbClr val="2B3A44"/>
+                </a:solidFill>
+                <a:latin typeface="Calibri"/>
+              </a:rPr>
+              <a:t>A shifted payload loads the near buoys more: </a:t>
+            </a:r>
+            <a:r>
+              <a:rPr sz="1300" b="0" i="0">
+                <a:solidFill>
+                  <a:srgbClr val="2B3A44"/>
+                </a:solidFill>
+                <a:latin typeface="Calibri"/>
+              </a:rPr>
+              <a:t>they sink deeper, lose freeboard and get softer; the far ones rise and stiffen. All the buoys still rock together at one period (the sum of their stiffnesses barely changes).</a:t>
+            </a:r>
+          </a:p>
+        </p:txBody>
+      </p:sp>
+      <p:graphicFrame>
+        <p:nvGraphicFramePr>
+          <p:cNvPr id="6" name="Table 5"/>
+          <p:cNvGraphicFramePr>
+            <a:graphicFrameLocks noGrp="1"/>
+          </p:cNvGraphicFramePr>
+          <p:nvPr/>
+        </p:nvGraphicFramePr>
+        <p:xfrm>
+          <a:off x="457200" y="5166360"/>
+          <a:ext cx="10424160" cy="1463040"/>
+        </p:xfrm>
+        <a:graphic>
+          <a:graphicData uri="http://schemas.openxmlformats.org/drawingml/2006/table">
+            <a:tbl>
+              <a:tblPr firstRow="1" bandRow="1">
+                <a:tableStyleId>{5C22544A-7EE6-4342-B048-85BDC9FD1C3A}</a:tableStyleId>
+              </a:tblPr>
+              <a:tblGrid>
+                <a:gridCol w="2103120"/>
+                <a:gridCol w="1234440"/>
+                <a:gridCol w="1051560"/>
+                <a:gridCol w="685800"/>
+                <a:gridCol w="1143000"/>
+                <a:gridCol w="1280160"/>
+                <a:gridCol w="1051560"/>
+                <a:gridCol w="685800"/>
+                <a:gridCol w="1188720"/>
+              </a:tblGrid>
+              <a:tr h="292608">
+                <a:tc>
+                  <a:txBody>
+                    <a:bodyPr/>
+                    <a:lstStyle/>
+                    <a:p>
+                      <a:r>
+                        <a:rPr sz="1100" b="1">
+                          <a:solidFill>
+                            <a:srgbClr val="FFFFFF"/>
+                          </a:solidFill>
+                          <a:latin typeface="Calibri"/>
+                        </a:rPr>
+                        <a:t>Buoy</a:t>
+                      </a:r>
+                    </a:p>
+                  </a:txBody>
+                  <a:tcPr>
+                    <a:solidFill>
+                      <a:srgbClr val="0C8B96"/>
+                    </a:solidFill>
+                  </a:tcPr>
+                </a:tc>
+                <a:tc>
+                  <a:txBody>
+                    <a:bodyPr/>
+                    <a:lstStyle/>
+                    <a:p>
+                      <a:r>
+                        <a:rPr sz="1100" b="1">
+                          <a:solidFill>
+                            <a:srgbClr val="FFFFFF"/>
+                          </a:solidFill>
+                          <a:latin typeface="Calibri"/>
+                        </a:rPr>
+                        <a:t>Cluster: sinkage</a:t>
+                      </a:r>
+                    </a:p>
+                  </a:txBody>
+                  <a:tcPr>
+                    <a:solidFill>
+                      <a:srgbClr val="0C8B96"/>
+                    </a:solidFill>
+                  </a:tcPr>
+                </a:tc>
+                <a:tc>
+                  <a:txBody>
+                    <a:bodyPr/>
+                    <a:lstStyle/>
+                    <a:p>
+                      <a:r>
+                        <a:rPr sz="1100" b="1">
+                          <a:solidFill>
+                            <a:srgbClr val="FFFFFF"/>
+                          </a:solidFill>
+                          <a:latin typeface="Calibri"/>
+                        </a:rPr>
+                        <a:t>P·L / C55</a:t>
+                      </a:r>
+                    </a:p>
+                  </a:txBody>
+                  <a:tcPr>
+                    <a:solidFill>
+                      <a:srgbClr val="0C8B96"/>
+                    </a:solidFill>
+                  </a:tcPr>
+                </a:tc>
+                <a:tc>
+                  <a:txBody>
+                    <a:bodyPr/>
+                    <a:lstStyle/>
+                    <a:p>
+                      <a:r>
+                        <a:rPr sz="1100" b="1">
+                          <a:solidFill>
+                            <a:srgbClr val="FFFFFF"/>
+                          </a:solidFill>
+                          <a:latin typeface="Calibri"/>
+                        </a:rPr>
+                        <a:t>Net</a:t>
+                      </a:r>
+                    </a:p>
+                  </a:txBody>
+                  <a:tcPr>
+                    <a:solidFill>
+                      <a:srgbClr val="0C8B96"/>
+                    </a:solidFill>
+                  </a:tcPr>
+                </a:tc>
+                <a:tc>
+                  <a:txBody>
+                    <a:bodyPr/>
+                    <a:lstStyle/>
+                    <a:p>
+                      <a:r>
+                        <a:rPr sz="1100" b="1">
+                          <a:solidFill>
+                            <a:srgbClr val="FFFFFF"/>
+                          </a:solidFill>
+                          <a:latin typeface="Calibri"/>
+                        </a:rPr>
+                        <a:t>Pin above water</a:t>
+                      </a:r>
+                    </a:p>
+                  </a:txBody>
+                  <a:tcPr>
+                    <a:solidFill>
+                      <a:srgbClr val="0C8B96"/>
+                    </a:solidFill>
+                  </a:tcPr>
+                </a:tc>
+                <a:tc>
+                  <a:txBody>
+                    <a:bodyPr/>
+                    <a:lstStyle/>
+                    <a:p>
+                      <a:r>
+                        <a:rPr sz="1100" b="1">
+                          <a:solidFill>
+                            <a:srgbClr val="FFFFFF"/>
+                          </a:solidFill>
+                          <a:latin typeface="Calibri"/>
+                        </a:rPr>
+                        <a:t>Platform: sinkage</a:t>
+                      </a:r>
+                    </a:p>
+                  </a:txBody>
+                  <a:tcPr>
+                    <a:solidFill>
+                      <a:srgbClr val="0C8B96"/>
+                    </a:solidFill>
+                  </a:tcPr>
+                </a:tc>
+                <a:tc>
+                  <a:txBody>
+                    <a:bodyPr/>
+                    <a:lstStyle/>
+                    <a:p>
+                      <a:r>
+                        <a:rPr sz="1100" b="1">
+                          <a:solidFill>
+                            <a:srgbClr val="FFFFFF"/>
+                          </a:solidFill>
+                          <a:latin typeface="Calibri"/>
+                        </a:rPr>
+                        <a:t>P·L / C55</a:t>
+                      </a:r>
+                    </a:p>
+                  </a:txBody>
+                  <a:tcPr>
+                    <a:solidFill>
+                      <a:srgbClr val="0C8B96"/>
+                    </a:solidFill>
+                  </a:tcPr>
+                </a:tc>
+                <a:tc>
+                  <a:txBody>
+                    <a:bodyPr/>
+                    <a:lstStyle/>
+                    <a:p>
+                      <a:r>
+                        <a:rPr sz="1100" b="1">
+                          <a:solidFill>
+                            <a:srgbClr val="FFFFFF"/>
+                          </a:solidFill>
+                          <a:latin typeface="Calibri"/>
+                        </a:rPr>
+                        <a:t>Net</a:t>
+                      </a:r>
+                    </a:p>
+                  </a:txBody>
+                  <a:tcPr>
+                    <a:solidFill>
+                      <a:srgbClr val="0C8B96"/>
+                    </a:solidFill>
+                  </a:tcPr>
+                </a:tc>
+                <a:tc>
+                  <a:txBody>
+                    <a:bodyPr/>
+                    <a:lstStyle/>
+                    <a:p>
+                      <a:r>
+                        <a:rPr sz="1100" b="1">
+                          <a:solidFill>
+                            <a:srgbClr val="FFFFFF"/>
+                          </a:solidFill>
+                          <a:latin typeface="Calibri"/>
+                        </a:rPr>
+                        <a:t>Pin above water</a:t>
+                      </a:r>
+                    </a:p>
+                  </a:txBody>
+                  <a:tcPr>
+                    <a:solidFill>
+                      <a:srgbClr val="0C8B96"/>
+                    </a:solidFill>
+                  </a:tcPr>
+                </a:tc>
+              </a:tr>
+              <a:tr h="292608">
+                <a:tc>
+                  <a:txBody>
+                    <a:bodyPr/>
+                    <a:lstStyle/>
+                    <a:p>
+                      <a:r>
+                        <a:rPr sz="1100" b="0">
+                          <a:solidFill>
+                            <a:srgbClr val="2B3A44"/>
+                          </a:solidFill>
+                          <a:latin typeface="Calibri"/>
+                        </a:rPr>
+                        <a:t>unloaded</a:t>
+                      </a:r>
+                    </a:p>
+                  </a:txBody>
+                  <a:tcPr>
+                    <a:solidFill>
+                      <a:srgbClr val="E4F2F4"/>
+                    </a:solidFill>
+                  </a:tcPr>
+                </a:tc>
+                <a:tc>
+                  <a:txBody>
+                    <a:bodyPr/>
+                    <a:lstStyle/>
+                    <a:p>
+                      <a:r>
+                        <a:rPr sz="1100" b="0">
+                          <a:solidFill>
+                            <a:srgbClr val="2B3A44"/>
+                          </a:solidFill>
+                          <a:latin typeface="Calibri"/>
+                        </a:rPr>
+                        <a:t>26 mm</a:t>
+                      </a:r>
+                    </a:p>
+                  </a:txBody>
+                  <a:tcPr>
+                    <a:solidFill>
+                      <a:srgbClr val="E4F2F4"/>
+                    </a:solidFill>
+                  </a:tcPr>
+                </a:tc>
+                <a:tc>
+                  <a:txBody>
+                    <a:bodyPr/>
+                    <a:lstStyle/>
+                    <a:p>
+                      <a:r>
+                        <a:rPr sz="1100" b="0">
+                          <a:solidFill>
+                            <a:srgbClr val="2B3A44"/>
+                          </a:solidFill>
+                          <a:latin typeface="Calibri"/>
+                        </a:rPr>
+                        <a:t>8 / 75</a:t>
+                      </a:r>
+                    </a:p>
+                  </a:txBody>
+                  <a:tcPr>
+                    <a:solidFill>
+                      <a:srgbClr val="E4F2F4"/>
+                    </a:solidFill>
+                  </a:tcPr>
+                </a:tc>
+                <a:tc>
+                  <a:txBody>
+                    <a:bodyPr/>
+                    <a:lstStyle/>
+                    <a:p>
+                      <a:r>
+                        <a:rPr sz="1100" b="0">
+                          <a:solidFill>
+                            <a:srgbClr val="2B3A44"/>
+                          </a:solidFill>
+                          <a:latin typeface="Calibri"/>
+                        </a:rPr>
+                        <a:t>67</a:t>
+                      </a:r>
+                    </a:p>
+                  </a:txBody>
+                  <a:tcPr>
+                    <a:solidFill>
+                      <a:srgbClr val="E4F2F4"/>
+                    </a:solidFill>
+                  </a:tcPr>
+                </a:tc>
+                <a:tc>
+                  <a:txBody>
+                    <a:bodyPr/>
+                    <a:lstStyle/>
+                    <a:p>
+                      <a:r>
+                        <a:rPr sz="1100" b="0">
+                          <a:solidFill>
+                            <a:srgbClr val="2B3A44"/>
+                          </a:solidFill>
+                          <a:latin typeface="Calibri"/>
+                        </a:rPr>
+                        <a:t>691 mm</a:t>
+                      </a:r>
+                    </a:p>
+                  </a:txBody>
+                  <a:tcPr>
+                    <a:solidFill>
+                      <a:srgbClr val="E4F2F4"/>
+                    </a:solidFill>
+                  </a:tcPr>
+                </a:tc>
+                <a:tc>
+                  <a:txBody>
+                    <a:bodyPr/>
+                    <a:lstStyle/>
+                    <a:p>
+                      <a:r>
+                        <a:rPr sz="1100" b="0">
+                          <a:solidFill>
+                            <a:srgbClr val="2B3A44"/>
+                          </a:solidFill>
+                          <a:latin typeface="Calibri"/>
+                        </a:rPr>
+                        <a:t>46 mm</a:t>
+                      </a:r>
+                    </a:p>
+                  </a:txBody>
+                  <a:tcPr>
+                    <a:solidFill>
+                      <a:srgbClr val="E4F2F4"/>
+                    </a:solidFill>
+                  </a:tcPr>
+                </a:tc>
+                <a:tc>
+                  <a:txBody>
+                    <a:bodyPr/>
+                    <a:lstStyle/>
+                    <a:p>
+                      <a:r>
+                        <a:rPr sz="1100" b="0">
+                          <a:solidFill>
+                            <a:srgbClr val="2B3A44"/>
+                          </a:solidFill>
+                          <a:latin typeface="Calibri"/>
+                        </a:rPr>
+                        <a:t>14 / 79</a:t>
+                      </a:r>
+                    </a:p>
+                  </a:txBody>
+                  <a:tcPr>
+                    <a:solidFill>
+                      <a:srgbClr val="E4F2F4"/>
+                    </a:solidFill>
+                  </a:tcPr>
+                </a:tc>
+                <a:tc>
+                  <a:txBody>
+                    <a:bodyPr/>
+                    <a:lstStyle/>
+                    <a:p>
+                      <a:r>
+                        <a:rPr sz="1100" b="0">
+                          <a:solidFill>
+                            <a:srgbClr val="2B3A44"/>
+                          </a:solidFill>
+                          <a:latin typeface="Calibri"/>
+                        </a:rPr>
+                        <a:t>65</a:t>
+                      </a:r>
+                    </a:p>
+                  </a:txBody>
+                  <a:tcPr>
+                    <a:solidFill>
+                      <a:srgbClr val="E4F2F4"/>
+                    </a:solidFill>
+                  </a:tcPr>
+                </a:tc>
+                <a:tc>
+                  <a:txBody>
+                    <a:bodyPr/>
+                    <a:lstStyle/>
+                    <a:p>
+                      <a:r>
+                        <a:rPr sz="1100" b="0">
+                          <a:solidFill>
+                            <a:srgbClr val="2B3A44"/>
+                          </a:solidFill>
+                          <a:latin typeface="Calibri"/>
+                        </a:rPr>
+                        <a:t>671 mm</a:t>
+                      </a:r>
+                    </a:p>
+                  </a:txBody>
+                  <a:tcPr>
+                    <a:solidFill>
+                      <a:srgbClr val="E4F2F4"/>
+                    </a:solidFill>
+                  </a:tcPr>
+                </a:tc>
+              </a:tr>
+              <a:tr h="292608">
+                <a:tc>
+                  <a:txBody>
+                    <a:bodyPr/>
+                    <a:lstStyle/>
+                    <a:p>
+                      <a:r>
+                        <a:rPr sz="1100" b="0">
+                          <a:solidFill>
+                            <a:srgbClr val="2B3A44"/>
+                          </a:solidFill>
+                          <a:latin typeface="Calibri"/>
+                        </a:rPr>
+                        <a:t>payload centred</a:t>
+                      </a:r>
+                    </a:p>
+                  </a:txBody>
+                  <a:tcPr>
+                    <a:solidFill>
+                      <a:srgbClr val="FFFFFF"/>
+                    </a:solidFill>
+                  </a:tcPr>
+                </a:tc>
+                <a:tc>
+                  <a:txBody>
+                    <a:bodyPr/>
+                    <a:lstStyle/>
+                    <a:p>
+                      <a:r>
+                        <a:rPr sz="1100" b="0">
+                          <a:solidFill>
+                            <a:srgbClr val="2B3A44"/>
+                          </a:solidFill>
+                          <a:latin typeface="Calibri"/>
+                        </a:rPr>
+                        <a:t>191 mm</a:t>
+                      </a:r>
+                    </a:p>
+                  </a:txBody>
+                  <a:tcPr>
+                    <a:solidFill>
+                      <a:srgbClr val="FFFFFF"/>
+                    </a:solidFill>
+                  </a:tcPr>
+                </a:tc>
+                <a:tc>
+                  <a:txBody>
+                    <a:bodyPr/>
+                    <a:lstStyle/>
+                    <a:p>
+                      <a:r>
+                        <a:rPr sz="1100" b="0">
+                          <a:solidFill>
+                            <a:srgbClr val="2B3A44"/>
+                          </a:solidFill>
+                          <a:latin typeface="Calibri"/>
+                        </a:rPr>
+                        <a:t>58 / 106</a:t>
+                      </a:r>
+                    </a:p>
+                  </a:txBody>
+                  <a:tcPr>
+                    <a:solidFill>
+                      <a:srgbClr val="FFFFFF"/>
+                    </a:solidFill>
+                  </a:tcPr>
+                </a:tc>
+                <a:tc>
+                  <a:txBody>
+                    <a:bodyPr/>
+                    <a:lstStyle/>
+                    <a:p>
+                      <a:r>
+                        <a:rPr sz="1100" b="0">
+                          <a:solidFill>
+                            <a:srgbClr val="2B3A44"/>
+                          </a:solidFill>
+                          <a:latin typeface="Calibri"/>
+                        </a:rPr>
+                        <a:t>49</a:t>
+                      </a:r>
+                    </a:p>
+                  </a:txBody>
+                  <a:tcPr>
+                    <a:solidFill>
+                      <a:srgbClr val="FFFFFF"/>
+                    </a:solidFill>
+                  </a:tcPr>
+                </a:tc>
+                <a:tc>
+                  <a:txBody>
+                    <a:bodyPr/>
+                    <a:lstStyle/>
+                    <a:p>
+                      <a:r>
+                        <a:rPr sz="1100" b="0">
+                          <a:solidFill>
+                            <a:srgbClr val="2B3A44"/>
+                          </a:solidFill>
+                          <a:latin typeface="Calibri"/>
+                        </a:rPr>
+                        <a:t>526 mm</a:t>
+                      </a:r>
+                    </a:p>
+                  </a:txBody>
+                  <a:tcPr>
+                    <a:solidFill>
+                      <a:srgbClr val="FFFFFF"/>
+                    </a:solidFill>
+                  </a:tcPr>
+                </a:tc>
+                <a:tc>
+                  <a:txBody>
+                    <a:bodyPr/>
+                    <a:lstStyle/>
+                    <a:p>
+                      <a:r>
+                        <a:rPr sz="1100" b="0">
+                          <a:solidFill>
+                            <a:srgbClr val="2B3A44"/>
+                          </a:solidFill>
+                          <a:latin typeface="Calibri"/>
+                        </a:rPr>
+                        <a:t>211 mm</a:t>
+                      </a:r>
+                    </a:p>
+                  </a:txBody>
+                  <a:tcPr>
+                    <a:solidFill>
+                      <a:srgbClr val="FFFFFF"/>
+                    </a:solidFill>
+                  </a:tcPr>
+                </a:tc>
+                <a:tc>
+                  <a:txBody>
+                    <a:bodyPr/>
+                    <a:lstStyle/>
+                    <a:p>
+                      <a:r>
+                        <a:rPr sz="1100" b="0">
+                          <a:solidFill>
+                            <a:srgbClr val="2B3A44"/>
+                          </a:solidFill>
+                          <a:latin typeface="Calibri"/>
+                        </a:rPr>
+                        <a:t>64 / 110</a:t>
+                      </a:r>
+                    </a:p>
+                  </a:txBody>
+                  <a:tcPr>
+                    <a:solidFill>
+                      <a:srgbClr val="FFFFFF"/>
+                    </a:solidFill>
+                  </a:tcPr>
+                </a:tc>
+                <a:tc>
+                  <a:txBody>
+                    <a:bodyPr/>
+                    <a:lstStyle/>
+                    <a:p>
+                      <a:r>
+                        <a:rPr sz="1100" b="0">
+                          <a:solidFill>
+                            <a:srgbClr val="2B3A44"/>
+                          </a:solidFill>
+                          <a:latin typeface="Calibri"/>
+                        </a:rPr>
+                        <a:t>47</a:t>
+                      </a:r>
+                    </a:p>
+                  </a:txBody>
+                  <a:tcPr>
+                    <a:solidFill>
+                      <a:srgbClr val="FFFFFF"/>
+                    </a:solidFill>
+                  </a:tcPr>
+                </a:tc>
+                <a:tc>
+                  <a:txBody>
+                    <a:bodyPr/>
+                    <a:lstStyle/>
+                    <a:p>
+                      <a:r>
+                        <a:rPr sz="1100" b="0">
+                          <a:solidFill>
+                            <a:srgbClr val="2B3A44"/>
+                          </a:solidFill>
+                          <a:latin typeface="Calibri"/>
+                        </a:rPr>
+                        <a:t>506 mm</a:t>
+                      </a:r>
+                    </a:p>
+                  </a:txBody>
+                  <a:tcPr>
+                    <a:solidFill>
+                      <a:srgbClr val="FFFFFF"/>
+                    </a:solidFill>
+                  </a:tcPr>
+                </a:tc>
+              </a:tr>
+              <a:tr h="292608">
+                <a:tc>
+                  <a:txBody>
+                    <a:bodyPr/>
+                    <a:lstStyle/>
+                    <a:p>
+                      <a:r>
+                        <a:rPr sz="1100" b="0">
+                          <a:solidFill>
+                            <a:srgbClr val="2B3A44"/>
+                          </a:solidFill>
+                          <a:latin typeface="Calibri"/>
+                        </a:rPr>
+                        <a:t>10° tilt, loaded side</a:t>
+                      </a:r>
+                    </a:p>
+                  </a:txBody>
+                  <a:tcPr>
+                    <a:solidFill>
+                      <a:srgbClr val="E4F2F4"/>
+                    </a:solidFill>
+                  </a:tcPr>
+                </a:tc>
+                <a:tc>
+                  <a:txBody>
+                    <a:bodyPr/>
+                    <a:lstStyle/>
+                    <a:p>
+                      <a:r>
+                        <a:rPr sz="1100" b="0">
+                          <a:solidFill>
+                            <a:srgbClr val="2B3A44"/>
+                          </a:solidFill>
+                          <a:latin typeface="Calibri"/>
+                        </a:rPr>
+                        <a:t>242 mm</a:t>
+                      </a:r>
+                    </a:p>
+                  </a:txBody>
+                  <a:tcPr>
+                    <a:solidFill>
+                      <a:srgbClr val="E4F2F4"/>
+                    </a:solidFill>
+                  </a:tcPr>
+                </a:tc>
+                <a:tc>
+                  <a:txBody>
+                    <a:bodyPr/>
+                    <a:lstStyle/>
+                    <a:p>
+                      <a:r>
+                        <a:rPr sz="1100" b="0">
+                          <a:solidFill>
+                            <a:srgbClr val="2B3A44"/>
+                          </a:solidFill>
+                          <a:latin typeface="Calibri"/>
+                        </a:rPr>
+                        <a:t>73 / 117</a:t>
+                      </a:r>
+                    </a:p>
+                  </a:txBody>
+                  <a:tcPr>
+                    <a:solidFill>
+                      <a:srgbClr val="E4F2F4"/>
+                    </a:solidFill>
+                  </a:tcPr>
+                </a:tc>
+                <a:tc>
+                  <a:txBody>
+                    <a:bodyPr/>
+                    <a:lstStyle/>
+                    <a:p>
+                      <a:r>
+                        <a:rPr sz="1100" b="0">
+                          <a:solidFill>
+                            <a:srgbClr val="2B3A44"/>
+                          </a:solidFill>
+                          <a:latin typeface="Calibri"/>
+                        </a:rPr>
+                        <a:t>44</a:t>
+                      </a:r>
+                    </a:p>
+                  </a:txBody>
+                  <a:tcPr>
+                    <a:solidFill>
+                      <a:srgbClr val="E4F2F4"/>
+                    </a:solidFill>
+                  </a:tcPr>
+                </a:tc>
+                <a:tc>
+                  <a:txBody>
+                    <a:bodyPr/>
+                    <a:lstStyle/>
+                    <a:p>
+                      <a:r>
+                        <a:rPr sz="1100" b="0">
+                          <a:solidFill>
+                            <a:srgbClr val="2B3A44"/>
+                          </a:solidFill>
+                          <a:latin typeface="Calibri"/>
+                        </a:rPr>
+                        <a:t>475 mm</a:t>
+                      </a:r>
+                    </a:p>
+                  </a:txBody>
+                  <a:tcPr>
+                    <a:solidFill>
+                      <a:srgbClr val="E4F2F4"/>
+                    </a:solidFill>
+                  </a:tcPr>
+                </a:tc>
+                <a:tc>
+                  <a:txBody>
+                    <a:bodyPr/>
+                    <a:lstStyle/>
+                    <a:p>
+                      <a:r>
+                        <a:rPr sz="1100" b="0">
+                          <a:solidFill>
+                            <a:srgbClr val="2B3A44"/>
+                          </a:solidFill>
+                          <a:latin typeface="Calibri"/>
+                        </a:rPr>
+                        <a:t>350 mm</a:t>
+                      </a:r>
+                    </a:p>
+                  </a:txBody>
+                  <a:tcPr>
+                    <a:solidFill>
+                      <a:srgbClr val="E4F2F4"/>
+                    </a:solidFill>
+                  </a:tcPr>
+                </a:tc>
+                <a:tc>
+                  <a:txBody>
+                    <a:bodyPr/>
+                    <a:lstStyle/>
+                    <a:p>
+                      <a:r>
+                        <a:rPr sz="1100" b="0">
+                          <a:solidFill>
+                            <a:srgbClr val="2B3A44"/>
+                          </a:solidFill>
+                          <a:latin typeface="Calibri"/>
+                        </a:rPr>
+                        <a:t>106 / 141</a:t>
+                      </a:r>
+                    </a:p>
+                  </a:txBody>
+                  <a:tcPr>
+                    <a:solidFill>
+                      <a:srgbClr val="E4F2F4"/>
+                    </a:solidFill>
+                  </a:tcPr>
+                </a:tc>
+                <a:tc>
+                  <a:txBody>
+                    <a:bodyPr/>
+                    <a:lstStyle/>
+                    <a:p>
+                      <a:r>
+                        <a:rPr sz="1100" b="0">
+                          <a:solidFill>
+                            <a:srgbClr val="2B3A44"/>
+                          </a:solidFill>
+                          <a:latin typeface="Calibri"/>
+                        </a:rPr>
+                        <a:t>35</a:t>
+                      </a:r>
+                    </a:p>
+                  </a:txBody>
+                  <a:tcPr>
+                    <a:solidFill>
+                      <a:srgbClr val="E4F2F4"/>
+                    </a:solidFill>
+                  </a:tcPr>
+                </a:tc>
+                <a:tc>
+                  <a:txBody>
+                    <a:bodyPr/>
+                    <a:lstStyle/>
+                    <a:p>
+                      <a:r>
+                        <a:rPr sz="1100" b="0">
+                          <a:solidFill>
+                            <a:srgbClr val="2B3A44"/>
+                          </a:solidFill>
+                          <a:latin typeface="Calibri"/>
+                        </a:rPr>
+                        <a:t>367 mm</a:t>
+                      </a:r>
+                    </a:p>
+                  </a:txBody>
+                  <a:tcPr>
+                    <a:solidFill>
+                      <a:srgbClr val="E4F2F4"/>
+                    </a:solidFill>
+                  </a:tcPr>
+                </a:tc>
+              </a:tr>
+              <a:tr h="292608">
+                <a:tc>
+                  <a:txBody>
+                    <a:bodyPr/>
+                    <a:lstStyle/>
+                    <a:p>
+                      <a:r>
+                        <a:rPr sz="1100" b="0">
+                          <a:solidFill>
+                            <a:srgbClr val="2B3A44"/>
+                          </a:solidFill>
+                          <a:latin typeface="Calibri"/>
+                        </a:rPr>
+                        <a:t>10° tilt, other side</a:t>
+                      </a:r>
+                    </a:p>
+                  </a:txBody>
+                  <a:tcPr>
+                    <a:solidFill>
+                      <a:srgbClr val="FFFFFF"/>
+                    </a:solidFill>
+                  </a:tcPr>
+                </a:tc>
+                <a:tc>
+                  <a:txBody>
+                    <a:bodyPr/>
+                    <a:lstStyle/>
+                    <a:p>
+                      <a:r>
+                        <a:rPr sz="1100" b="0">
+                          <a:solidFill>
+                            <a:srgbClr val="2B3A44"/>
+                          </a:solidFill>
+                          <a:latin typeface="Calibri"/>
+                        </a:rPr>
+                        <a:t>140 mm</a:t>
+                      </a:r>
+                    </a:p>
+                  </a:txBody>
+                  <a:tcPr>
+                    <a:solidFill>
+                      <a:srgbClr val="FFFFFF"/>
+                    </a:solidFill>
+                  </a:tcPr>
+                </a:tc>
+                <a:tc>
+                  <a:txBody>
+                    <a:bodyPr/>
+                    <a:lstStyle/>
+                    <a:p>
+                      <a:r>
+                        <a:rPr sz="1100" b="0">
+                          <a:solidFill>
+                            <a:srgbClr val="2B3A44"/>
+                          </a:solidFill>
+                          <a:latin typeface="Calibri"/>
+                        </a:rPr>
+                        <a:t>42 / 96</a:t>
+                      </a:r>
+                    </a:p>
+                  </a:txBody>
+                  <a:tcPr>
+                    <a:solidFill>
+                      <a:srgbClr val="FFFFFF"/>
+                    </a:solidFill>
+                  </a:tcPr>
+                </a:tc>
+                <a:tc>
+                  <a:txBody>
+                    <a:bodyPr/>
+                    <a:lstStyle/>
+                    <a:p>
+                      <a:r>
+                        <a:rPr sz="1100" b="0">
+                          <a:solidFill>
+                            <a:srgbClr val="2B3A44"/>
+                          </a:solidFill>
+                          <a:latin typeface="Calibri"/>
+                        </a:rPr>
+                        <a:t>54</a:t>
+                      </a:r>
+                    </a:p>
+                  </a:txBody>
+                  <a:tcPr>
+                    <a:solidFill>
+                      <a:srgbClr val="FFFFFF"/>
+                    </a:solidFill>
+                  </a:tcPr>
+                </a:tc>
+                <a:tc>
+                  <a:txBody>
+                    <a:bodyPr/>
+                    <a:lstStyle/>
+                    <a:p>
+                      <a:r>
+                        <a:rPr sz="1100" b="0">
+                          <a:solidFill>
+                            <a:srgbClr val="2B3A44"/>
+                          </a:solidFill>
+                          <a:latin typeface="Calibri"/>
+                        </a:rPr>
+                        <a:t>577 mm</a:t>
+                      </a:r>
+                    </a:p>
+                  </a:txBody>
+                  <a:tcPr>
+                    <a:solidFill>
+                      <a:srgbClr val="FFFFFF"/>
+                    </a:solidFill>
+                  </a:tcPr>
+                </a:tc>
+                <a:tc>
+                  <a:txBody>
+                    <a:bodyPr/>
+                    <a:lstStyle/>
+                    <a:p>
+                      <a:r>
+                        <a:rPr sz="1100" b="0">
+                          <a:solidFill>
+                            <a:srgbClr val="2B3A44"/>
+                          </a:solidFill>
+                          <a:latin typeface="Calibri"/>
+                        </a:rPr>
+                        <a:t>72 mm</a:t>
+                      </a:r>
+                    </a:p>
+                  </a:txBody>
+                  <a:tcPr>
+                    <a:solidFill>
+                      <a:srgbClr val="FFFFFF"/>
+                    </a:solidFill>
+                  </a:tcPr>
+                </a:tc>
+                <a:tc>
+                  <a:txBody>
+                    <a:bodyPr/>
+                    <a:lstStyle/>
+                    <a:p>
+                      <a:r>
+                        <a:rPr sz="1100" b="0">
+                          <a:solidFill>
+                            <a:srgbClr val="2B3A44"/>
+                          </a:solidFill>
+                          <a:latin typeface="Calibri"/>
+                        </a:rPr>
+                        <a:t>22 / 83</a:t>
+                      </a:r>
+                    </a:p>
+                  </a:txBody>
+                  <a:tcPr>
+                    <a:solidFill>
+                      <a:srgbClr val="FFFFFF"/>
+                    </a:solidFill>
+                  </a:tcPr>
+                </a:tc>
+                <a:tc>
+                  <a:txBody>
+                    <a:bodyPr/>
+                    <a:lstStyle/>
+                    <a:p>
+                      <a:r>
+                        <a:rPr sz="1100" b="0">
+                          <a:solidFill>
+                            <a:srgbClr val="2B3A44"/>
+                          </a:solidFill>
+                          <a:latin typeface="Calibri"/>
+                        </a:rPr>
+                        <a:t>62</a:t>
+                      </a:r>
+                    </a:p>
+                  </a:txBody>
+                  <a:tcPr>
+                    <a:solidFill>
+                      <a:srgbClr val="FFFFFF"/>
+                    </a:solidFill>
+                  </a:tcPr>
+                </a:tc>
+                <a:tc>
+                  <a:txBody>
+                    <a:bodyPr/>
+                    <a:lstStyle/>
+                    <a:p>
+                      <a:r>
+                        <a:rPr sz="1100" b="0">
+                          <a:solidFill>
+                            <a:srgbClr val="2B3A44"/>
+                          </a:solidFill>
+                          <a:latin typeface="Calibri"/>
+                        </a:rPr>
+                        <a:t>645 mm</a:t>
+                      </a:r>
+                    </a:p>
+                  </a:txBody>
+                  <a:tcPr>
+                    <a:solidFill>
+                      <a:srgbClr val="FFFFFF"/>
+                    </a:solidFill>
+                  </a:tcPr>
+                </a:tc>
+              </a:tr>
+            </a:tbl>
+          </a:graphicData>
+        </a:graphic>
+      </p:graphicFrame>
+    </p:spTree>
+  </p:cSld>
+  <p:clrMapOvr>
+    <a:masterClrMapping/>
+  </p:clrMapOvr>
+</p:sld>
+</file>
+
+<file path=ppt/slides/slide17.xml><?xml version="1.0" encoding="utf-8"?>
+<p:sld xmlns:a="http://schemas.openxmlformats.org/drawingml/2006/main" xmlns:p="http://schemas.openxmlformats.org/presentationml/2006/main" xmlns:r="http://schemas.openxmlformats.org/officeDocument/2006/relationships">
+  <p:cSld>
+    <p:bg>
+      <p:bgPr>
+        <a:solidFill>
+          <a:srgbClr val="FFFFFF"/>
+        </a:solidFill>
+        <a:effectLst/>
+      </p:bgPr>
+    </p:bg>
+    <p:spTree>
+      <p:nvGrpSpPr>
+        <p:cNvPr id="1" name=""/>
+        <p:cNvGrpSpPr/>
+        <p:nvPr/>
+      </p:nvGrpSpPr>
+      <p:grpSpPr/>
+      <p:sp>
+        <p:nvSpPr>
+          <p:cNvPr id="2" name="TextBox 1"/>
+          <p:cNvSpPr txBox="1"/>
+          <p:nvPr/>
+        </p:nvSpPr>
+        <p:spPr>
+          <a:xfrm>
+            <a:off x="548640" y="347472"/>
+            <a:ext cx="11064240" cy="685800"/>
+          </a:xfrm>
+          <a:prstGeom prst="rect">
+            <a:avLst/>
+          </a:prstGeom>
+          <a:noFill/>
+        </p:spPr>
+        <p:txBody>
+          <a:bodyPr wrap="square" anchor="t" lIns="0" rIns="0">
+            <a:spAutoFit/>
+          </a:bodyPr>
+          <a:lstStyle/>
+          <a:p>
+            <a:pPr algn="l">
+              <a:spcAft>
+                <a:spcPts val="600"/>
+              </a:spcAft>
+            </a:pPr>
+            <a:r>
+              <a:rPr sz="3200" b="1" i="0">
+                <a:solidFill>
+                  <a:srgbClr val="14232E"/>
+                </a:solidFill>
+                <a:latin typeface="Calibri"/>
+              </a:rPr>
+              <a:t>Appendix: FloatSim's small-rotation limit at the pins</a:t>
+            </a:r>
+          </a:p>
+        </p:txBody>
+      </p:sp>
+      <p:sp>
+        <p:nvSpPr>
+          <p:cNvPr id="3" name="TextBox 2"/>
+          <p:cNvSpPr txBox="1"/>
+          <p:nvPr/>
+        </p:nvSpPr>
+        <p:spPr>
+          <a:xfrm>
+            <a:off x="548640" y="987552"/>
+            <a:ext cx="11064240" cy="411480"/>
+          </a:xfrm>
+          <a:prstGeom prst="rect">
+            <a:avLst/>
+          </a:prstGeom>
+          <a:noFill/>
+        </p:spPr>
+        <p:txBody>
+          <a:bodyPr wrap="square" anchor="t" lIns="0" rIns="0">
+            <a:spAutoFit/>
+          </a:bodyPr>
+          <a:lstStyle/>
+          <a:p>
+            <a:pPr algn="l">
+              <a:spcAft>
+                <a:spcPts val="600"/>
+              </a:spcAft>
+            </a:pPr>
+            <a:r>
+              <a:rPr sz="1600" b="0" i="0">
+                <a:solidFill>
+                  <a:srgbClr val="5C6B75"/>
+                </a:solidFill>
+                <a:latin typeface="Calibri"/>
+              </a:rPr>
+              <a:t>Linear about each equilibrium: rotations, including each buoy's rotation on its pin, must stay below ~0.1 rad (5.7°)</a:t>
+            </a:r>
+          </a:p>
+        </p:txBody>
+      </p:sp>
+      <p:graphicFrame>
+        <p:nvGraphicFramePr>
+          <p:cNvPr id="4" name="Table 3"/>
+          <p:cNvGraphicFramePr>
+            <a:graphicFrameLocks noGrp="1"/>
+          </p:cNvGraphicFramePr>
+          <p:nvPr/>
+        </p:nvGraphicFramePr>
+        <p:xfrm>
+          <a:off x="457200" y="1463040"/>
+          <a:ext cx="6675120" cy="2651760"/>
+        </p:xfrm>
+        <a:graphic>
+          <a:graphicData uri="http://schemas.openxmlformats.org/drawingml/2006/table">
+            <a:tbl>
+              <a:tblPr firstRow="1" bandRow="1">
+                <a:tableStyleId>{5C22544A-7EE6-4342-B048-85BDC9FD1C3A}</a:tableStyleId>
+              </a:tblPr>
+              <a:tblGrid>
+                <a:gridCol w="2651760"/>
+                <a:gridCol w="1097280"/>
+                <a:gridCol w="2926080"/>
+              </a:tblGrid>
+              <a:tr h="530352">
+                <a:tc>
+                  <a:txBody>
+                    <a:bodyPr/>
+                    <a:lstStyle/>
+                    <a:p>
+                      <a:r>
+                        <a:rPr sz="1200" b="1">
+                          <a:solidFill>
+                            <a:srgbClr val="FFFFFF"/>
+                          </a:solidFill>
+                          <a:latin typeface="Calibri"/>
+                        </a:rPr>
+                        <a:t>Motion</a:t>
+                      </a:r>
+                    </a:p>
+                  </a:txBody>
+                  <a:tcPr>
+                    <a:solidFill>
+                      <a:srgbClr val="0C8B96"/>
+                    </a:solidFill>
+                  </a:tcPr>
+                </a:tc>
+                <a:tc>
+                  <a:txBody>
+                    <a:bodyPr/>
+                    <a:lstStyle/>
+                    <a:p>
+                      <a:r>
+                        <a:rPr sz="1200" b="1">
+                          <a:solidFill>
+                            <a:srgbClr val="FFFFFF"/>
+                          </a:solidFill>
+                          <a:latin typeface="Calibri"/>
+                        </a:rPr>
+                        <a:t>Largest here</a:t>
+                      </a:r>
+                    </a:p>
+                  </a:txBody>
+                  <a:tcPr>
+                    <a:solidFill>
+                      <a:srgbClr val="0C8B96"/>
+                    </a:solidFill>
+                  </a:tcPr>
+                </a:tc>
+                <a:tc>
+                  <a:txBody>
+                    <a:bodyPr/>
+                    <a:lstStyle/>
+                    <a:p>
+                      <a:r>
+                        <a:rPr sz="1200" b="1">
+                          <a:solidFill>
+                            <a:srgbClr val="FFFFFF"/>
+                          </a:solidFill>
+                          <a:latin typeface="Calibri"/>
+                        </a:rPr>
+                        <a:t>Within ~5.7°?</a:t>
+                      </a:r>
+                    </a:p>
+                  </a:txBody>
+                  <a:tcPr>
+                    <a:solidFill>
+                      <a:srgbClr val="0C8B96"/>
+                    </a:solidFill>
+                  </a:tcPr>
+                </a:tc>
+              </a:tr>
+              <a:tr h="530352">
+                <a:tc>
+                  <a:txBody>
+                    <a:bodyPr/>
+                    <a:lstStyle/>
+                    <a:p>
+                      <a:r>
+                        <a:rPr sz="1200" b="0">
+                          <a:solidFill>
+                            <a:srgbClr val="2B3A44"/>
+                          </a:solidFill>
+                          <a:latin typeface="Calibri"/>
+                        </a:rPr>
+                        <a:t>Static tilt of the hub / deck (5°, 10°)</a:t>
+                      </a:r>
+                    </a:p>
+                  </a:txBody>
+                  <a:tcPr>
+                    <a:solidFill>
+                      <a:srgbClr val="E4F2F4"/>
+                    </a:solidFill>
+                  </a:tcPr>
+                </a:tc>
+                <a:tc>
+                  <a:txBody>
+                    <a:bodyPr/>
+                    <a:lstStyle/>
+                    <a:p>
+                      <a:r>
+                        <a:rPr sz="1200" b="0">
+                          <a:solidFill>
+                            <a:srgbClr val="2B3A44"/>
+                          </a:solidFill>
+                          <a:latin typeface="Calibri"/>
+                        </a:rPr>
+                        <a:t>10°</a:t>
+                      </a:r>
+                    </a:p>
+                  </a:txBody>
+                  <a:tcPr>
+                    <a:solidFill>
+                      <a:srgbClr val="E4F2F4"/>
+                    </a:solidFill>
+                  </a:tcPr>
+                </a:tc>
+                <a:tc>
+                  <a:txBody>
+                    <a:bodyPr/>
+                    <a:lstStyle/>
+                    <a:p>
+                      <a:r>
+                        <a:rPr sz="1200" b="0">
+                          <a:solidFill>
+                            <a:srgbClr val="2B3A44"/>
+                          </a:solidFill>
+                          <a:latin typeface="Calibri"/>
+                        </a:rPr>
+                        <a:t>not needed: each case is built about its own tilted equilibrium (BEM re-run there)</a:t>
+                      </a:r>
+                    </a:p>
+                  </a:txBody>
+                  <a:tcPr>
+                    <a:solidFill>
+                      <a:srgbClr val="E4F2F4"/>
+                    </a:solidFill>
+                  </a:tcPr>
+                </a:tc>
+              </a:tr>
+              <a:tr h="530352">
+                <a:tc>
+                  <a:txBody>
+                    <a:bodyPr/>
+                    <a:lstStyle/>
+                    <a:p>
+                      <a:r>
+                        <a:rPr sz="1200" b="0">
+                          <a:solidFill>
+                            <a:srgbClr val="2B3A44"/>
+                          </a:solidFill>
+                          <a:latin typeface="Calibri"/>
+                        </a:rPr>
+                        <a:t>Hub / deck pitch in the waves</a:t>
+                      </a:r>
+                    </a:p>
+                  </a:txBody>
+                  <a:tcPr>
+                    <a:solidFill>
+                      <a:srgbClr val="FFFFFF"/>
+                    </a:solidFill>
+                  </a:tcPr>
+                </a:tc>
+                <a:tc>
+                  <a:txBody>
+                    <a:bodyPr/>
+                    <a:lstStyle/>
+                    <a:p>
+                      <a:r>
+                        <a:rPr sz="1200" b="0">
+                          <a:solidFill>
+                            <a:srgbClr val="2B3A44"/>
+                          </a:solidFill>
+                          <a:latin typeface="Calibri"/>
+                        </a:rPr>
+                        <a:t>3.8°</a:t>
+                      </a:r>
+                    </a:p>
+                  </a:txBody>
+                  <a:tcPr>
+                    <a:solidFill>
+                      <a:srgbClr val="FFFFFF"/>
+                    </a:solidFill>
+                  </a:tcPr>
+                </a:tc>
+                <a:tc>
+                  <a:txBody>
+                    <a:bodyPr/>
+                    <a:lstStyle/>
+                    <a:p>
+                      <a:r>
+                        <a:rPr sz="1200" b="0">
+                          <a:solidFill>
+                            <a:srgbClr val="2B3A44"/>
+                          </a:solidFill>
+                          <a:latin typeface="Calibri"/>
+                        </a:rPr>
+                        <a:t>yes</a:t>
+                      </a:r>
+                    </a:p>
+                  </a:txBody>
+                  <a:tcPr>
+                    <a:solidFill>
+                      <a:srgbClr val="FFFFFF"/>
+                    </a:solidFill>
+                  </a:tcPr>
+                </a:tc>
+              </a:tr>
+              <a:tr h="530352">
+                <a:tc>
+                  <a:txBody>
+                    <a:bodyPr/>
+                    <a:lstStyle/>
+                    <a:p>
+                      <a:r>
+                        <a:rPr sz="1200" b="0">
+                          <a:solidFill>
+                            <a:srgbClr val="2B3A44"/>
+                          </a:solidFill>
+                          <a:latin typeface="Calibri"/>
+                        </a:rPr>
+                        <a:t>Pin motion relative to the water</a:t>
+                      </a:r>
+                    </a:p>
+                  </a:txBody>
+                  <a:tcPr>
+                    <a:solidFill>
+                      <a:srgbClr val="E4F2F4"/>
+                    </a:solidFill>
+                  </a:tcPr>
+                </a:tc>
+                <a:tc>
+                  <a:txBody>
+                    <a:bodyPr/>
+                    <a:lstStyle/>
+                    <a:p>
+                      <a:r>
+                        <a:rPr sz="1200" b="0">
+                          <a:solidFill>
+                            <a:srgbClr val="2B3A44"/>
+                          </a:solidFill>
+                          <a:latin typeface="Calibri"/>
+                        </a:rPr>
+                        <a:t>84 mm</a:t>
+                      </a:r>
+                    </a:p>
+                  </a:txBody>
+                  <a:tcPr>
+                    <a:solidFill>
+                      <a:srgbClr val="E4F2F4"/>
+                    </a:solidFill>
+                  </a:tcPr>
+                </a:tc>
+                <a:tc>
+                  <a:txBody>
+                    <a:bodyPr/>
+                    <a:lstStyle/>
+                    <a:p>
+                      <a:r>
+                        <a:rPr sz="1200" b="0">
+                          <a:solidFill>
+                            <a:srgbClr val="2B3A44"/>
+                          </a:solidFill>
+                          <a:latin typeface="Calibri"/>
+                        </a:rPr>
+                        <a:t>yes (small against the spar)</a:t>
+                      </a:r>
+                    </a:p>
+                  </a:txBody>
+                  <a:tcPr>
+                    <a:solidFill>
+                      <a:srgbClr val="E4F2F4"/>
+                    </a:solidFill>
+                  </a:tcPr>
+                </a:tc>
+              </a:tr>
+              <a:tr h="530352">
+                <a:tc>
+                  <a:txBody>
+                    <a:bodyPr/>
+                    <a:lstStyle/>
+                    <a:p>
+                      <a:r>
+                        <a:rPr sz="1200" b="0">
+                          <a:solidFill>
+                            <a:srgbClr val="2B3A44"/>
+                          </a:solidFill>
+                          <a:latin typeface="Calibri"/>
+                        </a:rPr>
+                        <a:t>Buoys rocking on their pins (gimbals), 4.2 s</a:t>
+                      </a:r>
+                    </a:p>
+                  </a:txBody>
+                  <a:tcPr>
+                    <a:solidFill>
+                      <a:srgbClr val="FFFFFF"/>
+                    </a:solidFill>
+                  </a:tcPr>
+                </a:tc>
+                <a:tc>
+                  <a:txBody>
+                    <a:bodyPr/>
+                    <a:lstStyle/>
+                    <a:p>
+                      <a:r>
+                        <a:rPr sz="1200" b="0">
+                          <a:solidFill>
+                            <a:srgbClr val="2B3A44"/>
+                          </a:solidFill>
+                          <a:latin typeface="Calibri"/>
+                        </a:rPr>
+                        <a:t>12.6°</a:t>
+                      </a:r>
+                    </a:p>
+                  </a:txBody>
+                  <a:tcPr>
+                    <a:solidFill>
+                      <a:srgbClr val="FFFFFF"/>
+                    </a:solidFill>
+                  </a:tcPr>
+                </a:tc>
+                <a:tc>
+                  <a:txBody>
+                    <a:bodyPr/>
+                    <a:lstStyle/>
+                    <a:p>
+                      <a:r>
+                        <a:rPr sz="1200" b="0">
+                          <a:solidFill>
+                            <a:srgbClr val="2B3A44"/>
+                          </a:solidFill>
+                          <a:latin typeface="Calibri"/>
+                        </a:rPr>
+                        <a:t>no: ~2.2× the limit</a:t>
+                      </a:r>
+                    </a:p>
+                  </a:txBody>
+                  <a:tcPr>
+                    <a:solidFill>
+                      <a:srgbClr val="FFFFFF"/>
+                    </a:solidFill>
+                  </a:tcPr>
+                </a:tc>
+              </a:tr>
+            </a:tbl>
+          </a:graphicData>
+        </a:graphic>
+      </p:graphicFrame>
+      <p:sp>
+        <p:nvSpPr>
+          <p:cNvPr id="5" name="TextBox 4"/>
+          <p:cNvSpPr txBox="1"/>
+          <p:nvPr/>
+        </p:nvSpPr>
+        <p:spPr>
+          <a:xfrm>
+            <a:off x="457200" y="4343400"/>
+            <a:ext cx="6675120" cy="2286000"/>
+          </a:xfrm>
+          <a:prstGeom prst="rect">
+            <a:avLst/>
+          </a:prstGeom>
+          <a:noFill/>
+        </p:spPr>
+        <p:txBody>
+          <a:bodyPr wrap="square" anchor="t" lIns="0" rIns="0">
+            <a:spAutoFit/>
+          </a:bodyPr>
+          <a:lstStyle/>
+          <a:p>
+            <a:pPr algn="l">
+              <a:spcAft>
+                <a:spcPts val="700"/>
+              </a:spcAft>
+            </a:pPr>
+            <a:r>
+              <a:rPr sz="1300" b="1" i="0">
+                <a:solidFill>
+                  <a:srgbClr val="2B3A44"/>
+                </a:solidFill>
+                <a:latin typeface="Calibri"/>
+              </a:rPr>
+              <a:t>What FloatSim linearises: </a:t>
+            </a:r>
+            <a:r>
+              <a:rPr sz="1300" b="0" i="0">
+                <a:solidFill>
+                  <a:srgbClr val="2B3A44"/>
+                </a:solidFill>
+                <a:latin typeface="Calibri"/>
+              </a:rPr>
+              <a:t>the rotations (small-angle, rotation vector); the hydrostatic restoring (a fixed matrix at the BEM draft); the wave forces (at the mean position); the pin load's tipping (P L θ, not P L sin θ); the gimbals' yaw lock (first order in the relative angle).</a:t>
+            </a:r>
+          </a:p>
+          <a:p>
+            <a:pPr algn="l">
+              <a:spcAft>
+                <a:spcPts val="700"/>
+              </a:spcAft>
+            </a:pPr>
+            <a:r>
+              <a:rPr sz="1300" b="1" i="0">
+                <a:solidFill>
+                  <a:srgbClr val="2B3A44"/>
+                </a:solidFill>
+                <a:latin typeface="Calibri"/>
+              </a:rPr>
+              <a:t>What it keeps exact: </a:t>
+            </a:r>
+            <a:r>
+              <a:rPr sz="1300" b="0" i="0">
+                <a:solidFill>
+                  <a:srgbClr val="2B3A44"/>
+                </a:solidFill>
+                <a:latin typeface="Calibri"/>
+              </a:rPr>
+              <a:t>where the pins are (the joint arms rotate with the bodies) and the drag (non-linear, relative to the waves).</a:t>
+            </a:r>
+          </a:p>
+        </p:txBody>
+      </p:sp>
+      <p:sp>
+        <p:nvSpPr>
+          <p:cNvPr id="6" name="Rounded Rectangle 5"/>
+          <p:cNvSpPr/>
+          <p:nvPr/>
+        </p:nvSpPr>
+        <p:spPr>
+          <a:xfrm>
+            <a:off x="7406640" y="1463040"/>
+            <a:ext cx="4297680" cy="5120640"/>
+          </a:xfrm>
+          <a:prstGeom prst="roundRect">
+            <a:avLst>
+              <a:gd name="adj" fmla="val 6000"/>
+            </a:avLst>
+          </a:prstGeom>
+          <a:solidFill>
+            <a:srgbClr val="F6EEE8"/>
+          </a:solidFill>
+          <a:ln>
+            <a:noFill/>
+          </a:ln>
+          <a:effectLst/>
+        </p:spPr>
+        <p:style>
+          <a:lnRef idx="1">
+            <a:schemeClr val="accent1"/>
+          </a:lnRef>
+          <a:fillRef idx="3">
+            <a:schemeClr val="accent1"/>
+          </a:fillRef>
+          <a:effectRef idx="2">
+            <a:schemeClr val="accent1"/>
+          </a:effectRef>
+          <a:fontRef idx="minor">
+            <a:schemeClr val="lt1"/>
+          </a:fontRef>
+        </p:style>
+        <p:txBody>
+          <a:bodyPr rtlCol="0" anchor="ctr"/>
+          <a:lstStyle/>
+          <a:p>
+            <a:pPr algn="ctr"/>
+          </a:p>
+        </p:txBody>
+      </p:sp>
+      <p:sp>
+        <p:nvSpPr>
+          <p:cNvPr id="7" name="TextBox 6"/>
+          <p:cNvSpPr txBox="1"/>
+          <p:nvPr/>
+        </p:nvSpPr>
+        <p:spPr>
+          <a:xfrm>
+            <a:off x="7635240" y="1600200"/>
+            <a:ext cx="3886200" cy="457200"/>
+          </a:xfrm>
+          <a:prstGeom prst="rect">
+            <a:avLst/>
+          </a:prstGeom>
+          <a:noFill/>
+        </p:spPr>
+        <p:txBody>
+          <a:bodyPr wrap="square" anchor="t" lIns="0" rIns="0">
+            <a:spAutoFit/>
+          </a:bodyPr>
+          <a:lstStyle/>
+          <a:p>
+            <a:pPr algn="l">
+              <a:spcAft>
+                <a:spcPts val="600"/>
+              </a:spcAft>
+            </a:pPr>
+            <a:r>
+              <a:rPr sz="1800" b="1" i="0">
+                <a:solidFill>
+                  <a:srgbClr val="B2432C"/>
+                </a:solidFill>
+                <a:latin typeface="Calibri"/>
+              </a:rPr>
+              <a:t>At 12.6° of rocking</a:t>
+            </a:r>
+          </a:p>
+        </p:txBody>
+      </p:sp>
+      <p:sp>
+        <p:nvSpPr>
+          <p:cNvPr id="8" name="TextBox 7"/>
+          <p:cNvSpPr txBox="1"/>
+          <p:nvPr/>
+        </p:nvSpPr>
+        <p:spPr>
+          <a:xfrm>
+            <a:off x="7635240" y="2103120"/>
+            <a:ext cx="3886200" cy="4389120"/>
+          </a:xfrm>
+          <a:prstGeom prst="rect">
+            <a:avLst/>
+          </a:prstGeom>
+          <a:noFill/>
+        </p:spPr>
+        <p:txBody>
+          <a:bodyPr wrap="square" anchor="t" lIns="0" rIns="0">
+            <a:spAutoFit/>
+          </a:bodyPr>
+          <a:lstStyle/>
+          <a:p>
+            <a:pPr algn="l">
+              <a:spcAft>
+                <a:spcPts val="800"/>
+              </a:spcAft>
+            </a:pPr>
+            <a:r>
+              <a:rPr sz="1300" b="1" i="0">
+                <a:solidFill>
+                  <a:srgbClr val="2B3A44"/>
+                </a:solidFill>
+                <a:latin typeface="Calibri"/>
+              </a:rPr>
+              <a:t>Geometry: small error. </a:t>
+            </a:r>
+            <a:r>
+              <a:rPr sz="1300" b="0" i="0">
+                <a:solidFill>
+                  <a:srgbClr val="2B3A44"/>
+                </a:solidFill>
+                <a:latin typeface="Calibri"/>
+              </a:rPr>
+              <a:t>sin θ / θ = 0.992; the pin drops L(1 − cos θ) = 39 mm, which the exact pin positions already carry.</a:t>
+            </a:r>
+          </a:p>
+          <a:p>
+            <a:pPr algn="l">
+              <a:spcAft>
+                <a:spcPts val="800"/>
+              </a:spcAft>
+            </a:pPr>
+            <a:r>
+              <a:rPr sz="1300" b="1" i="0">
+                <a:solidFill>
+                  <a:srgbClr val="2B3A44"/>
+                </a:solidFill>
+                <a:latin typeface="Calibri"/>
+              </a:rPr>
+              <a:t>Damping: the real uncertainty. </a:t>
+            </a:r>
+            <a:r>
+              <a:rPr sz="1300" b="0" i="0">
+                <a:solidFill>
+                  <a:srgbClr val="2B3A44"/>
+                </a:solidFill>
+                <a:latin typeface="Calibri"/>
+              </a:rPr>
+              <a:t>The amplitude at resonance is set by the drag and the perforated heave plate, whose damping is still to be measured in the tank.</a:t>
+            </a:r>
+          </a:p>
+          <a:p>
+            <a:pPr algn="l">
+              <a:spcAft>
+                <a:spcPts val="800"/>
+              </a:spcAft>
+            </a:pPr>
+            <a:r>
+              <a:rPr sz="1300" b="1" i="0">
+                <a:solidFill>
+                  <a:srgbClr val="2B3A44"/>
+                </a:solidFill>
+                <a:latin typeface="Calibri"/>
+              </a:rPr>
+              <a:t>Not modelled: </a:t>
+            </a:r>
+            <a:r>
+              <a:rPr sz="1300" b="0" i="0">
+                <a:solidFill>
+                  <a:srgbClr val="2B3A44"/>
+                </a:solidFill>
+                <a:latin typeface="Calibri"/>
+              </a:rPr>
+              <a:t>the gimbals' travel and any stops; a non-linear (Level 2) FloatSim, tracked as LEVEL2-INTEGRATOR-UNWIRED.</a:t>
+            </a:r>
+          </a:p>
+          <a:p>
+            <a:pPr algn="l">
+              <a:spcAft>
+                <a:spcPts val="800"/>
+              </a:spcAft>
+            </a:pPr>
+            <a:r>
+              <a:rPr sz="1300" b="1" i="0">
+                <a:solidFill>
+                  <a:srgbClr val="B2432C"/>
+                </a:solidFill>
+                <a:latin typeface="Calibri"/>
+              </a:rPr>
+              <a:t>So: </a:t>
+            </a:r>
+            <a:r>
+              <a:rPr sz="1300" b="0" i="0">
+                <a:solidFill>
+                  <a:srgbClr val="B2432C"/>
+                </a:solidFill>
+                <a:latin typeface="Calibri"/>
+              </a:rPr>
+              <a:t>the resonance period (~4.2 s) stands; read the 11–12.6° as indicative, and confirm with a rocking decay in the tank.</a:t>
+            </a:r>
+          </a:p>
+        </p:txBody>
+      </p:sp>
+    </p:spTree>
+  </p:cSld>
+  <p:clrMapOvr>
+    <a:masterClrMapping/>
+  </p:clrMapOvr>
+</p:sld>
+</file>
+
 <file path=ppt/slides/slide2.xml><?xml version="1.0" encoding="utf-8"?>
 <p:sld xmlns:a="http://schemas.openxmlformats.org/drawingml/2006/main" xmlns:p="http://schemas.openxmlformats.org/presentationml/2006/main" xmlns:r="http://schemas.openxmlformats.org/officeDocument/2006/relationships">
   <p:cSld>

--- a/studies/payload-stability/Payload_tilt_in_waves.pptx
+++ b/studies/payload-stability/Payload_tilt_in_waves.pptx
@@ -22,6 +22,8 @@
     <p:sldId id="270" r:id="rId22"/>
     <p:sldId id="271" r:id="rId23"/>
     <p:sldId id="272" r:id="rId24"/>
+    <p:sldId id="273" r:id="rId25"/>
+    <p:sldId id="274" r:id="rId26"/>
   </p:sldIdLst>
   <p:sldSz cx="12191695" cy="6858000" type="screen4x3"/>
   <p:notesSz cx="6858000" cy="9144000"/>
@@ -8150,7 +8152,7 @@
           <a:lstStyle/>
           <a:p>
             <a:r>
-              <a:t>Accelerations at the payload, where it sits in each case. Vertical first: small on both articles, at most about four hundredths of g, peaking near the heave resonance around 2.65 s. The payload's mass lowers them a little and the tilt hardly changes them.</a:t>
+              <a:t>At 2.65 s the whole article heaves and pitches about its 10 degree tilt. The buoys hang nearly straight below their pins: this is the resonance of the article as a whole, where the tilted payload turns heave into pitch and the lowest pins come closest to the water. True scale, real time; the animations play in slide show.</a:t>
             </a:r>
           </a:p>
         </p:txBody>
@@ -8220,7 +8222,7 @@
           <a:lstStyle/>
           <a:p>
             <a:r>
-              <a:t>Lateral acceleration, horizontal along the waves, as the payload feels it: the deck's motion plus gravity swinging along the deck as it pitches. The platform is much calmer in short waves because its 2.4 m span averages them out. Near the heave resonance the tilt adds lateral load through the coupled pitch. And at 4.2 s, with a payload, both feel about half a metre per second squared: the buoys rocking on their gimbals make the hub or deck slide along the waves.</a:t>
+              <a:t>At 4.2 s the article as a whole barely pitches, but the buoys swing together on their pins while the hub or deck slides back and forth along the waves on top of them. This is the loaded buoys' rocking resonance, the one the weight preload revealed. True scale, real time; the animations play in slide show.</a:t>
             </a:r>
           </a:p>
         </p:txBody>
@@ -8290,7 +8292,7 @@
           <a:lstStyle/>
           <a:p>
             <a:r>
-              <a:t>For the payload's lateral restraint, the static tilt is the biggest load. Tilted 10 degrees, the payload feels a constant 1.7 metres per second squared along the deck from gravity alone, about 0.17 g, before any wave. The waves add at most about 0.8 on top, for a total of about a quarter of g at H = 0.1 m.</a:t>
+              <a:t>Accelerations at the payload, where it sits in each case. Vertical first: small on both articles, at most about four hundredths of g, peaking near the heave resonance around 2.65 s. The payload's mass lowers them a little and the tilt hardly changes them.</a:t>
             </a:r>
           </a:p>
         </p:txBody>
@@ -8360,7 +8362,7 @@
           <a:lstStyle/>
           <a:p>
             <a:r>
-              <a:t>Wouldn't each buoy rock at its own period once the load is shifted? On its own, yes: at 10 degrees the cluster's loaded pair is softer and would rock at about 4.45 seconds, the other pair at about 4.0. But they all hang from the same hub. In the mode the waves drive, every buoy leans the same way while the hub slides under them, so they rock together at one period, set by the sum of their stiffnesses. Shifting the payload softens one side and stiffens the other by almost the same amount, so the sum, and the period, hardly change.</a:t>
+              <a:t>Lateral acceleration, horizontal along the waves, as the payload feels it: the deck's motion plus gravity swinging along the deck as it pitches. The platform is much calmer in short waves because its 2.4 m span averages them out. Near the heave resonance the tilt adds lateral load through the coupled pitch. And at 4.2 s, with a payload, both feel about half a metre per second squared: the buoys rocking on their gimbals make the hub or deck slide along the waves.</a:t>
             </a:r>
           </a:p>
         </p:txBody>
@@ -8430,7 +8432,7 @@
           <a:lstStyle/>
           <a:p>
             <a:r>
-              <a:t>What to take away. With a payload on board, the period to watch is about 4.2 seconds, where the buoys rock hard on their gimbals, and that holds whether the payload is level or not. The tilt itself matters for freeboard and for pitch near the heave resonance. The analysis is linear and in regular waves along the shift; the large rocking angles are past FloatSim's small-angle range, so their size is indicative.</a:t>
+              <a:t>For the payload's lateral restraint, the static tilt is the biggest load. Tilted 10 degrees, the payload feels a constant 1.7 metres per second squared along the deck from gravity alone, about 0.17 g, before any wave. The waves add at most about 0.8 on top, for a total of about a quarter of g at H = 0.1 m.</a:t>
             </a:r>
           </a:p>
         </p:txBody>
@@ -8500,7 +8502,7 @@
           <a:lstStyle/>
           <a:p>
             <a:r>
-              <a:t>For reference: the FloatSim change behind these results. The weight preload is opt-in. It adds every body's weight and each floating body's buoyancy, solves the static equilibrium through the joints, carries the joint loads in the dynamics, and refuses any model whose loads leave it without restoring. It was validated against a closed-form pinned float, against the full test suite with the switch off, and against this study's hand statics on the real cluster.</a:t>
+              <a:t>Wouldn't each buoy rock at its own period once the load is shifted? On its own, yes: at 10 degrees the cluster's loaded pair is softer and would rock at about 4.45 seconds, the other pair at about 4.0. But they all hang from the same hub. In the mode the waves drive, every buoy leans the same way while the hub slides under them, so they rock together at one period, set by the sum of their stiffnesses. Shifting the payload softens one side and stiffens the other by almost the same amount, so the sum, and the period, hardly change.</a:t>
             </a:r>
           </a:p>
         </p:txBody>
@@ -8570,7 +8572,7 @@
           <a:lstStyle/>
           <a:p>
             <a:r>
-              <a:t>What loading a buoy does. Each buoy carries its share of the hub, deck and payload on its pin, and sinks until the extra buoyancy carries it. Sinking raises the buoy's own righting, because the new buoyancy is added high up the spar. But the load sits on the pin 1.62 m above the buoy's centre of gravity, and when the buoy leans that load pushes it further over: P times L. That grows faster than the righting, so the net rocking stiffness falls as the buoy is loaded. Shifting the payload loads the near buoys more and the far ones less: the near side sinks deeper, loses freeboard and gets softer; the far side the opposite.</a:t>
+              <a:t>What to take away. With a payload on board, the period to watch is about 4.2 seconds, where the buoys rock hard on their gimbals, and that holds whether the payload is level or not. The tilt itself matters for freeboard and for pitch near the heave resonance. The analysis is linear and in regular waves along the shift; the large rocking angles are past FloatSim's small-angle range, so their size is indicative.</a:t>
             </a:r>
           </a:p>
         </p:txBody>
@@ -8596,6 +8598,146 @@
 </file>
 
 <file path=ppt/notesSlides/notesSlide17.xml><?xml version="1.0" encoding="utf-8"?>
+<p:notes xmlns:a="http://schemas.openxmlformats.org/drawingml/2006/main" xmlns:p="http://schemas.openxmlformats.org/presentationml/2006/main" xmlns:r="http://schemas.openxmlformats.org/officeDocument/2006/relationships">
+  <p:cSld>
+    <p:spTree>
+      <p:nvGrpSpPr>
+        <p:cNvPr id="1" name=""/>
+        <p:cNvGrpSpPr/>
+        <p:nvPr/>
+      </p:nvGrpSpPr>
+      <p:grpSpPr>
+        <a:xfrm>
+          <a:off x="0" y="0"/>
+          <a:ext cx="0" cy="0"/>
+          <a:chOff x="0" y="0"/>
+          <a:chExt cx="0" cy="0"/>
+        </a:xfrm>
+      </p:grpSpPr>
+      <p:sp>
+        <p:nvSpPr>
+          <p:cNvPr id="2" name="Slide Image Placeholder 1"/>
+          <p:cNvSpPr>
+            <a:spLocks noGrp="1"/>
+          </p:cNvSpPr>
+          <p:nvPr>
+            <p:ph type="sldImg" idx="2"/>
+          </p:nvPr>
+        </p:nvSpPr>
+        <p:spPr/>
+      </p:sp>
+      <p:sp>
+        <p:nvSpPr>
+          <p:cNvPr id="3" name="Notes Placeholder 2"/>
+          <p:cNvSpPr>
+            <a:spLocks noGrp="1"/>
+          </p:cNvSpPr>
+          <p:nvPr>
+            <p:ph type="body" idx="3" sz="quarter"/>
+          </p:nvPr>
+        </p:nvSpPr>
+        <p:spPr/>
+        <p:txBody>
+          <a:bodyPr/>
+          <a:lstStyle/>
+          <a:p>
+            <a:r>
+              <a:t>For reference: the FloatSim change behind these results. The weight preload is opt-in. It adds every body's weight and each floating body's buoyancy, solves the static equilibrium through the joints, carries the joint loads in the dynamics, and refuses any model whose loads leave it without restoring. It was validated against a closed-form pinned float, against the full test suite with the switch off, and against this study's hand statics on the real cluster.</a:t>
+            </a:r>
+          </a:p>
+        </p:txBody>
+      </p:sp>
+      <p:sp>
+        <p:nvSpPr>
+          <p:cNvPr id="4" name="Slide Number Placeholder 3"/>
+          <p:cNvSpPr>
+            <a:spLocks noGrp="1"/>
+          </p:cNvSpPr>
+          <p:nvPr>
+            <p:ph type="sldNum" idx="5" sz="quarter"/>
+          </p:nvPr>
+        </p:nvSpPr>
+        <p:spPr/>
+      </p:sp>
+    </p:spTree>
+  </p:cSld>
+  <p:clrMapOvr>
+    <a:masterClrMapping/>
+  </p:clrMapOvr>
+</p:notes>
+</file>
+
+<file path=ppt/notesSlides/notesSlide18.xml><?xml version="1.0" encoding="utf-8"?>
+<p:notes xmlns:a="http://schemas.openxmlformats.org/drawingml/2006/main" xmlns:p="http://schemas.openxmlformats.org/presentationml/2006/main" xmlns:r="http://schemas.openxmlformats.org/officeDocument/2006/relationships">
+  <p:cSld>
+    <p:spTree>
+      <p:nvGrpSpPr>
+        <p:cNvPr id="1" name=""/>
+        <p:cNvGrpSpPr/>
+        <p:nvPr/>
+      </p:nvGrpSpPr>
+      <p:grpSpPr>
+        <a:xfrm>
+          <a:off x="0" y="0"/>
+          <a:ext cx="0" cy="0"/>
+          <a:chOff x="0" y="0"/>
+          <a:chExt cx="0" cy="0"/>
+        </a:xfrm>
+      </p:grpSpPr>
+      <p:sp>
+        <p:nvSpPr>
+          <p:cNvPr id="2" name="Slide Image Placeholder 1"/>
+          <p:cNvSpPr>
+            <a:spLocks noGrp="1"/>
+          </p:cNvSpPr>
+          <p:nvPr>
+            <p:ph type="sldImg" idx="2"/>
+          </p:nvPr>
+        </p:nvSpPr>
+        <p:spPr/>
+      </p:sp>
+      <p:sp>
+        <p:nvSpPr>
+          <p:cNvPr id="3" name="Notes Placeholder 2"/>
+          <p:cNvSpPr>
+            <a:spLocks noGrp="1"/>
+          </p:cNvSpPr>
+          <p:nvPr>
+            <p:ph type="body" idx="3" sz="quarter"/>
+          </p:nvPr>
+        </p:nvSpPr>
+        <p:spPr/>
+        <p:txBody>
+          <a:bodyPr/>
+          <a:lstStyle/>
+          <a:p>
+            <a:r>
+              <a:t>What loading a buoy does. Each buoy carries its share of the hub, deck and payload on its pin, and sinks until the extra buoyancy carries it. Sinking raises the buoy's own righting, because the new buoyancy is added high up the spar. But the load sits on the pin 1.62 m above the buoy's centre of gravity, and when the buoy leans that load pushes it further over: P times L. That grows faster than the righting, so the net rocking stiffness falls as the buoy is loaded. Shifting the payload loads the near buoys more and the far ones less: the near side sinks deeper, loses freeboard and gets softer; the far side the opposite.</a:t>
+            </a:r>
+          </a:p>
+        </p:txBody>
+      </p:sp>
+      <p:sp>
+        <p:nvSpPr>
+          <p:cNvPr id="4" name="Slide Number Placeholder 3"/>
+          <p:cNvSpPr>
+            <a:spLocks noGrp="1"/>
+          </p:cNvSpPr>
+          <p:nvPr>
+            <p:ph type="sldNum" idx="5" sz="quarter"/>
+          </p:nvPr>
+        </p:nvSpPr>
+        <p:spPr/>
+      </p:sp>
+    </p:spTree>
+  </p:cSld>
+  <p:clrMapOvr>
+    <a:masterClrMapping/>
+  </p:clrMapOvr>
+</p:notes>
+</file>
+
+<file path=ppt/notesSlides/notesSlide19.xml><?xml version="1.0" encoding="utf-8"?>
 <p:notes xmlns:a="http://schemas.openxmlformats.org/drawingml/2006/main" xmlns:p="http://schemas.openxmlformats.org/presentationml/2006/main" xmlns:r="http://schemas.openxmlformats.org/officeDocument/2006/relationships">
   <p:cSld>
     <p:spTree>
@@ -12500,6 +12642,388 @@
                 </a:solidFill>
                 <a:latin typeface="Calibri"/>
               </a:rPr>
+              <a:t>Watch it move: 2.65 s, the heave and pitch resonance</a:t>
+            </a:r>
+          </a:p>
+        </p:txBody>
+      </p:sp>
+      <p:sp>
+        <p:nvSpPr>
+          <p:cNvPr id="3" name="TextBox 2"/>
+          <p:cNvSpPr txBox="1"/>
+          <p:nvPr/>
+        </p:nvSpPr>
+        <p:spPr>
+          <a:xfrm>
+            <a:off x="548640" y="987552"/>
+            <a:ext cx="11064240" cy="411480"/>
+          </a:xfrm>
+          <a:prstGeom prst="rect">
+            <a:avLst/>
+          </a:prstGeom>
+          <a:noFill/>
+        </p:spPr>
+        <p:txBody>
+          <a:bodyPr wrap="square" anchor="t" lIns="0" rIns="0">
+            <a:spAutoFit/>
+          </a:bodyPr>
+          <a:lstStyle/>
+          <a:p>
+            <a:pPr algn="l">
+              <a:spcAft>
+                <a:spcPts val="600"/>
+              </a:spcAft>
+            </a:pPr>
+            <a:r>
+              <a:rPr sz="1600" b="0" i="0">
+                <a:solidFill>
+                  <a:srgbClr val="5C6B75"/>
+                </a:solidFill>
+                <a:latin typeface="Calibri"/>
+              </a:rPr>
+              <a:t>Payload shifted to 10°, H = 0.1 m · FloatSim with its weight preload · true scale, real time · plays in slide show</a:t>
+            </a:r>
+          </a:p>
+        </p:txBody>
+      </p:sp>
+      <p:pic>
+        <p:nvPicPr>
+          <p:cNvPr id="4" name="Picture 3" descr="wanim_cluster_T2.65.gif"/>
+          <p:cNvPicPr>
+            <a:picLocks noChangeAspect="1"/>
+          </p:cNvPicPr>
+          <p:nvPr/>
+        </p:nvPicPr>
+        <p:blipFill>
+          <a:blip r:embed="rId3"/>
+          <a:stretch>
+            <a:fillRect/>
+          </a:stretch>
+        </p:blipFill>
+        <p:spPr>
+          <a:xfrm>
+            <a:off x="685800" y="1371600"/>
+            <a:ext cx="5029200" cy="4859227"/>
+          </a:xfrm>
+          <a:prstGeom prst="rect">
+            <a:avLst/>
+          </a:prstGeom>
+        </p:spPr>
+      </p:pic>
+      <p:pic>
+        <p:nvPicPr>
+          <p:cNvPr id="5" name="Picture 4" descr="wanim_platform_T2.65.gif"/>
+          <p:cNvPicPr>
+            <a:picLocks noChangeAspect="1"/>
+          </p:cNvPicPr>
+          <p:nvPr/>
+        </p:nvPicPr>
+        <p:blipFill>
+          <a:blip r:embed="rId4"/>
+          <a:stretch>
+            <a:fillRect/>
+          </a:stretch>
+        </p:blipFill>
+        <p:spPr>
+          <a:xfrm>
+            <a:off x="6446520" y="1371600"/>
+            <a:ext cx="5029200" cy="4859227"/>
+          </a:xfrm>
+          <a:prstGeom prst="rect">
+            <a:avLst/>
+          </a:prstGeom>
+        </p:spPr>
+      </p:pic>
+      <p:sp>
+        <p:nvSpPr>
+          <p:cNvPr id="6" name="TextBox 5"/>
+          <p:cNvSpPr txBox="1"/>
+          <p:nvPr/>
+        </p:nvSpPr>
+        <p:spPr>
+          <a:xfrm>
+            <a:off x="685800" y="6263640"/>
+            <a:ext cx="10835640" cy="548640"/>
+          </a:xfrm>
+          <a:prstGeom prst="rect">
+            <a:avLst/>
+          </a:prstGeom>
+          <a:noFill/>
+        </p:spPr>
+        <p:txBody>
+          <a:bodyPr wrap="square" anchor="t" lIns="0" rIns="0">
+            <a:spAutoFit/>
+          </a:bodyPr>
+          <a:lstStyle/>
+          <a:p>
+            <a:pPr algn="l">
+              <a:spcAft>
+                <a:spcPts val="600"/>
+              </a:spcAft>
+            </a:pPr>
+            <a:r>
+              <a:rPr sz="1300" b="0" i="0">
+                <a:solidFill>
+                  <a:srgbClr val="2B3A44"/>
+                </a:solidFill>
+                <a:latin typeface="Calibri"/>
+              </a:rPr>
+              <a:t>The whole article heaves and pitches about its tilt: hub ±3.8°, deck ±3.1°; heave 66 / 50 mm. The buoys hang nearly straight (±4.3° / ±3.8°); the lowest pin keeps 389 / 282 mm.</a:t>
+            </a:r>
+          </a:p>
+        </p:txBody>
+      </p:sp>
+    </p:spTree>
+  </p:cSld>
+  <p:clrMapOvr>
+    <a:masterClrMapping/>
+  </p:clrMapOvr>
+</p:sld>
+</file>
+
+<file path=ppt/slides/slide11.xml><?xml version="1.0" encoding="utf-8"?>
+<p:sld xmlns:a="http://schemas.openxmlformats.org/drawingml/2006/main" xmlns:p="http://schemas.openxmlformats.org/presentationml/2006/main" xmlns:r="http://schemas.openxmlformats.org/officeDocument/2006/relationships">
+  <p:cSld>
+    <p:bg>
+      <p:bgPr>
+        <a:solidFill>
+          <a:srgbClr val="FFFFFF"/>
+        </a:solidFill>
+        <a:effectLst/>
+      </p:bgPr>
+    </p:bg>
+    <p:spTree>
+      <p:nvGrpSpPr>
+        <p:cNvPr id="1" name=""/>
+        <p:cNvGrpSpPr/>
+        <p:nvPr/>
+      </p:nvGrpSpPr>
+      <p:grpSpPr/>
+      <p:sp>
+        <p:nvSpPr>
+          <p:cNvPr id="2" name="TextBox 1"/>
+          <p:cNvSpPr txBox="1"/>
+          <p:nvPr/>
+        </p:nvSpPr>
+        <p:spPr>
+          <a:xfrm>
+            <a:off x="548640" y="347472"/>
+            <a:ext cx="11064240" cy="685800"/>
+          </a:xfrm>
+          <a:prstGeom prst="rect">
+            <a:avLst/>
+          </a:prstGeom>
+          <a:noFill/>
+        </p:spPr>
+        <p:txBody>
+          <a:bodyPr wrap="square" anchor="t" lIns="0" rIns="0">
+            <a:spAutoFit/>
+          </a:bodyPr>
+          <a:lstStyle/>
+          <a:p>
+            <a:pPr algn="l">
+              <a:spcAft>
+                <a:spcPts val="600"/>
+              </a:spcAft>
+            </a:pPr>
+            <a:r>
+              <a:rPr sz="3200" b="1" i="0">
+                <a:solidFill>
+                  <a:srgbClr val="14232E"/>
+                </a:solidFill>
+                <a:latin typeface="Calibri"/>
+              </a:rPr>
+              <a:t>Watch it move: 4.2 s, the buoys' rocking resonance</a:t>
+            </a:r>
+          </a:p>
+        </p:txBody>
+      </p:sp>
+      <p:sp>
+        <p:nvSpPr>
+          <p:cNvPr id="3" name="TextBox 2"/>
+          <p:cNvSpPr txBox="1"/>
+          <p:nvPr/>
+        </p:nvSpPr>
+        <p:spPr>
+          <a:xfrm>
+            <a:off x="548640" y="987552"/>
+            <a:ext cx="11064240" cy="411480"/>
+          </a:xfrm>
+          <a:prstGeom prst="rect">
+            <a:avLst/>
+          </a:prstGeom>
+          <a:noFill/>
+        </p:spPr>
+        <p:txBody>
+          <a:bodyPr wrap="square" anchor="t" lIns="0" rIns="0">
+            <a:spAutoFit/>
+          </a:bodyPr>
+          <a:lstStyle/>
+          <a:p>
+            <a:pPr algn="l">
+              <a:spcAft>
+                <a:spcPts val="600"/>
+              </a:spcAft>
+            </a:pPr>
+            <a:r>
+              <a:rPr sz="1600" b="0" i="0">
+                <a:solidFill>
+                  <a:srgbClr val="5C6B75"/>
+                </a:solidFill>
+                <a:latin typeface="Calibri"/>
+              </a:rPr>
+              <a:t>Payload shifted to 10°, H = 0.1 m · FloatSim with its weight preload · true scale, real time · plays in slide show</a:t>
+            </a:r>
+          </a:p>
+        </p:txBody>
+      </p:sp>
+      <p:pic>
+        <p:nvPicPr>
+          <p:cNvPr id="4" name="Picture 3" descr="wanim_cluster_T4.2.gif"/>
+          <p:cNvPicPr>
+            <a:picLocks noChangeAspect="1"/>
+          </p:cNvPicPr>
+          <p:nvPr/>
+        </p:nvPicPr>
+        <p:blipFill>
+          <a:blip r:embed="rId3"/>
+          <a:stretch>
+            <a:fillRect/>
+          </a:stretch>
+        </p:blipFill>
+        <p:spPr>
+          <a:xfrm>
+            <a:off x="685800" y="1371600"/>
+            <a:ext cx="5029200" cy="4859227"/>
+          </a:xfrm>
+          <a:prstGeom prst="rect">
+            <a:avLst/>
+          </a:prstGeom>
+        </p:spPr>
+      </p:pic>
+      <p:pic>
+        <p:nvPicPr>
+          <p:cNvPr id="5" name="Picture 4" descr="wanim_platform_T4.2.gif"/>
+          <p:cNvPicPr>
+            <a:picLocks noChangeAspect="1"/>
+          </p:cNvPicPr>
+          <p:nvPr/>
+        </p:nvPicPr>
+        <p:blipFill>
+          <a:blip r:embed="rId4"/>
+          <a:stretch>
+            <a:fillRect/>
+          </a:stretch>
+        </p:blipFill>
+        <p:spPr>
+          <a:xfrm>
+            <a:off x="6446520" y="1371600"/>
+            <a:ext cx="5029200" cy="4859227"/>
+          </a:xfrm>
+          <a:prstGeom prst="rect">
+            <a:avLst/>
+          </a:prstGeom>
+        </p:spPr>
+      </p:pic>
+      <p:sp>
+        <p:nvSpPr>
+          <p:cNvPr id="6" name="TextBox 5"/>
+          <p:cNvSpPr txBox="1"/>
+          <p:nvPr/>
+        </p:nvSpPr>
+        <p:spPr>
+          <a:xfrm>
+            <a:off x="685800" y="6263640"/>
+            <a:ext cx="10835640" cy="548640"/>
+          </a:xfrm>
+          <a:prstGeom prst="rect">
+            <a:avLst/>
+          </a:prstGeom>
+          <a:noFill/>
+        </p:spPr>
+        <p:txBody>
+          <a:bodyPr wrap="square" anchor="t" lIns="0" rIns="0">
+            <a:spAutoFit/>
+          </a:bodyPr>
+          <a:lstStyle/>
+          <a:p>
+            <a:pPr algn="l">
+              <a:spcAft>
+                <a:spcPts val="600"/>
+              </a:spcAft>
+            </a:pPr>
+            <a:r>
+              <a:rPr sz="1300" b="0" i="0">
+                <a:solidFill>
+                  <a:srgbClr val="2B3A44"/>
+                </a:solidFill>
+                <a:latin typeface="Calibri"/>
+              </a:rPr>
+              <a:t>The buoys swing together on their pins (±12.6° cluster, ±11.2° platform) while the hub / deck slides along the waves (0.48 / 0.41 m/s² lateral at the payload); the article barely pitches (±1.0° / ±1.0°).</a:t>
+            </a:r>
+          </a:p>
+        </p:txBody>
+      </p:sp>
+    </p:spTree>
+  </p:cSld>
+  <p:clrMapOvr>
+    <a:masterClrMapping/>
+  </p:clrMapOvr>
+</p:sld>
+</file>
+
+<file path=ppt/slides/slide12.xml><?xml version="1.0" encoding="utf-8"?>
+<p:sld xmlns:a="http://schemas.openxmlformats.org/drawingml/2006/main" xmlns:p="http://schemas.openxmlformats.org/presentationml/2006/main" xmlns:r="http://schemas.openxmlformats.org/officeDocument/2006/relationships">
+  <p:cSld>
+    <p:bg>
+      <p:bgPr>
+        <a:solidFill>
+          <a:srgbClr val="FFFFFF"/>
+        </a:solidFill>
+        <a:effectLst/>
+      </p:bgPr>
+    </p:bg>
+    <p:spTree>
+      <p:nvGrpSpPr>
+        <p:cNvPr id="1" name=""/>
+        <p:cNvGrpSpPr/>
+        <p:nvPr/>
+      </p:nvGrpSpPr>
+      <p:grpSpPr/>
+      <p:sp>
+        <p:nvSpPr>
+          <p:cNvPr id="2" name="TextBox 1"/>
+          <p:cNvSpPr txBox="1"/>
+          <p:nvPr/>
+        </p:nvSpPr>
+        <p:spPr>
+          <a:xfrm>
+            <a:off x="548640" y="347472"/>
+            <a:ext cx="11064240" cy="685800"/>
+          </a:xfrm>
+          <a:prstGeom prst="rect">
+            <a:avLst/>
+          </a:prstGeom>
+          <a:noFill/>
+        </p:spPr>
+        <p:txBody>
+          <a:bodyPr wrap="square" anchor="t" lIns="0" rIns="0">
+            <a:spAutoFit/>
+          </a:bodyPr>
+          <a:lstStyle/>
+          <a:p>
+            <a:pPr algn="l">
+              <a:spcAft>
+                <a:spcPts val="600"/>
+              </a:spcAft>
+            </a:pPr>
+            <a:r>
+              <a:rPr sz="3200" b="1" i="0">
+                <a:solidFill>
+                  <a:srgbClr val="14232E"/>
+                </a:solidFill>
+                <a:latin typeface="Calibri"/>
+              </a:rPr>
               <a:t>Accelerations at the payload: vertical is small</a:t>
             </a:r>
           </a:p>
@@ -12627,7 +13151,7 @@
 </p:sld>
 </file>
 
-<file path=ppt/slides/slide11.xml><?xml version="1.0" encoding="utf-8"?>
+<file path=ppt/slides/slide13.xml><?xml version="1.0" encoding="utf-8"?>
 <p:sld xmlns:a="http://schemas.openxmlformats.org/drawingml/2006/main" xmlns:p="http://schemas.openxmlformats.org/presentationml/2006/main" xmlns:r="http://schemas.openxmlformats.org/officeDocument/2006/relationships">
   <p:cSld>
     <p:bg>
@@ -12865,7 +13389,7 @@
 </p:sld>
 </file>
 
-<file path=ppt/slides/slide12.xml><?xml version="1.0" encoding="utf-8"?>
+<file path=ppt/slides/slide14.xml><?xml version="1.0" encoding="utf-8"?>
 <p:sld xmlns:a="http://schemas.openxmlformats.org/drawingml/2006/main" xmlns:p="http://schemas.openxmlformats.org/presentationml/2006/main" xmlns:r="http://schemas.openxmlformats.org/officeDocument/2006/relationships">
   <p:cSld>
     <p:bg>
@@ -14283,7 +14807,7 @@
 </p:sld>
 </file>
 
-<file path=ppt/slides/slide13.xml><?xml version="1.0" encoding="utf-8"?>
+<file path=ppt/slides/slide15.xml><?xml version="1.0" encoding="utf-8"?>
 <p:sld xmlns:a="http://schemas.openxmlformats.org/drawingml/2006/main" xmlns:p="http://schemas.openxmlformats.org/presentationml/2006/main" xmlns:r="http://schemas.openxmlformats.org/officeDocument/2006/relationships">
   <p:cSld>
     <p:bg>
@@ -15249,7 +15773,7 @@
 </p:sld>
 </file>
 
-<file path=ppt/slides/slide14.xml><?xml version="1.0" encoding="utf-8"?>
+<file path=ppt/slides/slide16.xml><?xml version="1.0" encoding="utf-8"?>
 <p:sld xmlns:a="http://schemas.openxmlformats.org/drawingml/2006/main" xmlns:p="http://schemas.openxmlformats.org/presentationml/2006/main" xmlns:r="http://schemas.openxmlformats.org/officeDocument/2006/relationships">
   <p:cSld>
     <p:bg>
@@ -15755,7 +16279,7 @@
 </p:sld>
 </file>
 
-<file path=ppt/slides/slide15.xml><?xml version="1.0" encoding="utf-8"?>
+<file path=ppt/slides/slide17.xml><?xml version="1.0" encoding="utf-8"?>
 <p:sld xmlns:a="http://schemas.openxmlformats.org/drawingml/2006/main" xmlns:p="http://schemas.openxmlformats.org/presentationml/2006/main" xmlns:r="http://schemas.openxmlformats.org/officeDocument/2006/relationships">
   <p:cSld>
     <p:bg>
@@ -16200,7 +16724,7 @@
 </p:sld>
 </file>
 
-<file path=ppt/slides/slide16.xml><?xml version="1.0" encoding="utf-8"?>
+<file path=ppt/slides/slide18.xml><?xml version="1.0" encoding="utf-8"?>
 <p:sld xmlns:a="http://schemas.openxmlformats.org/drawingml/2006/main" xmlns:p="http://schemas.openxmlformats.org/presentationml/2006/main" xmlns:r="http://schemas.openxmlformats.org/officeDocument/2006/relationships">
   <p:cSld>
     <p:bg>
@@ -17503,7 +18027,7 @@
 </p:sld>
 </file>
 
-<file path=ppt/slides/slide17.xml><?xml version="1.0" encoding="utf-8"?>
+<file path=ppt/slides/slide19.xml><?xml version="1.0" encoding="utf-8"?>
 <p:sld xmlns:a="http://schemas.openxmlformats.org/drawingml/2006/main" xmlns:p="http://schemas.openxmlformats.org/presentationml/2006/main" xmlns:r="http://schemas.openxmlformats.org/officeDocument/2006/relationships">
   <p:cSld>
     <p:bg>
